--- a/Diffusion_as_Memory_update.pptx
+++ b/Diffusion_as_Memory_update.pptx
@@ -5,29 +5,27 @@
     <p:sldMasterId id="2147483648" r:id="rId1"/>
   </p:sldMasterIdLst>
   <p:sldIdLst>
-    <p:sldId id="256" r:id="rId7"/>
-    <p:sldId id="257" r:id="rId8"/>
-    <p:sldId id="258" r:id="rId9"/>
-    <p:sldId id="259" r:id="rId10"/>
-    <p:sldId id="260" r:id="rId11"/>
-    <p:sldId id="261" r:id="rId12"/>
-    <p:sldId id="262" r:id="rId13"/>
-    <p:sldId id="263" r:id="rId14"/>
-    <p:sldId id="264" r:id="rId15"/>
-    <p:sldId id="265" r:id="rId16"/>
-    <p:sldId id="266" r:id="rId17"/>
-    <p:sldId id="267" r:id="rId18"/>
-    <p:sldId id="268" r:id="rId19"/>
-    <p:sldId id="269" r:id="rId20"/>
-    <p:sldId id="270" r:id="rId21"/>
-    <p:sldId id="271" r:id="rId22"/>
-    <p:sldId id="272" r:id="rId23"/>
-    <p:sldId id="273" r:id="rId24"/>
-    <p:sldId id="274" r:id="rId25"/>
-    <p:sldId id="275" r:id="rId26"/>
-    <p:sldId id="276" r:id="rId27"/>
+    <p:sldId id="256" r:id="rId2"/>
+    <p:sldId id="258" r:id="rId3"/>
+    <p:sldId id="277" r:id="rId4"/>
+    <p:sldId id="278" r:id="rId5"/>
+    <p:sldId id="260" r:id="rId6"/>
+    <p:sldId id="261" r:id="rId7"/>
+    <p:sldId id="262" r:id="rId8"/>
+    <p:sldId id="265" r:id="rId9"/>
+    <p:sldId id="266" r:id="rId10"/>
+    <p:sldId id="267" r:id="rId11"/>
+    <p:sldId id="268" r:id="rId12"/>
+    <p:sldId id="269" r:id="rId13"/>
+    <p:sldId id="270" r:id="rId14"/>
+    <p:sldId id="271" r:id="rId15"/>
+    <p:sldId id="272" r:id="rId16"/>
+    <p:sldId id="273" r:id="rId17"/>
+    <p:sldId id="274" r:id="rId18"/>
+    <p:sldId id="275" r:id="rId19"/>
+    <p:sldId id="276" r:id="rId20"/>
   </p:sldIdLst>
-  <p:sldSz cx="12191695" cy="6858000" type="screen4x3"/>
+  <p:sldSz cx="12192000" cy="6858000"/>
   <p:notesSz cx="6858000" cy="9144000"/>
   <p:defaultTextStyle>
     <a:defPPr>
@@ -124,6 +122,22 @@
       </a:defRPr>
     </a:lvl9pPr>
   </p:defaultTextStyle>
+  <p:extLst>
+    <p:ext uri="{EFAFB233-063F-42B5-8137-9DF3F51BA10A}">
+      <p15:sldGuideLst xmlns:p15="http://schemas.microsoft.com/office/powerpoint/2012/main">
+        <p15:guide id="1" orient="horz" pos="2160">
+          <p15:clr>
+            <a:srgbClr val="A4A3A4"/>
+          </p15:clr>
+        </p15:guide>
+        <p15:guide id="2" pos="2880">
+          <p15:clr>
+            <a:srgbClr val="A4A3A4"/>
+          </p15:clr>
+        </p15:guide>
+      </p15:sldGuideLst>
+    </p:ext>
+  </p:extLst>
 </p:presentation>
 </file>
 
@@ -165,10 +179,9 @@
           <a:lstStyle/>
           <a:p>
             <a:r>
-              <a:rPr lang="en-US" smtClean="0"/>
+              <a:rPr lang="en-US"/>
               <a:t>Click to edit Master title style</a:t>
             </a:r>
-            <a:endParaRPr lang="en-US"/>
           </a:p>
         </p:txBody>
       </p:sp>
@@ -284,10 +297,9 @@
           </a:lstStyle>
           <a:p>
             <a:r>
-              <a:rPr lang="en-US" smtClean="0"/>
+              <a:rPr lang="en-US"/>
               <a:t>Click to edit Master subtitle style</a:t>
             </a:r>
-            <a:endParaRPr lang="en-US"/>
           </a:p>
         </p:txBody>
       </p:sp>
@@ -308,7 +320,7 @@
           <a:p>
             <a:fld id="{5BCAD085-E8A6-8845-BD4E-CB4CCA059FC4}" type="datetimeFigureOut">
               <a:rPr lang="en-US" smtClean="0"/>
-              <a:t>1/27/13</a:t>
+              <a:t>9/11/2026</a:t>
             </a:fld>
             <a:endParaRPr lang="en-US"/>
           </a:p>
@@ -402,10 +414,9 @@
           <a:lstStyle/>
           <a:p>
             <a:r>
-              <a:rPr lang="en-US" smtClean="0"/>
+              <a:rPr lang="en-US"/>
               <a:t>Click to edit Master title style</a:t>
             </a:r>
-            <a:endParaRPr lang="en-US"/>
           </a:p>
         </p:txBody>
       </p:sp>
@@ -426,38 +437,37 @@
           <a:p>
             <a:pPr lvl="0"/>
             <a:r>
-              <a:rPr lang="en-US" smtClean="0"/>
+              <a:rPr lang="en-US"/>
               <a:t>Click to edit Master text styles</a:t>
             </a:r>
           </a:p>
           <a:p>
             <a:pPr lvl="1"/>
             <a:r>
-              <a:rPr lang="en-US" smtClean="0"/>
+              <a:rPr lang="en-US"/>
               <a:t>Second level</a:t>
             </a:r>
           </a:p>
           <a:p>
             <a:pPr lvl="2"/>
             <a:r>
-              <a:rPr lang="en-US" smtClean="0"/>
+              <a:rPr lang="en-US"/>
               <a:t>Third level</a:t>
             </a:r>
           </a:p>
           <a:p>
             <a:pPr lvl="3"/>
             <a:r>
-              <a:rPr lang="en-US" smtClean="0"/>
+              <a:rPr lang="en-US"/>
               <a:t>Fourth level</a:t>
             </a:r>
           </a:p>
           <a:p>
             <a:pPr lvl="4"/>
             <a:r>
-              <a:rPr lang="en-US" smtClean="0"/>
+              <a:rPr lang="en-US"/>
               <a:t>Fifth level</a:t>
             </a:r>
-            <a:endParaRPr lang="en-US"/>
           </a:p>
         </p:txBody>
       </p:sp>
@@ -478,7 +488,7 @@
           <a:p>
             <a:fld id="{5BCAD085-E8A6-8845-BD4E-CB4CCA059FC4}" type="datetimeFigureOut">
               <a:rPr lang="en-US" smtClean="0"/>
-              <a:t>1/27/13</a:t>
+              <a:t>9/11/2026</a:t>
             </a:fld>
             <a:endParaRPr lang="en-US"/>
           </a:p>
@@ -577,10 +587,9 @@
           <a:lstStyle/>
           <a:p>
             <a:r>
-              <a:rPr lang="en-US" smtClean="0"/>
+              <a:rPr lang="en-US"/>
               <a:t>Click to edit Master title style</a:t>
             </a:r>
-            <a:endParaRPr lang="en-US"/>
           </a:p>
         </p:txBody>
       </p:sp>
@@ -606,38 +615,37 @@
           <a:p>
             <a:pPr lvl="0"/>
             <a:r>
-              <a:rPr lang="en-US" smtClean="0"/>
+              <a:rPr lang="en-US"/>
               <a:t>Click to edit Master text styles</a:t>
             </a:r>
           </a:p>
           <a:p>
             <a:pPr lvl="1"/>
             <a:r>
-              <a:rPr lang="en-US" smtClean="0"/>
+              <a:rPr lang="en-US"/>
               <a:t>Second level</a:t>
             </a:r>
           </a:p>
           <a:p>
             <a:pPr lvl="2"/>
             <a:r>
-              <a:rPr lang="en-US" smtClean="0"/>
+              <a:rPr lang="en-US"/>
               <a:t>Third level</a:t>
             </a:r>
           </a:p>
           <a:p>
             <a:pPr lvl="3"/>
             <a:r>
-              <a:rPr lang="en-US" smtClean="0"/>
+              <a:rPr lang="en-US"/>
               <a:t>Fourth level</a:t>
             </a:r>
           </a:p>
           <a:p>
             <a:pPr lvl="4"/>
             <a:r>
-              <a:rPr lang="en-US" smtClean="0"/>
+              <a:rPr lang="en-US"/>
               <a:t>Fifth level</a:t>
             </a:r>
-            <a:endParaRPr lang="en-US"/>
           </a:p>
         </p:txBody>
       </p:sp>
@@ -658,7 +666,7 @@
           <a:p>
             <a:fld id="{5BCAD085-E8A6-8845-BD4E-CB4CCA059FC4}" type="datetimeFigureOut">
               <a:rPr lang="en-US" smtClean="0"/>
-              <a:t>1/27/13</a:t>
+              <a:t>9/11/2026</a:t>
             </a:fld>
             <a:endParaRPr lang="en-US"/>
           </a:p>
@@ -752,10 +760,9 @@
           <a:lstStyle/>
           <a:p>
             <a:r>
-              <a:rPr lang="en-US" smtClean="0"/>
+              <a:rPr lang="en-US"/>
               <a:t>Click to edit Master title style</a:t>
             </a:r>
-            <a:endParaRPr lang="en-US"/>
           </a:p>
         </p:txBody>
       </p:sp>
@@ -776,38 +783,37 @@
           <a:p>
             <a:pPr lvl="0"/>
             <a:r>
-              <a:rPr lang="en-US" smtClean="0"/>
+              <a:rPr lang="en-US"/>
               <a:t>Click to edit Master text styles</a:t>
             </a:r>
           </a:p>
           <a:p>
             <a:pPr lvl="1"/>
             <a:r>
-              <a:rPr lang="en-US" smtClean="0"/>
+              <a:rPr lang="en-US"/>
               <a:t>Second level</a:t>
             </a:r>
           </a:p>
           <a:p>
             <a:pPr lvl="2"/>
             <a:r>
-              <a:rPr lang="en-US" smtClean="0"/>
+              <a:rPr lang="en-US"/>
               <a:t>Third level</a:t>
             </a:r>
           </a:p>
           <a:p>
             <a:pPr lvl="3"/>
             <a:r>
-              <a:rPr lang="en-US" smtClean="0"/>
+              <a:rPr lang="en-US"/>
               <a:t>Fourth level</a:t>
             </a:r>
           </a:p>
           <a:p>
             <a:pPr lvl="4"/>
             <a:r>
-              <a:rPr lang="en-US" smtClean="0"/>
+              <a:rPr lang="en-US"/>
               <a:t>Fifth level</a:t>
             </a:r>
-            <a:endParaRPr lang="en-US"/>
           </a:p>
         </p:txBody>
       </p:sp>
@@ -828,7 +834,7 @@
           <a:p>
             <a:fld id="{5BCAD085-E8A6-8845-BD4E-CB4CCA059FC4}" type="datetimeFigureOut">
               <a:rPr lang="en-US" smtClean="0"/>
-              <a:t>1/27/13</a:t>
+              <a:t>9/11/2026</a:t>
             </a:fld>
             <a:endParaRPr lang="en-US"/>
           </a:p>
@@ -931,10 +937,9 @@
           </a:lstStyle>
           <a:p>
             <a:r>
-              <a:rPr lang="en-US" smtClean="0"/>
+              <a:rPr lang="en-US"/>
               <a:t>Click to edit Master title style</a:t>
             </a:r>
-            <a:endParaRPr lang="en-US"/>
           </a:p>
         </p:txBody>
       </p:sp>
@@ -1051,7 +1056,7 @@
           <a:p>
             <a:pPr lvl="0"/>
             <a:r>
-              <a:rPr lang="en-US" smtClean="0"/>
+              <a:rPr lang="en-US"/>
               <a:t>Click to edit Master text styles</a:t>
             </a:r>
           </a:p>
@@ -1074,7 +1079,7 @@
           <a:p>
             <a:fld id="{5BCAD085-E8A6-8845-BD4E-CB4CCA059FC4}" type="datetimeFigureOut">
               <a:rPr lang="en-US" smtClean="0"/>
-              <a:t>1/27/13</a:t>
+              <a:t>9/11/2026</a:t>
             </a:fld>
             <a:endParaRPr lang="en-US"/>
           </a:p>
@@ -1168,10 +1173,9 @@
           <a:lstStyle/>
           <a:p>
             <a:r>
-              <a:rPr lang="en-US" smtClean="0"/>
+              <a:rPr lang="en-US"/>
               <a:t>Click to edit Master title style</a:t>
             </a:r>
-            <a:endParaRPr lang="en-US"/>
           </a:p>
         </p:txBody>
       </p:sp>
@@ -1225,38 +1229,37 @@
           <a:p>
             <a:pPr lvl="0"/>
             <a:r>
-              <a:rPr lang="en-US" smtClean="0"/>
+              <a:rPr lang="en-US"/>
               <a:t>Click to edit Master text styles</a:t>
             </a:r>
           </a:p>
           <a:p>
             <a:pPr lvl="1"/>
             <a:r>
-              <a:rPr lang="en-US" smtClean="0"/>
+              <a:rPr lang="en-US"/>
               <a:t>Second level</a:t>
             </a:r>
           </a:p>
           <a:p>
             <a:pPr lvl="2"/>
             <a:r>
-              <a:rPr lang="en-US" smtClean="0"/>
+              <a:rPr lang="en-US"/>
               <a:t>Third level</a:t>
             </a:r>
           </a:p>
           <a:p>
             <a:pPr lvl="3"/>
             <a:r>
-              <a:rPr lang="en-US" smtClean="0"/>
+              <a:rPr lang="en-US"/>
               <a:t>Fourth level</a:t>
             </a:r>
           </a:p>
           <a:p>
             <a:pPr lvl="4"/>
             <a:r>
-              <a:rPr lang="en-US" smtClean="0"/>
+              <a:rPr lang="en-US"/>
               <a:t>Fifth level</a:t>
             </a:r>
-            <a:endParaRPr lang="en-US"/>
           </a:p>
         </p:txBody>
       </p:sp>
@@ -1310,38 +1313,37 @@
           <a:p>
             <a:pPr lvl="0"/>
             <a:r>
-              <a:rPr lang="en-US" smtClean="0"/>
+              <a:rPr lang="en-US"/>
               <a:t>Click to edit Master text styles</a:t>
             </a:r>
           </a:p>
           <a:p>
             <a:pPr lvl="1"/>
             <a:r>
-              <a:rPr lang="en-US" smtClean="0"/>
+              <a:rPr lang="en-US"/>
               <a:t>Second level</a:t>
             </a:r>
           </a:p>
           <a:p>
             <a:pPr lvl="2"/>
             <a:r>
-              <a:rPr lang="en-US" smtClean="0"/>
+              <a:rPr lang="en-US"/>
               <a:t>Third level</a:t>
             </a:r>
           </a:p>
           <a:p>
             <a:pPr lvl="3"/>
             <a:r>
-              <a:rPr lang="en-US" smtClean="0"/>
+              <a:rPr lang="en-US"/>
               <a:t>Fourth level</a:t>
             </a:r>
           </a:p>
           <a:p>
             <a:pPr lvl="4"/>
             <a:r>
-              <a:rPr lang="en-US" smtClean="0"/>
+              <a:rPr lang="en-US"/>
               <a:t>Fifth level</a:t>
             </a:r>
-            <a:endParaRPr lang="en-US"/>
           </a:p>
         </p:txBody>
       </p:sp>
@@ -1362,7 +1364,7 @@
           <a:p>
             <a:fld id="{5BCAD085-E8A6-8845-BD4E-CB4CCA059FC4}" type="datetimeFigureOut">
               <a:rPr lang="en-US" smtClean="0"/>
-              <a:t>1/27/13</a:t>
+              <a:t>9/11/2026</a:t>
             </a:fld>
             <a:endParaRPr lang="en-US"/>
           </a:p>
@@ -1460,10 +1462,9 @@
           </a:lstStyle>
           <a:p>
             <a:r>
-              <a:rPr lang="en-US" smtClean="0"/>
+              <a:rPr lang="en-US"/>
               <a:t>Click to edit Master title style</a:t>
             </a:r>
-            <a:endParaRPr lang="en-US"/>
           </a:p>
         </p:txBody>
       </p:sp>
@@ -1526,7 +1527,7 @@
           <a:p>
             <a:pPr lvl="0"/>
             <a:r>
-              <a:rPr lang="en-US" smtClean="0"/>
+              <a:rPr lang="en-US"/>
               <a:t>Click to edit Master text styles</a:t>
             </a:r>
           </a:p>
@@ -1582,38 +1583,37 @@
           <a:p>
             <a:pPr lvl="0"/>
             <a:r>
-              <a:rPr lang="en-US" smtClean="0"/>
+              <a:rPr lang="en-US"/>
               <a:t>Click to edit Master text styles</a:t>
             </a:r>
           </a:p>
           <a:p>
             <a:pPr lvl="1"/>
             <a:r>
-              <a:rPr lang="en-US" smtClean="0"/>
+              <a:rPr lang="en-US"/>
               <a:t>Second level</a:t>
             </a:r>
           </a:p>
           <a:p>
             <a:pPr lvl="2"/>
             <a:r>
-              <a:rPr lang="en-US" smtClean="0"/>
+              <a:rPr lang="en-US"/>
               <a:t>Third level</a:t>
             </a:r>
           </a:p>
           <a:p>
             <a:pPr lvl="3"/>
             <a:r>
-              <a:rPr lang="en-US" smtClean="0"/>
+              <a:rPr lang="en-US"/>
               <a:t>Fourth level</a:t>
             </a:r>
           </a:p>
           <a:p>
             <a:pPr lvl="4"/>
             <a:r>
-              <a:rPr lang="en-US" smtClean="0"/>
+              <a:rPr lang="en-US"/>
               <a:t>Fifth level</a:t>
             </a:r>
-            <a:endParaRPr lang="en-US"/>
           </a:p>
         </p:txBody>
       </p:sp>
@@ -1676,7 +1676,7 @@
           <a:p>
             <a:pPr lvl="0"/>
             <a:r>
-              <a:rPr lang="en-US" smtClean="0"/>
+              <a:rPr lang="en-US"/>
               <a:t>Click to edit Master text styles</a:t>
             </a:r>
           </a:p>
@@ -1732,38 +1732,37 @@
           <a:p>
             <a:pPr lvl="0"/>
             <a:r>
-              <a:rPr lang="en-US" smtClean="0"/>
+              <a:rPr lang="en-US"/>
               <a:t>Click to edit Master text styles</a:t>
             </a:r>
           </a:p>
           <a:p>
             <a:pPr lvl="1"/>
             <a:r>
-              <a:rPr lang="en-US" smtClean="0"/>
+              <a:rPr lang="en-US"/>
               <a:t>Second level</a:t>
             </a:r>
           </a:p>
           <a:p>
             <a:pPr lvl="2"/>
             <a:r>
-              <a:rPr lang="en-US" smtClean="0"/>
+              <a:rPr lang="en-US"/>
               <a:t>Third level</a:t>
             </a:r>
           </a:p>
           <a:p>
             <a:pPr lvl="3"/>
             <a:r>
-              <a:rPr lang="en-US" smtClean="0"/>
+              <a:rPr lang="en-US"/>
               <a:t>Fourth level</a:t>
             </a:r>
           </a:p>
           <a:p>
             <a:pPr lvl="4"/>
             <a:r>
-              <a:rPr lang="en-US" smtClean="0"/>
+              <a:rPr lang="en-US"/>
               <a:t>Fifth level</a:t>
             </a:r>
-            <a:endParaRPr lang="en-US"/>
           </a:p>
         </p:txBody>
       </p:sp>
@@ -1784,7 +1783,7 @@
           <a:p>
             <a:fld id="{5BCAD085-E8A6-8845-BD4E-CB4CCA059FC4}" type="datetimeFigureOut">
               <a:rPr lang="en-US" smtClean="0"/>
-              <a:t>1/27/13</a:t>
+              <a:t>9/11/2026</a:t>
             </a:fld>
             <a:endParaRPr lang="en-US"/>
           </a:p>
@@ -1878,10 +1877,9 @@
           <a:lstStyle/>
           <a:p>
             <a:r>
-              <a:rPr lang="en-US" smtClean="0"/>
+              <a:rPr lang="en-US"/>
               <a:t>Click to edit Master title style</a:t>
             </a:r>
-            <a:endParaRPr lang="en-US"/>
           </a:p>
         </p:txBody>
       </p:sp>
@@ -1902,7 +1900,7 @@
           <a:p>
             <a:fld id="{5BCAD085-E8A6-8845-BD4E-CB4CCA059FC4}" type="datetimeFigureOut">
               <a:rPr lang="en-US" smtClean="0"/>
-              <a:t>1/27/13</a:t>
+              <a:t>9/11/2026</a:t>
             </a:fld>
             <a:endParaRPr lang="en-US"/>
           </a:p>
@@ -1997,7 +1995,7 @@
           <a:p>
             <a:fld id="{5BCAD085-E8A6-8845-BD4E-CB4CCA059FC4}" type="datetimeFigureOut">
               <a:rPr lang="en-US" smtClean="0"/>
-              <a:t>1/27/13</a:t>
+              <a:t>9/11/2026</a:t>
             </a:fld>
             <a:endParaRPr lang="en-US"/>
           </a:p>
@@ -2100,10 +2098,9 @@
           </a:lstStyle>
           <a:p>
             <a:r>
-              <a:rPr lang="en-US" smtClean="0"/>
+              <a:rPr lang="en-US"/>
               <a:t>Click to edit Master title style</a:t>
             </a:r>
-            <a:endParaRPr lang="en-US"/>
           </a:p>
         </p:txBody>
       </p:sp>
@@ -2157,38 +2154,37 @@
           <a:p>
             <a:pPr lvl="0"/>
             <a:r>
-              <a:rPr lang="en-US" smtClean="0"/>
+              <a:rPr lang="en-US"/>
               <a:t>Click to edit Master text styles</a:t>
             </a:r>
           </a:p>
           <a:p>
             <a:pPr lvl="1"/>
             <a:r>
-              <a:rPr lang="en-US" smtClean="0"/>
+              <a:rPr lang="en-US"/>
               <a:t>Second level</a:t>
             </a:r>
           </a:p>
           <a:p>
             <a:pPr lvl="2"/>
             <a:r>
-              <a:rPr lang="en-US" smtClean="0"/>
+              <a:rPr lang="en-US"/>
               <a:t>Third level</a:t>
             </a:r>
           </a:p>
           <a:p>
             <a:pPr lvl="3"/>
             <a:r>
-              <a:rPr lang="en-US" smtClean="0"/>
+              <a:rPr lang="en-US"/>
               <a:t>Fourth level</a:t>
             </a:r>
           </a:p>
           <a:p>
             <a:pPr lvl="4"/>
             <a:r>
-              <a:rPr lang="en-US" smtClean="0"/>
+              <a:rPr lang="en-US"/>
               <a:t>Fifth level</a:t>
             </a:r>
-            <a:endParaRPr lang="en-US"/>
           </a:p>
         </p:txBody>
       </p:sp>
@@ -2251,7 +2247,7 @@
           <a:p>
             <a:pPr lvl="0"/>
             <a:r>
-              <a:rPr lang="en-US" smtClean="0"/>
+              <a:rPr lang="en-US"/>
               <a:t>Click to edit Master text styles</a:t>
             </a:r>
           </a:p>
@@ -2274,7 +2270,7 @@
           <a:p>
             <a:fld id="{5BCAD085-E8A6-8845-BD4E-CB4CCA059FC4}" type="datetimeFigureOut">
               <a:rPr lang="en-US" smtClean="0"/>
-              <a:t>1/27/13</a:t>
+              <a:t>9/11/2026</a:t>
             </a:fld>
             <a:endParaRPr lang="en-US"/>
           </a:p>
@@ -2377,10 +2373,9 @@
           </a:lstStyle>
           <a:p>
             <a:r>
-              <a:rPr lang="en-US" smtClean="0"/>
+              <a:rPr lang="en-US"/>
               <a:t>Click to edit Master title style</a:t>
             </a:r>
-            <a:endParaRPr lang="en-US"/>
           </a:p>
         </p:txBody>
       </p:sp>
@@ -2504,7 +2499,7 @@
           <a:p>
             <a:pPr lvl="0"/>
             <a:r>
-              <a:rPr lang="en-US" smtClean="0"/>
+              <a:rPr lang="en-US"/>
               <a:t>Click to edit Master text styles</a:t>
             </a:r>
           </a:p>
@@ -2527,7 +2522,7 @@
           <a:p>
             <a:fld id="{5BCAD085-E8A6-8845-BD4E-CB4CCA059FC4}" type="datetimeFigureOut">
               <a:rPr lang="en-US" smtClean="0"/>
-              <a:t>1/27/13</a:t>
+              <a:t>9/11/2026</a:t>
             </a:fld>
             <a:endParaRPr lang="en-US"/>
           </a:p>
@@ -2636,10 +2631,9 @@
           <a:lstStyle/>
           <a:p>
             <a:r>
-              <a:rPr lang="en-US" smtClean="0"/>
+              <a:rPr lang="en-US"/>
               <a:t>Click to edit Master title style</a:t>
             </a:r>
-            <a:endParaRPr lang="en-US"/>
           </a:p>
         </p:txBody>
       </p:sp>
@@ -2670,38 +2664,37 @@
           <a:p>
             <a:pPr lvl="0"/>
             <a:r>
-              <a:rPr lang="en-US" smtClean="0"/>
+              <a:rPr lang="en-US"/>
               <a:t>Click to edit Master text styles</a:t>
             </a:r>
           </a:p>
           <a:p>
             <a:pPr lvl="1"/>
             <a:r>
-              <a:rPr lang="en-US" smtClean="0"/>
+              <a:rPr lang="en-US"/>
               <a:t>Second level</a:t>
             </a:r>
           </a:p>
           <a:p>
             <a:pPr lvl="2"/>
             <a:r>
-              <a:rPr lang="en-US" smtClean="0"/>
+              <a:rPr lang="en-US"/>
               <a:t>Third level</a:t>
             </a:r>
           </a:p>
           <a:p>
             <a:pPr lvl="3"/>
             <a:r>
-              <a:rPr lang="en-US" smtClean="0"/>
+              <a:rPr lang="en-US"/>
               <a:t>Fourth level</a:t>
             </a:r>
           </a:p>
           <a:p>
             <a:pPr lvl="4"/>
             <a:r>
-              <a:rPr lang="en-US" smtClean="0"/>
+              <a:rPr lang="en-US"/>
               <a:t>Fifth level</a:t>
             </a:r>
-            <a:endParaRPr lang="en-US"/>
           </a:p>
         </p:txBody>
       </p:sp>
@@ -2740,7 +2733,7 @@
           <a:p>
             <a:fld id="{5BCAD085-E8A6-8845-BD4E-CB4CCA059FC4}" type="datetimeFigureOut">
               <a:rPr lang="en-US" smtClean="0"/>
-              <a:t>1/27/13</a:t>
+              <a:t>9/11/2026</a:t>
             </a:fld>
             <a:endParaRPr lang="en-US"/>
           </a:p>
@@ -3099,7 +3092,7 @@
 </file>
 
 <file path=ppt/slides/slide1.xml><?xml version="1.0" encoding="utf-8"?>
-<p:sld xmlns:a="http://schemas.openxmlformats.org/drawingml/2006/main" xmlns:p="http://schemas.openxmlformats.org/presentationml/2006/main" xmlns:r="http://schemas.openxmlformats.org/officeDocument/2006/relationships">
+<p:sld xmlns:a="http://schemas.openxmlformats.org/drawingml/2006/main" xmlns:r="http://schemas.openxmlformats.org/officeDocument/2006/relationships" xmlns:p="http://schemas.openxmlformats.org/presentationml/2006/main">
   <p:cSld>
     <p:bg>
       <p:bgPr>
@@ -3115,7 +3108,14 @@
         <p:cNvGrpSpPr/>
         <p:nvPr/>
       </p:nvGrpSpPr>
-      <p:grpSpPr/>
+      <p:grpSpPr>
+        <a:xfrm>
+          <a:off x="0" y="0"/>
+          <a:ext cx="0" cy="0"/>
+          <a:chOff x="0" y="0"/>
+          <a:chExt cx="0" cy="0"/>
+        </a:xfrm>
+      </p:grpSpPr>
       <p:sp>
         <p:nvSpPr>
           <p:cNvPr id="2" name="Rectangle 1"/>
@@ -3157,6 +3157,7 @@
           <a:lstStyle/>
           <a:p>
             <a:pPr algn="ctr"/>
+            <a:endParaRPr/>
           </a:p>
         </p:txBody>
       </p:sp>
@@ -3169,7 +3170,7 @@
         <p:spPr>
           <a:xfrm>
             <a:off x="822960" y="685800"/>
-            <a:ext cx="10515600" cy="1097280"/>
+            <a:ext cx="10515600" cy="739433"/>
           </a:xfrm>
           <a:prstGeom prst="rect">
             <a:avLst/>
@@ -3191,13 +3192,13 @@
               </a:spcAft>
             </a:pPr>
             <a:r>
-              <a:rPr sz="4000" b="1">
+              <a:rPr sz="4000" b="1" dirty="0">
                 <a:solidFill>
                   <a:srgbClr val="1A1D24"/>
                 </a:solidFill>
                 <a:latin typeface="Segoe UI"/>
               </a:rPr>
-              <a:t>Diffusion as Memory — where we are, what changed</a:t>
+              <a:t>Diffusion as Memory</a:t>
             </a:r>
           </a:p>
         </p:txBody>
@@ -3243,6 +3244,7 @@
           <a:lstStyle/>
           <a:p>
             <a:pPr algn="ctr"/>
+            <a:endParaRPr/>
           </a:p>
         </p:txBody>
       </p:sp>
@@ -3255,7 +3257,7 @@
         <p:spPr>
           <a:xfrm>
             <a:off x="822960" y="1874519"/>
-            <a:ext cx="10515600" cy="548640"/>
+            <a:ext cx="10515600" cy="399725"/>
           </a:xfrm>
           <a:prstGeom prst="rect">
             <a:avLst/>
@@ -3277,13 +3279,13 @@
               </a:spcAft>
             </a:pPr>
             <a:r>
-              <a:rPr sz="1900" b="0">
+              <a:rPr sz="1900" b="0" dirty="0">
                 <a:solidFill>
                   <a:srgbClr val="5F6B7A"/>
                 </a:solidFill>
                 <a:latin typeface="Segoe UI"/>
               </a:rPr>
-              <a:t>Rebuild of the pipeline, plus results that already change the plan</a:t>
+              <a:t>Rebuild of the pipeline</a:t>
             </a:r>
           </a:p>
         </p:txBody>
@@ -3297,7 +3299,7 @@
         <p:spPr>
           <a:xfrm>
             <a:off x="822960" y="2926080"/>
-            <a:ext cx="10515600" cy="2926080"/>
+            <a:ext cx="10515600" cy="2130135"/>
           </a:xfrm>
           <a:prstGeom prst="rect">
             <a:avLst/>
@@ -3319,7 +3321,7 @@
               </a:spcAft>
             </a:pPr>
             <a:r>
-              <a:rPr sz="1800" b="0">
+              <a:rPr sz="1800" b="0" dirty="0">
                 <a:solidFill>
                   <a:srgbClr val="1A1D24"/>
                 </a:solidFill>
@@ -3337,24 +3339,66 @@
                 <a:spcPts val="1200"/>
               </a:spcAft>
             </a:pPr>
-          </a:p>
-          <a:p>
-            <a:pPr algn="l">
-              <a:lnSpc>
-                <a:spcPct val="115000"/>
-              </a:lnSpc>
-              <a:spcAft>
-                <a:spcPts val="1200"/>
-              </a:spcAft>
-            </a:pPr>
-            <a:r>
-              <a:rPr sz="1800" b="0">
+            <a:r>
+              <a:rPr lang="en-US" sz="1800" b="0" dirty="0">
                 <a:solidFill>
                   <a:srgbClr val="1A1D24"/>
                 </a:solidFill>
                 <a:latin typeface="Segoe UI"/>
               </a:rPr>
-              <a:t>This deck: what was broken, what the data already told us, what we rebuilt, and what to run next.</a:t>
+              <a:t>Motivation framing change – </a:t>
+            </a:r>
+            <a:br>
+              <a:rPr lang="en-US" sz="1800" b="0" dirty="0">
+                <a:solidFill>
+                  <a:srgbClr val="1A1D24"/>
+                </a:solidFill>
+                <a:latin typeface="Segoe UI"/>
+              </a:rPr>
+            </a:br>
+            <a:r>
+              <a:rPr lang="en-US" sz="1800" b="1" dirty="0">
+                <a:solidFill>
+                  <a:srgbClr val="1A1D24"/>
+                </a:solidFill>
+                <a:latin typeface="Segoe UI"/>
+              </a:rPr>
+              <a:t>Earlier</a:t>
+            </a:r>
+            <a:r>
+              <a:rPr lang="en-US" sz="1800" b="0" dirty="0">
+                <a:solidFill>
+                  <a:srgbClr val="1A1D24"/>
+                </a:solidFill>
+                <a:latin typeface="Segoe UI"/>
+              </a:rPr>
+              <a:t>: early exit + storage efficiency</a:t>
+            </a:r>
+            <a:br>
+              <a:rPr lang="en-US" sz="1800" b="0" dirty="0">
+                <a:solidFill>
+                  <a:srgbClr val="1A1D24"/>
+                </a:solidFill>
+                <a:latin typeface="Segoe UI"/>
+              </a:rPr>
+            </a:br>
+            <a:r>
+              <a:rPr lang="en-US" sz="1800" b="1" dirty="0">
+                <a:solidFill>
+                  <a:srgbClr val="1A1D24"/>
+                </a:solidFill>
+                <a:latin typeface="Segoe UI"/>
+              </a:rPr>
+              <a:t>Now: </a:t>
+            </a:r>
+            <a:r>
+              <a:rPr lang="en-US" sz="1800" b="0" dirty="0">
+                <a:solidFill>
+                  <a:srgbClr val="1A1D24"/>
+                </a:solidFill>
+                <a:latin typeface="Segoe UI"/>
+              </a:rPr>
+              <a:t>early exit (framed as test time tokens) + nesting (subset). Summarization can’t guarantee the latter and RAG can’t achieve the first</a:t>
             </a:r>
           </a:p>
         </p:txBody>
@@ -3368,7 +3412,7 @@
 </file>
 
 <file path=ppt/slides/slide10.xml><?xml version="1.0" encoding="utf-8"?>
-<p:sld xmlns:a="http://schemas.openxmlformats.org/drawingml/2006/main" xmlns:p="http://schemas.openxmlformats.org/presentationml/2006/main" xmlns:r="http://schemas.openxmlformats.org/officeDocument/2006/relationships">
+<p:sld xmlns:a="http://schemas.openxmlformats.org/drawingml/2006/main" xmlns:r="http://schemas.openxmlformats.org/officeDocument/2006/relationships" xmlns:p="http://schemas.openxmlformats.org/presentationml/2006/main">
   <p:cSld>
     <p:bg>
       <p:bgPr>
@@ -3384,161 +3428,14 @@
         <p:cNvGrpSpPr/>
         <p:nvPr/>
       </p:nvGrpSpPr>
-      <p:grpSpPr/>
-      <p:sp>
-        <p:nvSpPr>
-          <p:cNvPr id="2" name="Rectangle 1"/>
-          <p:cNvSpPr/>
-          <p:nvPr/>
-        </p:nvSpPr>
-        <p:spPr>
-          <a:xfrm>
-            <a:off x="0" y="2194560"/>
-            <a:ext cx="12191695" cy="1828800"/>
-          </a:xfrm>
-          <a:prstGeom prst="rect">
-            <a:avLst/>
-          </a:prstGeom>
-          <a:solidFill>
-            <a:srgbClr val="F2F5F9"/>
-          </a:solidFill>
-          <a:ln>
-            <a:noFill/>
-          </a:ln>
-          <a:effectLst/>
-        </p:spPr>
-        <p:style>
-          <a:lnRef idx="1">
-            <a:schemeClr val="accent1"/>
-          </a:lnRef>
-          <a:fillRef idx="3">
-            <a:schemeClr val="accent1"/>
-          </a:fillRef>
-          <a:effectRef idx="2">
-            <a:schemeClr val="accent1"/>
-          </a:effectRef>
-          <a:fontRef idx="minor">
-            <a:schemeClr val="lt1"/>
-          </a:fontRef>
-        </p:style>
-        <p:txBody>
-          <a:bodyPr rtlCol="0" anchor="ctr"/>
-          <a:lstStyle/>
-          <a:p>
-            <a:pPr algn="ctr"/>
-          </a:p>
-        </p:txBody>
-      </p:sp>
-      <p:sp>
-        <p:nvSpPr>
-          <p:cNvPr id="3" name="TextBox 2"/>
-          <p:cNvSpPr txBox="1"/>
-          <p:nvPr/>
-        </p:nvSpPr>
-        <p:spPr>
-          <a:xfrm>
-            <a:off x="822960" y="2423160"/>
-            <a:ext cx="10515600" cy="365760"/>
-          </a:xfrm>
-          <a:prstGeom prst="rect">
-            <a:avLst/>
-          </a:prstGeom>
-          <a:noFill/>
-        </p:spPr>
-        <p:txBody>
-          <a:bodyPr wrap="square">
-            <a:spAutoFit/>
-          </a:bodyPr>
-          <a:lstStyle/>
-          <a:p>
-            <a:pPr algn="l">
-              <a:lnSpc>
-                <a:spcPct val="115000"/>
-              </a:lnSpc>
-              <a:spcAft>
-                <a:spcPts val="600"/>
-              </a:spcAft>
-            </a:pPr>
-            <a:r>
-              <a:rPr sz="1500" b="1">
-                <a:solidFill>
-                  <a:srgbClr val="1F6FD4"/>
-                </a:solidFill>
-                <a:latin typeface="Segoe UI"/>
-              </a:rPr>
-              <a:t>PART 3</a:t>
-            </a:r>
-          </a:p>
-        </p:txBody>
-      </p:sp>
-      <p:sp>
-        <p:nvSpPr>
-          <p:cNvPr id="4" name="TextBox 3"/>
-          <p:cNvSpPr txBox="1"/>
-          <p:nvPr/>
-        </p:nvSpPr>
-        <p:spPr>
-          <a:xfrm>
-            <a:off x="822960" y="2788920"/>
-            <a:ext cx="10515600" cy="914400"/>
-          </a:xfrm>
-          <a:prstGeom prst="rect">
-            <a:avLst/>
-          </a:prstGeom>
-          <a:noFill/>
-        </p:spPr>
-        <p:txBody>
-          <a:bodyPr wrap="square">
-            <a:spAutoFit/>
-          </a:bodyPr>
-          <a:lstStyle/>
-          <a:p>
-            <a:pPr algn="l">
-              <a:lnSpc>
-                <a:spcPct val="115000"/>
-              </a:lnSpc>
-              <a:spcAft>
-                <a:spcPts val="600"/>
-              </a:spcAft>
-            </a:pPr>
-            <a:r>
-              <a:rPr sz="3400" b="1">
-                <a:solidFill>
-                  <a:srgbClr val="1A1D24"/>
-                </a:solidFill>
-                <a:latin typeface="Segoe UI"/>
-              </a:rPr>
-              <a:t>What we rebuilt, and why</a:t>
-            </a:r>
-          </a:p>
-        </p:txBody>
-      </p:sp>
-    </p:spTree>
-  </p:cSld>
-  <p:clrMapOvr>
-    <a:masterClrMapping/>
-  </p:clrMapOvr>
-</p:sld>
-</file>
-
-<file path=ppt/slides/slide11.xml><?xml version="1.0" encoding="utf-8"?>
-<p:sld xmlns:a="http://schemas.openxmlformats.org/drawingml/2006/main" xmlns:p="http://schemas.openxmlformats.org/presentationml/2006/main" xmlns:r="http://schemas.openxmlformats.org/officeDocument/2006/relationships">
-  <p:cSld>
-    <p:bg>
-      <p:bgPr>
-        <a:solidFill>
-          <a:srgbClr val="FFFFFF"/>
-        </a:solidFill>
-        <a:effectLst/>
-      </p:bgPr>
-    </p:bg>
-    <p:spTree>
-      <p:nvGrpSpPr>
-        <p:cNvPr id="1" name=""/>
-        <p:cNvGrpSpPr/>
-        <p:nvPr/>
-      </p:nvGrpSpPr>
-      <p:grpSpPr/>
+      <p:grpSpPr>
+        <a:xfrm>
+          <a:off x="0" y="0"/>
+          <a:ext cx="0" cy="0"/>
+          <a:chOff x="0" y="0"/>
+          <a:chExt cx="0" cy="0"/>
+        </a:xfrm>
+      </p:grpSpPr>
       <p:sp>
         <p:nvSpPr>
           <p:cNvPr id="2" name="TextBox 1"/>
@@ -3576,7 +3473,7 @@
                 </a:solidFill>
                 <a:latin typeface="Segoe UI"/>
               </a:rPr>
-              <a:t>The memory itself: gist vs details</a:t>
+              <a:t>The most interesting change: give forgetting a floor</a:t>
             </a:r>
           </a:p>
         </p:txBody>
@@ -3622,6 +3519,7 @@
           <a:lstStyle/>
           <a:p>
             <a:pPr algn="ctr"/>
+            <a:endParaRPr/>
           </a:p>
         </p:txBody>
       </p:sp>
@@ -3633,8 +3531,190 @@
         </p:nvSpPr>
         <p:spPr>
           <a:xfrm>
-            <a:off x="685800" y="1325880"/>
-            <a:ext cx="5120640" cy="365760"/>
+            <a:off x="685800" y="1371600"/>
+            <a:ext cx="10789920" cy="4297680"/>
+          </a:xfrm>
+          <a:prstGeom prst="rect">
+            <a:avLst/>
+          </a:prstGeom>
+          <a:noFill/>
+        </p:spPr>
+        <p:txBody>
+          <a:bodyPr wrap="square">
+            <a:spAutoFit/>
+          </a:bodyPr>
+          <a:lstStyle/>
+          <a:p>
+            <a:pPr algn="l">
+              <a:lnSpc>
+                <a:spcPct val="115000"/>
+              </a:lnSpc>
+              <a:spcAft>
+                <a:spcPts val="1000"/>
+              </a:spcAft>
+            </a:pPr>
+            <a:r>
+              <a:rPr sz="1800" b="0">
+                <a:solidFill>
+                  <a:srgbClr val="1A1D24"/>
+                </a:solidFill>
+                <a:latin typeface="Segoe UI"/>
+              </a:rPr>
+              <a:t>Standard diffusion destroys everything — at maximum noise you have pure static.</a:t>
+            </a:r>
+          </a:p>
+          <a:p>
+            <a:pPr algn="l">
+              <a:lnSpc>
+                <a:spcPct val="115000"/>
+              </a:lnSpc>
+              <a:spcAft>
+                <a:spcPts val="1000"/>
+              </a:spcAft>
+            </a:pPr>
+            <a:endParaRPr sz="1800" b="0">
+              <a:solidFill>
+                <a:srgbClr val="1A1D24"/>
+              </a:solidFill>
+              <a:latin typeface="Segoe UI"/>
+            </a:endParaRPr>
+          </a:p>
+          <a:p>
+            <a:pPr algn="l">
+              <a:lnSpc>
+                <a:spcPct val="115000"/>
+              </a:lnSpc>
+              <a:spcAft>
+                <a:spcPts val="1000"/>
+              </a:spcAft>
+            </a:pPr>
+            <a:r>
+              <a:rPr sz="1800" b="0">
+                <a:solidFill>
+                  <a:srgbClr val="1A1D24"/>
+                </a:solidFill>
+                <a:latin typeface="Segoe UI"/>
+              </a:rPr>
+              <a:t>So our 'most abstract' rung was anchored on nothing, which is exactly where the old runs produced gibberish.</a:t>
+            </a:r>
+          </a:p>
+          <a:p>
+            <a:pPr algn="l">
+              <a:lnSpc>
+                <a:spcPct val="115000"/>
+              </a:lnSpc>
+              <a:spcAft>
+                <a:spcPts val="1000"/>
+              </a:spcAft>
+            </a:pPr>
+            <a:endParaRPr sz="1800" b="0">
+              <a:solidFill>
+                <a:srgbClr val="1A1D24"/>
+              </a:solidFill>
+              <a:latin typeface="Segoe UI"/>
+            </a:endParaRPr>
+          </a:p>
+          <a:p>
+            <a:pPr algn="l">
+              <a:lnSpc>
+                <a:spcPct val="115000"/>
+              </a:lnSpc>
+              <a:spcAft>
+                <a:spcPts val="1000"/>
+              </a:spcAft>
+            </a:pPr>
+            <a:r>
+              <a:rPr sz="1800" b="0">
+                <a:solidFill>
+                  <a:srgbClr val="1A1D24"/>
+                </a:solidFill>
+                <a:latin typeface="Segoe UI"/>
+              </a:rPr>
+              <a:t>Change: we add noise to (details MINUS gist) instead of to everything.</a:t>
+            </a:r>
+          </a:p>
+          <a:p>
+            <a:pPr algn="l">
+              <a:lnSpc>
+                <a:spcPct val="115000"/>
+              </a:lnSpc>
+              <a:spcAft>
+                <a:spcPts val="1000"/>
+              </a:spcAft>
+            </a:pPr>
+            <a:endParaRPr sz="1800" b="0">
+              <a:solidFill>
+                <a:srgbClr val="1A1D24"/>
+              </a:solidFill>
+              <a:latin typeface="Segoe UI"/>
+            </a:endParaRPr>
+          </a:p>
+          <a:p>
+            <a:pPr algn="l">
+              <a:lnSpc>
+                <a:spcPct val="115000"/>
+              </a:lnSpc>
+              <a:spcAft>
+                <a:spcPts val="1000"/>
+              </a:spcAft>
+            </a:pPr>
+            <a:r>
+              <a:rPr sz="1800" b="0">
+                <a:solidFill>
+                  <a:srgbClr val="1A1D24"/>
+                </a:solidFill>
+                <a:latin typeface="Segoe UI"/>
+              </a:rPr>
+              <a:t>Now maximum noise = the gist plus static, not static. Details dissolve; the gist survives — by construction, not by hope.</a:t>
+            </a:r>
+          </a:p>
+          <a:p>
+            <a:pPr algn="l">
+              <a:lnSpc>
+                <a:spcPct val="115000"/>
+              </a:lnSpc>
+              <a:spcAft>
+                <a:spcPts val="1000"/>
+              </a:spcAft>
+            </a:pPr>
+            <a:endParaRPr sz="1800" b="0">
+              <a:solidFill>
+                <a:srgbClr val="1A1D24"/>
+              </a:solidFill>
+              <a:latin typeface="Segoe UI"/>
+            </a:endParaRPr>
+          </a:p>
+          <a:p>
+            <a:pPr algn="l">
+              <a:lnSpc>
+                <a:spcPct val="115000"/>
+              </a:lnSpc>
+              <a:spcAft>
+                <a:spcPts val="1000"/>
+              </a:spcAft>
+            </a:pPr>
+            <a:r>
+              <a:rPr sz="1800" b="0">
+                <a:solidFill>
+                  <a:srgbClr val="1A1D24"/>
+                </a:solidFill>
+                <a:latin typeface="Segoe UI"/>
+              </a:rPr>
+              <a:t>It is about fifteen lines of code and no new mathematics: ordinary diffusion on a shifted variable.</a:t>
+            </a:r>
+          </a:p>
+        </p:txBody>
+      </p:sp>
+      <p:sp>
+        <p:nvSpPr>
+          <p:cNvPr id="5" name="TextBox 4"/>
+          <p:cNvSpPr txBox="1"/>
+          <p:nvPr/>
+        </p:nvSpPr>
+        <p:spPr>
+          <a:xfrm>
+            <a:off x="685800" y="5806440"/>
+            <a:ext cx="10789920" cy="731520"/>
           </a:xfrm>
           <a:prstGeom prst="rect">
             <a:avLst/>
@@ -3656,297 +3736,13 @@
               </a:spcAft>
             </a:pPr>
             <a:r>
-              <a:rPr sz="1700" b="1">
-                <a:solidFill>
-                  <a:srgbClr val="B32D2D"/>
+              <a:rPr sz="1500" b="0">
+                <a:solidFill>
+                  <a:srgbClr val="5F6B7A"/>
                 </a:solidFill>
                 <a:latin typeface="Segoe UI"/>
               </a:rPr>
-              <a:t>Before</a:t>
-            </a:r>
-          </a:p>
-        </p:txBody>
-      </p:sp>
-      <p:sp>
-        <p:nvSpPr>
-          <p:cNvPr id="5" name="TextBox 4"/>
-          <p:cNvSpPr txBox="1"/>
-          <p:nvPr/>
-        </p:nvSpPr>
-        <p:spPr>
-          <a:xfrm>
-            <a:off x="685800" y="1783080"/>
-            <a:ext cx="5120640" cy="3840480"/>
-          </a:xfrm>
-          <a:prstGeom prst="rect">
-            <a:avLst/>
-          </a:prstGeom>
-          <a:noFill/>
-        </p:spPr>
-        <p:txBody>
-          <a:bodyPr wrap="square">
-            <a:spAutoFit/>
-          </a:bodyPr>
-          <a:lstStyle/>
-          <a:p>
-            <a:pPr algn="l">
-              <a:lnSpc>
-                <a:spcPct val="115000"/>
-              </a:lnSpc>
-              <a:spcAft>
-                <a:spcPts val="900"/>
-              </a:spcAft>
-            </a:pPr>
-            <a:r>
-              <a:rPr sz="1600" b="0">
-                <a:solidFill>
-                  <a:srgbClr val="1A1D24"/>
-                </a:solidFill>
-                <a:latin typeface="Segoe UI"/>
-              </a:rPr>
-              <a:t>The gist and the details were both a single linear layer on the same vector.</a:t>
-            </a:r>
-          </a:p>
-          <a:p>
-            <a:pPr algn="l">
-              <a:lnSpc>
-                <a:spcPct val="115000"/>
-              </a:lnSpc>
-              <a:spcAft>
-                <a:spcPts val="900"/>
-              </a:spcAft>
-            </a:pPr>
-          </a:p>
-          <a:p>
-            <a:pPr algn="l">
-              <a:lnSpc>
-                <a:spcPct val="115000"/>
-              </a:lnSpc>
-              <a:spcAft>
-                <a:spcPts val="900"/>
-              </a:spcAft>
-            </a:pPr>
-            <a:r>
-              <a:rPr sz="1600" b="0">
-                <a:solidFill>
-                  <a:srgbClr val="1A1D24"/>
-                </a:solidFill>
-                <a:latin typeface="Segoe UI"/>
-              </a:rPr>
-              <a:t>So they were not really different things — any separation had to come from the loss, and the only loss was 'rebuild the sentence'.</a:t>
-            </a:r>
-          </a:p>
-          <a:p>
-            <a:pPr algn="l">
-              <a:lnSpc>
-                <a:spcPct val="115000"/>
-              </a:lnSpc>
-              <a:spcAft>
-                <a:spcPts val="900"/>
-              </a:spcAft>
-            </a:pPr>
-          </a:p>
-          <a:p>
-            <a:pPr algn="l">
-              <a:lnSpc>
-                <a:spcPct val="115000"/>
-              </a:lnSpc>
-              <a:spcAft>
-                <a:spcPts val="900"/>
-              </a:spcAft>
-            </a:pPr>
-            <a:r>
-              <a:rPr sz="1600" b="0">
-                <a:solidFill>
-                  <a:srgbClr val="1A1D24"/>
-                </a:solidFill>
-                <a:latin typeface="Segoe UI"/>
-              </a:rPr>
-              <a:t>Nothing ever checked that the gist contained the gist.</a:t>
-            </a:r>
-          </a:p>
-        </p:txBody>
-      </p:sp>
-      <p:sp>
-        <p:nvSpPr>
-          <p:cNvPr id="6" name="TextBox 5"/>
-          <p:cNvSpPr txBox="1"/>
-          <p:nvPr/>
-        </p:nvSpPr>
-        <p:spPr>
-          <a:xfrm>
-            <a:off x="6355080" y="1325880"/>
-            <a:ext cx="5120640" cy="365760"/>
-          </a:xfrm>
-          <a:prstGeom prst="rect">
-            <a:avLst/>
-          </a:prstGeom>
-          <a:noFill/>
-        </p:spPr>
-        <p:txBody>
-          <a:bodyPr wrap="square">
-            <a:spAutoFit/>
-          </a:bodyPr>
-          <a:lstStyle/>
-          <a:p>
-            <a:pPr algn="l">
-              <a:lnSpc>
-                <a:spcPct val="115000"/>
-              </a:lnSpc>
-              <a:spcAft>
-                <a:spcPts val="600"/>
-              </a:spcAft>
-            </a:pPr>
-            <a:r>
-              <a:rPr sz="1700" b="1">
-                <a:solidFill>
-                  <a:srgbClr val="1B7F4B"/>
-                </a:solidFill>
-                <a:latin typeface="Segoe UI"/>
-              </a:rPr>
-              <a:t>Now</a:t>
-            </a:r>
-          </a:p>
-        </p:txBody>
-      </p:sp>
-      <p:sp>
-        <p:nvSpPr>
-          <p:cNvPr id="7" name="TextBox 6"/>
-          <p:cNvSpPr txBox="1"/>
-          <p:nvPr/>
-        </p:nvSpPr>
-        <p:spPr>
-          <a:xfrm>
-            <a:off x="6355080" y="1783080"/>
-            <a:ext cx="5120640" cy="3840480"/>
-          </a:xfrm>
-          <a:prstGeom prst="rect">
-            <a:avLst/>
-          </a:prstGeom>
-          <a:noFill/>
-        </p:spPr>
-        <p:txBody>
-          <a:bodyPr wrap="square">
-            <a:spAutoFit/>
-          </a:bodyPr>
-          <a:lstStyle/>
-          <a:p>
-            <a:pPr algn="l">
-              <a:lnSpc>
-                <a:spcPct val="115000"/>
-              </a:lnSpc>
-              <a:spcAft>
-                <a:spcPts val="900"/>
-              </a:spcAft>
-            </a:pPr>
-            <a:r>
-              <a:rPr sz="1600" b="0">
-                <a:solidFill>
-                  <a:srgbClr val="1A1D24"/>
-                </a:solidFill>
-                <a:latin typeface="Segoe UI"/>
-              </a:rPr>
-              <a:t>Gist: an attention layer picks WHICH parts matter, then a small network compresses them. Length-normalised so it behaves as a stable cue.</a:t>
-            </a:r>
-          </a:p>
-          <a:p>
-            <a:pPr algn="l">
-              <a:lnSpc>
-                <a:spcPct val="115000"/>
-              </a:lnSpc>
-              <a:spcAft>
-                <a:spcPts val="900"/>
-              </a:spcAft>
-            </a:pPr>
-          </a:p>
-          <a:p>
-            <a:pPr algn="l">
-              <a:lnSpc>
-                <a:spcPct val="115000"/>
-              </a:lnSpc>
-              <a:spcAft>
-                <a:spcPts val="900"/>
-              </a:spcAft>
-            </a:pPr>
-            <a:r>
-              <a:rPr sz="1600" b="0">
-                <a:solidFill>
-                  <a:srgbClr val="1A1D24"/>
-                </a:solidFill>
-                <a:latin typeface="Segoe UI"/>
-              </a:rPr>
-              <a:t>Details: slots can talk to each other, and the output is scale-controlled.</a:t>
-            </a:r>
-          </a:p>
-          <a:p>
-            <a:pPr algn="l">
-              <a:lnSpc>
-                <a:spcPct val="115000"/>
-              </a:lnSpc>
-              <a:spcAft>
-                <a:spcPts val="900"/>
-              </a:spcAft>
-            </a:pPr>
-          </a:p>
-          <a:p>
-            <a:pPr algn="l">
-              <a:lnSpc>
-                <a:spcPct val="115000"/>
-              </a:lnSpc>
-              <a:spcAft>
-                <a:spcPts val="900"/>
-              </a:spcAft>
-            </a:pPr>
-            <a:r>
-              <a:rPr sz="1600" b="0">
-                <a:solidFill>
-                  <a:srgbClr val="1A1D24"/>
-                </a:solidFill>
-                <a:latin typeface="Segoe UI"/>
-              </a:rPr>
-              <a:t>Three new training signals: write the summary from the gist alone; put the gist near an off-the-shelf sentence embedding; keep gist and details from duplicating each other.</a:t>
-            </a:r>
-          </a:p>
-        </p:txBody>
-      </p:sp>
-      <p:sp>
-        <p:nvSpPr>
-          <p:cNvPr id="8" name="TextBox 7"/>
-          <p:cNvSpPr txBox="1"/>
-          <p:nvPr/>
-        </p:nvSpPr>
-        <p:spPr>
-          <a:xfrm>
-            <a:off x="685800" y="5852160"/>
-            <a:ext cx="10789920" cy="640080"/>
-          </a:xfrm>
-          <a:prstGeom prst="rect">
-            <a:avLst/>
-          </a:prstGeom>
-          <a:noFill/>
-        </p:spPr>
-        <p:txBody>
-          <a:bodyPr wrap="square">
-            <a:spAutoFit/>
-          </a:bodyPr>
-          <a:lstStyle/>
-          <a:p>
-            <a:pPr algn="l">
-              <a:lnSpc>
-                <a:spcPct val="115000"/>
-              </a:lnSpc>
-              <a:spcAft>
-                <a:spcPts val="600"/>
-              </a:spcAft>
-            </a:pPr>
-            <a:r>
-              <a:rPr sz="1500" b="0">
-                <a:solidFill>
-                  <a:srgbClr val="5F6B7A"/>
-                </a:solidFill>
-                <a:latin typeface="Segoe UI"/>
-              </a:rPr>
-              <a:t>The second of those is the bridge to question answering: if the gist lives in a standard search space, a QUESTION lands next to it for free.</a:t>
+              <a:t>This is the change worth writing a paper around. It makes the memory metaphor structurally true instead of aspirational.</a:t>
             </a:r>
           </a:p>
         </p:txBody>
@@ -3959,8 +3755,8 @@
 </p:sld>
 </file>
 
-<file path=ppt/slides/slide12.xml><?xml version="1.0" encoding="utf-8"?>
-<p:sld xmlns:a="http://schemas.openxmlformats.org/drawingml/2006/main" xmlns:p="http://schemas.openxmlformats.org/presentationml/2006/main" xmlns:r="http://schemas.openxmlformats.org/officeDocument/2006/relationships">
+<file path=ppt/slides/slide11.xml><?xml version="1.0" encoding="utf-8"?>
+<p:sld xmlns:a="http://schemas.openxmlformats.org/drawingml/2006/main" xmlns:r="http://schemas.openxmlformats.org/officeDocument/2006/relationships" xmlns:p="http://schemas.openxmlformats.org/presentationml/2006/main">
   <p:cSld>
     <p:bg>
       <p:bgPr>
@@ -3976,7 +3772,14 @@
         <p:cNvGrpSpPr/>
         <p:nvPr/>
       </p:nvGrpSpPr>
-      <p:grpSpPr/>
+      <p:grpSpPr>
+        <a:xfrm>
+          <a:off x="0" y="0"/>
+          <a:ext cx="0" cy="0"/>
+          <a:chOff x="0" y="0"/>
+          <a:chExt cx="0" cy="0"/>
+        </a:xfrm>
+      </p:grpSpPr>
       <p:sp>
         <p:nvSpPr>
           <p:cNvPr id="2" name="TextBox 1"/>
@@ -4014,7 +3817,7 @@
                 </a:solidFill>
                 <a:latin typeface="Segoe UI"/>
               </a:rPr>
-              <a:t>The most interesting change: give forgetting a floor</a:t>
+              <a:t>Everything else that changed</a:t>
             </a:r>
           </a:p>
         </p:txBody>
@@ -4060,318 +3863,7 @@
           <a:lstStyle/>
           <a:p>
             <a:pPr algn="ctr"/>
-          </a:p>
-        </p:txBody>
-      </p:sp>
-      <p:sp>
-        <p:nvSpPr>
-          <p:cNvPr id="4" name="TextBox 3"/>
-          <p:cNvSpPr txBox="1"/>
-          <p:nvPr/>
-        </p:nvSpPr>
-        <p:spPr>
-          <a:xfrm>
-            <a:off x="685800" y="1371600"/>
-            <a:ext cx="10789920" cy="4297680"/>
-          </a:xfrm>
-          <a:prstGeom prst="rect">
-            <a:avLst/>
-          </a:prstGeom>
-          <a:noFill/>
-        </p:spPr>
-        <p:txBody>
-          <a:bodyPr wrap="square">
-            <a:spAutoFit/>
-          </a:bodyPr>
-          <a:lstStyle/>
-          <a:p>
-            <a:pPr algn="l">
-              <a:lnSpc>
-                <a:spcPct val="115000"/>
-              </a:lnSpc>
-              <a:spcAft>
-                <a:spcPts val="1000"/>
-              </a:spcAft>
-            </a:pPr>
-            <a:r>
-              <a:rPr sz="1800" b="0">
-                <a:solidFill>
-                  <a:srgbClr val="1A1D24"/>
-                </a:solidFill>
-                <a:latin typeface="Segoe UI"/>
-              </a:rPr>
-              <a:t>Standard diffusion destroys everything — at maximum noise you have pure static.</a:t>
-            </a:r>
-          </a:p>
-          <a:p>
-            <a:pPr algn="l">
-              <a:lnSpc>
-                <a:spcPct val="115000"/>
-              </a:lnSpc>
-              <a:spcAft>
-                <a:spcPts val="1000"/>
-              </a:spcAft>
-            </a:pPr>
-          </a:p>
-          <a:p>
-            <a:pPr algn="l">
-              <a:lnSpc>
-                <a:spcPct val="115000"/>
-              </a:lnSpc>
-              <a:spcAft>
-                <a:spcPts val="1000"/>
-              </a:spcAft>
-            </a:pPr>
-            <a:r>
-              <a:rPr sz="1800" b="0">
-                <a:solidFill>
-                  <a:srgbClr val="1A1D24"/>
-                </a:solidFill>
-                <a:latin typeface="Segoe UI"/>
-              </a:rPr>
-              <a:t>So our 'most abstract' rung was anchored on nothing, which is exactly where the old runs produced gibberish.</a:t>
-            </a:r>
-          </a:p>
-          <a:p>
-            <a:pPr algn="l">
-              <a:lnSpc>
-                <a:spcPct val="115000"/>
-              </a:lnSpc>
-              <a:spcAft>
-                <a:spcPts val="1000"/>
-              </a:spcAft>
-            </a:pPr>
-          </a:p>
-          <a:p>
-            <a:pPr algn="l">
-              <a:lnSpc>
-                <a:spcPct val="115000"/>
-              </a:lnSpc>
-              <a:spcAft>
-                <a:spcPts val="1000"/>
-              </a:spcAft>
-            </a:pPr>
-            <a:r>
-              <a:rPr sz="1800" b="0">
-                <a:solidFill>
-                  <a:srgbClr val="1A1D24"/>
-                </a:solidFill>
-                <a:latin typeface="Segoe UI"/>
-              </a:rPr>
-              <a:t>Change: we add noise to (details MINUS gist) instead of to everything.</a:t>
-            </a:r>
-          </a:p>
-          <a:p>
-            <a:pPr algn="l">
-              <a:lnSpc>
-                <a:spcPct val="115000"/>
-              </a:lnSpc>
-              <a:spcAft>
-                <a:spcPts val="1000"/>
-              </a:spcAft>
-            </a:pPr>
-          </a:p>
-          <a:p>
-            <a:pPr algn="l">
-              <a:lnSpc>
-                <a:spcPct val="115000"/>
-              </a:lnSpc>
-              <a:spcAft>
-                <a:spcPts val="1000"/>
-              </a:spcAft>
-            </a:pPr>
-            <a:r>
-              <a:rPr sz="1800" b="0">
-                <a:solidFill>
-                  <a:srgbClr val="1A1D24"/>
-                </a:solidFill>
-                <a:latin typeface="Segoe UI"/>
-              </a:rPr>
-              <a:t>Now maximum noise = the gist plus static, not static. Details dissolve; the gist survives — by construction, not by hope.</a:t>
-            </a:r>
-          </a:p>
-          <a:p>
-            <a:pPr algn="l">
-              <a:lnSpc>
-                <a:spcPct val="115000"/>
-              </a:lnSpc>
-              <a:spcAft>
-                <a:spcPts val="1000"/>
-              </a:spcAft>
-            </a:pPr>
-          </a:p>
-          <a:p>
-            <a:pPr algn="l">
-              <a:lnSpc>
-                <a:spcPct val="115000"/>
-              </a:lnSpc>
-              <a:spcAft>
-                <a:spcPts val="1000"/>
-              </a:spcAft>
-            </a:pPr>
-            <a:r>
-              <a:rPr sz="1800" b="0">
-                <a:solidFill>
-                  <a:srgbClr val="1A1D24"/>
-                </a:solidFill>
-                <a:latin typeface="Segoe UI"/>
-              </a:rPr>
-              <a:t>It is about fifteen lines of code and no new mathematics: ordinary diffusion on a shifted variable.</a:t>
-            </a:r>
-          </a:p>
-        </p:txBody>
-      </p:sp>
-      <p:sp>
-        <p:nvSpPr>
-          <p:cNvPr id="5" name="TextBox 4"/>
-          <p:cNvSpPr txBox="1"/>
-          <p:nvPr/>
-        </p:nvSpPr>
-        <p:spPr>
-          <a:xfrm>
-            <a:off x="685800" y="5806440"/>
-            <a:ext cx="10789920" cy="731520"/>
-          </a:xfrm>
-          <a:prstGeom prst="rect">
-            <a:avLst/>
-          </a:prstGeom>
-          <a:noFill/>
-        </p:spPr>
-        <p:txBody>
-          <a:bodyPr wrap="square">
-            <a:spAutoFit/>
-          </a:bodyPr>
-          <a:lstStyle/>
-          <a:p>
-            <a:pPr algn="l">
-              <a:lnSpc>
-                <a:spcPct val="115000"/>
-              </a:lnSpc>
-              <a:spcAft>
-                <a:spcPts val="600"/>
-              </a:spcAft>
-            </a:pPr>
-            <a:r>
-              <a:rPr sz="1500" b="0">
-                <a:solidFill>
-                  <a:srgbClr val="5F6B7A"/>
-                </a:solidFill>
-                <a:latin typeface="Segoe UI"/>
-              </a:rPr>
-              <a:t>This is the change worth writing a paper around. It makes the memory metaphor structurally true instead of aspirational.</a:t>
-            </a:r>
-          </a:p>
-        </p:txBody>
-      </p:sp>
-    </p:spTree>
-  </p:cSld>
-  <p:clrMapOvr>
-    <a:masterClrMapping/>
-  </p:clrMapOvr>
-</p:sld>
-</file>
-
-<file path=ppt/slides/slide13.xml><?xml version="1.0" encoding="utf-8"?>
-<p:sld xmlns:a="http://schemas.openxmlformats.org/drawingml/2006/main" xmlns:p="http://schemas.openxmlformats.org/presentationml/2006/main" xmlns:r="http://schemas.openxmlformats.org/officeDocument/2006/relationships">
-  <p:cSld>
-    <p:bg>
-      <p:bgPr>
-        <a:solidFill>
-          <a:srgbClr val="FFFFFF"/>
-        </a:solidFill>
-        <a:effectLst/>
-      </p:bgPr>
-    </p:bg>
-    <p:spTree>
-      <p:nvGrpSpPr>
-        <p:cNvPr id="1" name=""/>
-        <p:cNvGrpSpPr/>
-        <p:nvPr/>
-      </p:nvGrpSpPr>
-      <p:grpSpPr/>
-      <p:sp>
-        <p:nvSpPr>
-          <p:cNvPr id="2" name="TextBox 1"/>
-          <p:cNvSpPr txBox="1"/>
-          <p:nvPr/>
-        </p:nvSpPr>
-        <p:spPr>
-          <a:xfrm>
-            <a:off x="640080" y="411480"/>
-            <a:ext cx="10881360" cy="640080"/>
-          </a:xfrm>
-          <a:prstGeom prst="rect">
-            <a:avLst/>
-          </a:prstGeom>
-          <a:noFill/>
-        </p:spPr>
-        <p:txBody>
-          <a:bodyPr wrap="square">
-            <a:spAutoFit/>
-          </a:bodyPr>
-          <a:lstStyle/>
-          <a:p>
-            <a:pPr algn="l">
-              <a:lnSpc>
-                <a:spcPct val="115000"/>
-              </a:lnSpc>
-              <a:spcAft>
-                <a:spcPts val="600"/>
-              </a:spcAft>
-            </a:pPr>
-            <a:r>
-              <a:rPr sz="2800" b="1">
-                <a:solidFill>
-                  <a:srgbClr val="1A1D24"/>
-                </a:solidFill>
-                <a:latin typeface="Segoe UI"/>
-              </a:rPr>
-              <a:t>Everything else that changed</a:t>
-            </a:r>
-          </a:p>
-        </p:txBody>
-      </p:sp>
-      <p:sp>
-        <p:nvSpPr>
-          <p:cNvPr id="3" name="Rectangle 2"/>
-          <p:cNvSpPr/>
-          <p:nvPr/>
-        </p:nvSpPr>
-        <p:spPr>
-          <a:xfrm>
-            <a:off x="640080" y="1051560"/>
-            <a:ext cx="1463040" cy="38100"/>
-          </a:xfrm>
-          <a:prstGeom prst="rect">
-            <a:avLst/>
-          </a:prstGeom>
-          <a:solidFill>
-            <a:srgbClr val="1F6FD4"/>
-          </a:solidFill>
-          <a:ln>
-            <a:noFill/>
-          </a:ln>
-          <a:effectLst/>
-        </p:spPr>
-        <p:style>
-          <a:lnRef idx="1">
-            <a:schemeClr val="accent1"/>
-          </a:lnRef>
-          <a:fillRef idx="3">
-            <a:schemeClr val="accent1"/>
-          </a:fillRef>
-          <a:effectRef idx="2">
-            <a:schemeClr val="accent1"/>
-          </a:effectRef>
-          <a:fontRef idx="minor">
-            <a:schemeClr val="lt1"/>
-          </a:fontRef>
-        </p:style>
-        <p:txBody>
-          <a:bodyPr rtlCol="0" anchor="ctr"/>
-          <a:lstStyle/>
-          <a:p>
-            <a:pPr algn="ctr"/>
+            <a:endParaRPr/>
           </a:p>
         </p:txBody>
       </p:sp>
@@ -4385,7 +3877,7 @@
         </p:nvGraphicFramePr>
         <p:xfrm>
           <a:off x="640080" y="1371600"/>
-          <a:ext cx="10881360" cy="3255264"/>
+          <a:ext cx="10881360" cy="3659124"/>
         </p:xfrm>
         <a:graphic>
           <a:graphicData uri="http://schemas.openxmlformats.org/drawingml/2006/table">
@@ -4394,9 +3886,27 @@
                 <a:tableStyleId>{5C22544A-7EE6-4342-B048-85BDC9FD1C3A}</a:tableStyleId>
               </a:tblPr>
               <a:tblGrid>
-                <a:gridCol w="1541526"/>
-                <a:gridCol w="4805934"/>
-                <a:gridCol w="4533900"/>
+                <a:gridCol w="1541526">
+                  <a:extLst>
+                    <a:ext uri="{9D8B030D-6E8A-4147-A177-3AD203B41FA5}">
+                      <a16:colId xmlns:a16="http://schemas.microsoft.com/office/drawing/2014/main" val="20000"/>
+                    </a:ext>
+                  </a:extLst>
+                </a:gridCol>
+                <a:gridCol w="4805934">
+                  <a:extLst>
+                    <a:ext uri="{9D8B030D-6E8A-4147-A177-3AD203B41FA5}">
+                      <a16:colId xmlns:a16="http://schemas.microsoft.com/office/drawing/2014/main" val="20001"/>
+                    </a:ext>
+                  </a:extLst>
+                </a:gridCol>
+                <a:gridCol w="4533900">
+                  <a:extLst>
+                    <a:ext uri="{9D8B030D-6E8A-4147-A177-3AD203B41FA5}">
+                      <a16:colId xmlns:a16="http://schemas.microsoft.com/office/drawing/2014/main" val="20002"/>
+                    </a:ext>
+                  </a:extLst>
+                </a:gridCol>
               </a:tblGrid>
               <a:tr h="406908">
                 <a:tc>
@@ -4468,6 +3978,11 @@
                     </a:solidFill>
                   </a:tcPr>
                 </a:tc>
+                <a:extLst>
+                  <a:ext uri="{0D108BD9-81ED-4DB2-BD59-A6C34878D82A}">
+                    <a16:rowId xmlns:a16="http://schemas.microsoft.com/office/drawing/2014/main" val="10000"/>
+                  </a:ext>
+                </a:extLst>
               </a:tr>
               <a:tr h="406908">
                 <a:tc>
@@ -4539,6 +4054,11 @@
                     </a:solidFill>
                   </a:tcPr>
                 </a:tc>
+                <a:extLst>
+                  <a:ext uri="{0D108BD9-81ED-4DB2-BD59-A6C34878D82A}">
+                    <a16:rowId xmlns:a16="http://schemas.microsoft.com/office/drawing/2014/main" val="10001"/>
+                  </a:ext>
+                </a:extLst>
               </a:tr>
               <a:tr h="406908">
                 <a:tc>
@@ -4610,6 +4130,11 @@
                     </a:solidFill>
                   </a:tcPr>
                 </a:tc>
+                <a:extLst>
+                  <a:ext uri="{0D108BD9-81ED-4DB2-BD59-A6C34878D82A}">
+                    <a16:rowId xmlns:a16="http://schemas.microsoft.com/office/drawing/2014/main" val="10002"/>
+                  </a:ext>
+                </a:extLst>
               </a:tr>
               <a:tr h="406908">
                 <a:tc>
@@ -4681,6 +4206,11 @@
                     </a:solidFill>
                   </a:tcPr>
                 </a:tc>
+                <a:extLst>
+                  <a:ext uri="{0D108BD9-81ED-4DB2-BD59-A6C34878D82A}">
+                    <a16:rowId xmlns:a16="http://schemas.microsoft.com/office/drawing/2014/main" val="10003"/>
+                  </a:ext>
+                </a:extLst>
               </a:tr>
               <a:tr h="406908">
                 <a:tc>
@@ -4752,6 +4282,11 @@
                     </a:solidFill>
                   </a:tcPr>
                 </a:tc>
+                <a:extLst>
+                  <a:ext uri="{0D108BD9-81ED-4DB2-BD59-A6C34878D82A}">
+                    <a16:rowId xmlns:a16="http://schemas.microsoft.com/office/drawing/2014/main" val="10004"/>
+                  </a:ext>
+                </a:extLst>
               </a:tr>
               <a:tr h="406908">
                 <a:tc>
@@ -4823,6 +4358,11 @@
                     </a:solidFill>
                   </a:tcPr>
                 </a:tc>
+                <a:extLst>
+                  <a:ext uri="{0D108BD9-81ED-4DB2-BD59-A6C34878D82A}">
+                    <a16:rowId xmlns:a16="http://schemas.microsoft.com/office/drawing/2014/main" val="10005"/>
+                  </a:ext>
+                </a:extLst>
               </a:tr>
               <a:tr h="406908">
                 <a:tc>
@@ -4894,6 +4434,11 @@
                     </a:solidFill>
                   </a:tcPr>
                 </a:tc>
+                <a:extLst>
+                  <a:ext uri="{0D108BD9-81ED-4DB2-BD59-A6C34878D82A}">
+                    <a16:rowId xmlns:a16="http://schemas.microsoft.com/office/drawing/2014/main" val="10006"/>
+                  </a:ext>
+                </a:extLst>
               </a:tr>
               <a:tr h="406908">
                 <a:tc>
@@ -4965,6 +4510,11 @@
                     </a:solidFill>
                   </a:tcPr>
                 </a:tc>
+                <a:extLst>
+                  <a:ext uri="{0D108BD9-81ED-4DB2-BD59-A6C34878D82A}">
+                    <a16:rowId xmlns:a16="http://schemas.microsoft.com/office/drawing/2014/main" val="10007"/>
+                  </a:ext>
+                </a:extLst>
               </a:tr>
             </a:tbl>
           </a:graphicData>
@@ -4978,8 +4528,8 @@
 </p:sld>
 </file>
 
-<file path=ppt/slides/slide14.xml><?xml version="1.0" encoding="utf-8"?>
-<p:sld xmlns:a="http://schemas.openxmlformats.org/drawingml/2006/main" xmlns:p="http://schemas.openxmlformats.org/presentationml/2006/main" xmlns:r="http://schemas.openxmlformats.org/officeDocument/2006/relationships">
+<file path=ppt/slides/slide12.xml><?xml version="1.0" encoding="utf-8"?>
+<p:sld xmlns:a="http://schemas.openxmlformats.org/drawingml/2006/main" xmlns:r="http://schemas.openxmlformats.org/officeDocument/2006/relationships" xmlns:p="http://schemas.openxmlformats.org/presentationml/2006/main">
   <p:cSld>
     <p:bg>
       <p:bgPr>
@@ -4995,7 +4545,14 @@
         <p:cNvGrpSpPr/>
         <p:nvPr/>
       </p:nvGrpSpPr>
-      <p:grpSpPr/>
+      <p:grpSpPr>
+        <a:xfrm>
+          <a:off x="0" y="0"/>
+          <a:ext cx="0" cy="0"/>
+          <a:chOff x="0" y="0"/>
+          <a:chExt cx="0" cy="0"/>
+        </a:xfrm>
+      </p:grpSpPr>
       <p:sp>
         <p:nvSpPr>
           <p:cNvPr id="2" name="Rectangle 1"/>
@@ -5037,6 +4594,7 @@
           <a:lstStyle/>
           <a:p>
             <a:pPr algn="ctr"/>
+            <a:endParaRPr/>
           </a:p>
         </p:txBody>
       </p:sp>
@@ -5132,8 +4690,8 @@
 </p:sld>
 </file>
 
-<file path=ppt/slides/slide15.xml><?xml version="1.0" encoding="utf-8"?>
-<p:sld xmlns:a="http://schemas.openxmlformats.org/drawingml/2006/main" xmlns:p="http://schemas.openxmlformats.org/presentationml/2006/main" xmlns:r="http://schemas.openxmlformats.org/officeDocument/2006/relationships">
+<file path=ppt/slides/slide13.xml><?xml version="1.0" encoding="utf-8"?>
+<p:sld xmlns:a="http://schemas.openxmlformats.org/drawingml/2006/main" xmlns:r="http://schemas.openxmlformats.org/officeDocument/2006/relationships" xmlns:p="http://schemas.openxmlformats.org/presentationml/2006/main">
   <p:cSld>
     <p:bg>
       <p:bgPr>
@@ -5149,7 +4707,14 @@
         <p:cNvGrpSpPr/>
         <p:nvPr/>
       </p:nvGrpSpPr>
-      <p:grpSpPr/>
+      <p:grpSpPr>
+        <a:xfrm>
+          <a:off x="0" y="0"/>
+          <a:ext cx="0" cy="0"/>
+          <a:chOff x="0" y="0"/>
+          <a:chExt cx="0" cy="0"/>
+        </a:xfrm>
+      </p:grpSpPr>
       <p:sp>
         <p:nvSpPr>
           <p:cNvPr id="2" name="TextBox 1"/>
@@ -5233,6 +4798,7 @@
           <a:lstStyle/>
           <a:p>
             <a:pPr algn="ctr"/>
+            <a:endParaRPr/>
           </a:p>
         </p:txBody>
       </p:sp>
@@ -5285,6 +4851,12 @@
                 <a:spcPts val="1000"/>
               </a:spcAft>
             </a:pPr>
+            <a:endParaRPr sz="1800" b="0">
+              <a:solidFill>
+                <a:srgbClr val="1A1D24"/>
+              </a:solidFill>
+              <a:latin typeface="Segoe UI"/>
+            </a:endParaRPr>
           </a:p>
           <a:p>
             <a:pPr algn="l">
@@ -5314,6 +4886,12 @@
                 <a:spcPts val="1000"/>
               </a:spcAft>
             </a:pPr>
+            <a:endParaRPr sz="1800" b="0">
+              <a:solidFill>
+                <a:srgbClr val="1A1D24"/>
+              </a:solidFill>
+              <a:latin typeface="Segoe UI"/>
+            </a:endParaRPr>
           </a:p>
           <a:p>
             <a:pPr algn="l">
@@ -5335,7 +4913,7 @@
             </a:r>
           </a:p>
           <a:p>
-            <a:pPr algn="l" lvl="1">
+            <a:pPr lvl="1" algn="l">
               <a:lnSpc>
                 <a:spcPct val="115000"/>
               </a:lnSpc>
@@ -5354,7 +4932,7 @@
             </a:r>
           </a:p>
           <a:p>
-            <a:pPr algn="l" lvl="1">
+            <a:pPr lvl="1" algn="l">
               <a:lnSpc>
                 <a:spcPct val="115000"/>
               </a:lnSpc>
@@ -5373,7 +4951,7 @@
             </a:r>
           </a:p>
           <a:p>
-            <a:pPr algn="l" lvl="1">
+            <a:pPr lvl="1" algn="l">
               <a:lnSpc>
                 <a:spcPct val="115000"/>
               </a:lnSpc>
@@ -5392,7 +4970,7 @@
             </a:r>
           </a:p>
           <a:p>
-            <a:pPr algn="l" lvl="1">
+            <a:pPr lvl="1" algn="l">
               <a:lnSpc>
                 <a:spcPct val="115000"/>
               </a:lnSpc>
@@ -5411,7 +4989,7 @@
             </a:r>
           </a:p>
           <a:p>
-            <a:pPr algn="l" lvl="1">
+            <a:pPr lvl="1" algn="l">
               <a:lnSpc>
                 <a:spcPct val="115000"/>
               </a:lnSpc>
@@ -5438,6 +5016,12 @@
                 <a:spcPts val="1000"/>
               </a:spcAft>
             </a:pPr>
+            <a:endParaRPr sz="1800" b="0">
+              <a:solidFill>
+                <a:srgbClr val="1A1D24"/>
+              </a:solidFill>
+              <a:latin typeface="Segoe UI"/>
+            </a:endParaRPr>
           </a:p>
           <a:p>
             <a:pPr algn="l">
@@ -5510,8 +5094,8 @@
 </p:sld>
 </file>
 
-<file path=ppt/slides/slide16.xml><?xml version="1.0" encoding="utf-8"?>
-<p:sld xmlns:a="http://schemas.openxmlformats.org/drawingml/2006/main" xmlns:p="http://schemas.openxmlformats.org/presentationml/2006/main" xmlns:r="http://schemas.openxmlformats.org/officeDocument/2006/relationships">
+<file path=ppt/slides/slide14.xml><?xml version="1.0" encoding="utf-8"?>
+<p:sld xmlns:a="http://schemas.openxmlformats.org/drawingml/2006/main" xmlns:r="http://schemas.openxmlformats.org/officeDocument/2006/relationships" xmlns:p="http://schemas.openxmlformats.org/presentationml/2006/main">
   <p:cSld>
     <p:bg>
       <p:bgPr>
@@ -5527,7 +5111,14 @@
         <p:cNvGrpSpPr/>
         <p:nvPr/>
       </p:nvGrpSpPr>
-      <p:grpSpPr/>
+      <p:grpSpPr>
+        <a:xfrm>
+          <a:off x="0" y="0"/>
+          <a:ext cx="0" cy="0"/>
+          <a:chOff x="0" y="0"/>
+          <a:chExt cx="0" cy="0"/>
+        </a:xfrm>
+      </p:grpSpPr>
       <p:sp>
         <p:nvSpPr>
           <p:cNvPr id="2" name="Rectangle 1"/>
@@ -5569,6 +5160,7 @@
           <a:lstStyle/>
           <a:p>
             <a:pPr algn="ctr"/>
+            <a:endParaRPr/>
           </a:p>
         </p:txBody>
       </p:sp>
@@ -5664,8 +5256,8 @@
 </p:sld>
 </file>
 
-<file path=ppt/slides/slide17.xml><?xml version="1.0" encoding="utf-8"?>
-<p:sld xmlns:a="http://schemas.openxmlformats.org/drawingml/2006/main" xmlns:p="http://schemas.openxmlformats.org/presentationml/2006/main" xmlns:r="http://schemas.openxmlformats.org/officeDocument/2006/relationships">
+<file path=ppt/slides/slide15.xml><?xml version="1.0" encoding="utf-8"?>
+<p:sld xmlns:a="http://schemas.openxmlformats.org/drawingml/2006/main" xmlns:r="http://schemas.openxmlformats.org/officeDocument/2006/relationships" xmlns:p="http://schemas.openxmlformats.org/presentationml/2006/main">
   <p:cSld>
     <p:bg>
       <p:bgPr>
@@ -5681,7 +5273,14 @@
         <p:cNvGrpSpPr/>
         <p:nvPr/>
       </p:nvGrpSpPr>
-      <p:grpSpPr/>
+      <p:grpSpPr>
+        <a:xfrm>
+          <a:off x="0" y="0"/>
+          <a:ext cx="0" cy="0"/>
+          <a:chOff x="0" y="0"/>
+          <a:chExt cx="0" cy="0"/>
+        </a:xfrm>
+      </p:grpSpPr>
       <p:sp>
         <p:nvSpPr>
           <p:cNvPr id="2" name="TextBox 1"/>
@@ -5765,6 +5364,7 @@
           <a:lstStyle/>
           <a:p>
             <a:pPr algn="ctr"/>
+            <a:endParaRPr/>
           </a:p>
         </p:txBody>
       </p:sp>
@@ -5787,10 +5387,34 @@
                 <a:tableStyleId>{5C22544A-7EE6-4342-B048-85BDC9FD1C3A}</a:tableStyleId>
               </a:tblPr>
               <a:tblGrid>
-                <a:gridCol w="453390"/>
-                <a:gridCol w="3808476"/>
-                <a:gridCol w="5259324"/>
-                <a:gridCol w="1360170"/>
+                <a:gridCol w="453390">
+                  <a:extLst>
+                    <a:ext uri="{9D8B030D-6E8A-4147-A177-3AD203B41FA5}">
+                      <a16:colId xmlns:a16="http://schemas.microsoft.com/office/drawing/2014/main" val="20000"/>
+                    </a:ext>
+                  </a:extLst>
+                </a:gridCol>
+                <a:gridCol w="3808476">
+                  <a:extLst>
+                    <a:ext uri="{9D8B030D-6E8A-4147-A177-3AD203B41FA5}">
+                      <a16:colId xmlns:a16="http://schemas.microsoft.com/office/drawing/2014/main" val="20001"/>
+                    </a:ext>
+                  </a:extLst>
+                </a:gridCol>
+                <a:gridCol w="5259324">
+                  <a:extLst>
+                    <a:ext uri="{9D8B030D-6E8A-4147-A177-3AD203B41FA5}">
+                      <a16:colId xmlns:a16="http://schemas.microsoft.com/office/drawing/2014/main" val="20002"/>
+                    </a:ext>
+                  </a:extLst>
+                </a:gridCol>
+                <a:gridCol w="1360170">
+                  <a:extLst>
+                    <a:ext uri="{9D8B030D-6E8A-4147-A177-3AD203B41FA5}">
+                      <a16:colId xmlns:a16="http://schemas.microsoft.com/office/drawing/2014/main" val="20003"/>
+                    </a:ext>
+                  </a:extLst>
+                </a:gridCol>
               </a:tblGrid>
               <a:tr h="404368">
                 <a:tc>
@@ -5885,6 +5509,11 @@
                     </a:solidFill>
                   </a:tcPr>
                 </a:tc>
+                <a:extLst>
+                  <a:ext uri="{0D108BD9-81ED-4DB2-BD59-A6C34878D82A}">
+                    <a16:rowId xmlns:a16="http://schemas.microsoft.com/office/drawing/2014/main" val="10000"/>
+                  </a:ext>
+                </a:extLst>
               </a:tr>
               <a:tr h="404368">
                 <a:tc>
@@ -5979,6 +5608,11 @@
                     </a:solidFill>
                   </a:tcPr>
                 </a:tc>
+                <a:extLst>
+                  <a:ext uri="{0D108BD9-81ED-4DB2-BD59-A6C34878D82A}">
+                    <a16:rowId xmlns:a16="http://schemas.microsoft.com/office/drawing/2014/main" val="10001"/>
+                  </a:ext>
+                </a:extLst>
               </a:tr>
               <a:tr h="404368">
                 <a:tc>
@@ -6073,6 +5707,11 @@
                     </a:solidFill>
                   </a:tcPr>
                 </a:tc>
+                <a:extLst>
+                  <a:ext uri="{0D108BD9-81ED-4DB2-BD59-A6C34878D82A}">
+                    <a16:rowId xmlns:a16="http://schemas.microsoft.com/office/drawing/2014/main" val="10002"/>
+                  </a:ext>
+                </a:extLst>
               </a:tr>
               <a:tr h="404368">
                 <a:tc>
@@ -6167,6 +5806,11 @@
                     </a:solidFill>
                   </a:tcPr>
                 </a:tc>
+                <a:extLst>
+                  <a:ext uri="{0D108BD9-81ED-4DB2-BD59-A6C34878D82A}">
+                    <a16:rowId xmlns:a16="http://schemas.microsoft.com/office/drawing/2014/main" val="10003"/>
+                  </a:ext>
+                </a:extLst>
               </a:tr>
               <a:tr h="404368">
                 <a:tc>
@@ -6261,6 +5905,11 @@
                     </a:solidFill>
                   </a:tcPr>
                 </a:tc>
+                <a:extLst>
+                  <a:ext uri="{0D108BD9-81ED-4DB2-BD59-A6C34878D82A}">
+                    <a16:rowId xmlns:a16="http://schemas.microsoft.com/office/drawing/2014/main" val="10004"/>
+                  </a:ext>
+                </a:extLst>
               </a:tr>
               <a:tr h="404368">
                 <a:tc>
@@ -6355,6 +6004,11 @@
                     </a:solidFill>
                   </a:tcPr>
                 </a:tc>
+                <a:extLst>
+                  <a:ext uri="{0D108BD9-81ED-4DB2-BD59-A6C34878D82A}">
+                    <a16:rowId xmlns:a16="http://schemas.microsoft.com/office/drawing/2014/main" val="10005"/>
+                  </a:ext>
+                </a:extLst>
               </a:tr>
               <a:tr h="404368">
                 <a:tc>
@@ -6449,6 +6103,11 @@
                     </a:solidFill>
                   </a:tcPr>
                 </a:tc>
+                <a:extLst>
+                  <a:ext uri="{0D108BD9-81ED-4DB2-BD59-A6C34878D82A}">
+                    <a16:rowId xmlns:a16="http://schemas.microsoft.com/office/drawing/2014/main" val="10006"/>
+                  </a:ext>
+                </a:extLst>
               </a:tr>
               <a:tr h="404368">
                 <a:tc>
@@ -6543,6 +6202,11 @@
                     </a:solidFill>
                   </a:tcPr>
                 </a:tc>
+                <a:extLst>
+                  <a:ext uri="{0D108BD9-81ED-4DB2-BD59-A6C34878D82A}">
+                    <a16:rowId xmlns:a16="http://schemas.microsoft.com/office/drawing/2014/main" val="10007"/>
+                  </a:ext>
+                </a:extLst>
               </a:tr>
               <a:tr h="404368">
                 <a:tc>
@@ -6637,6 +6301,11 @@
                     </a:solidFill>
                   </a:tcPr>
                 </a:tc>
+                <a:extLst>
+                  <a:ext uri="{0D108BD9-81ED-4DB2-BD59-A6C34878D82A}">
+                    <a16:rowId xmlns:a16="http://schemas.microsoft.com/office/drawing/2014/main" val="10008"/>
+                  </a:ext>
+                </a:extLst>
               </a:tr>
             </a:tbl>
           </a:graphicData>
@@ -6692,8 +6361,8 @@
 </p:sld>
 </file>
 
-<file path=ppt/slides/slide18.xml><?xml version="1.0" encoding="utf-8"?>
-<p:sld xmlns:a="http://schemas.openxmlformats.org/drawingml/2006/main" xmlns:p="http://schemas.openxmlformats.org/presentationml/2006/main" xmlns:r="http://schemas.openxmlformats.org/officeDocument/2006/relationships">
+<file path=ppt/slides/slide16.xml><?xml version="1.0" encoding="utf-8"?>
+<p:sld xmlns:a="http://schemas.openxmlformats.org/drawingml/2006/main" xmlns:r="http://schemas.openxmlformats.org/officeDocument/2006/relationships" xmlns:p="http://schemas.openxmlformats.org/presentationml/2006/main">
   <p:cSld>
     <p:bg>
       <p:bgPr>
@@ -6709,7 +6378,14 @@
         <p:cNvGrpSpPr/>
         <p:nvPr/>
       </p:nvGrpSpPr>
-      <p:grpSpPr/>
+      <p:grpSpPr>
+        <a:xfrm>
+          <a:off x="0" y="0"/>
+          <a:ext cx="0" cy="0"/>
+          <a:chOff x="0" y="0"/>
+          <a:chExt cx="0" cy="0"/>
+        </a:xfrm>
+      </p:grpSpPr>
       <p:sp>
         <p:nvSpPr>
           <p:cNvPr id="2" name="TextBox 1"/>
@@ -6793,6 +6469,7 @@
           <a:lstStyle/>
           <a:p>
             <a:pPr algn="ctr"/>
+            <a:endParaRPr/>
           </a:p>
         </p:txBody>
       </p:sp>
@@ -6845,6 +6522,12 @@
                 <a:spcPts val="1000"/>
               </a:spcAft>
             </a:pPr>
+            <a:endParaRPr sz="1800" b="0">
+              <a:solidFill>
+                <a:srgbClr val="1A1D24"/>
+              </a:solidFill>
+              <a:latin typeface="Segoe UI"/>
+            </a:endParaRPr>
           </a:p>
           <a:p>
             <a:pPr algn="l">
@@ -6874,6 +6557,12 @@
                 <a:spcPts val="1000"/>
               </a:spcAft>
             </a:pPr>
+            <a:endParaRPr sz="1800" b="0">
+              <a:solidFill>
+                <a:srgbClr val="1A1D24"/>
+              </a:solidFill>
+              <a:latin typeface="Segoe UI"/>
+            </a:endParaRPr>
           </a:p>
           <a:p>
             <a:pPr algn="l">
@@ -6903,6 +6592,12 @@
                 <a:spcPts val="1000"/>
               </a:spcAft>
             </a:pPr>
+            <a:endParaRPr sz="1800" b="0">
+              <a:solidFill>
+                <a:srgbClr val="1A1D24"/>
+              </a:solidFill>
+              <a:latin typeface="Segoe UI"/>
+            </a:endParaRPr>
           </a:p>
           <a:p>
             <a:pPr algn="l">
@@ -6975,8 +6670,8 @@
 </p:sld>
 </file>
 
-<file path=ppt/slides/slide19.xml><?xml version="1.0" encoding="utf-8"?>
-<p:sld xmlns:a="http://schemas.openxmlformats.org/drawingml/2006/main" xmlns:p="http://schemas.openxmlformats.org/presentationml/2006/main" xmlns:r="http://schemas.openxmlformats.org/officeDocument/2006/relationships">
+<file path=ppt/slides/slide17.xml><?xml version="1.0" encoding="utf-8"?>
+<p:sld xmlns:a="http://schemas.openxmlformats.org/drawingml/2006/main" xmlns:r="http://schemas.openxmlformats.org/officeDocument/2006/relationships" xmlns:p="http://schemas.openxmlformats.org/presentationml/2006/main">
   <p:cSld>
     <p:bg>
       <p:bgPr>
@@ -6992,7 +6687,14 @@
         <p:cNvGrpSpPr/>
         <p:nvPr/>
       </p:nvGrpSpPr>
-      <p:grpSpPr/>
+      <p:grpSpPr>
+        <a:xfrm>
+          <a:off x="0" y="0"/>
+          <a:ext cx="0" cy="0"/>
+          <a:chOff x="0" y="0"/>
+          <a:chExt cx="0" cy="0"/>
+        </a:xfrm>
+      </p:grpSpPr>
       <p:sp>
         <p:nvSpPr>
           <p:cNvPr id="2" name="TextBox 1"/>
@@ -7076,6 +6778,7 @@
           <a:lstStyle/>
           <a:p>
             <a:pPr algn="ctr"/>
+            <a:endParaRPr/>
           </a:p>
         </p:txBody>
       </p:sp>
@@ -7098,9 +6801,27 @@
                 <a:tableStyleId>{5C22544A-7EE6-4342-B048-85BDC9FD1C3A}</a:tableStyleId>
               </a:tblPr>
               <a:tblGrid>
-                <a:gridCol w="3766624"/>
-                <a:gridCol w="2092569"/>
-                <a:gridCol w="5022166"/>
+                <a:gridCol w="3766624">
+                  <a:extLst>
+                    <a:ext uri="{9D8B030D-6E8A-4147-A177-3AD203B41FA5}">
+                      <a16:colId xmlns:a16="http://schemas.microsoft.com/office/drawing/2014/main" val="20000"/>
+                    </a:ext>
+                  </a:extLst>
+                </a:gridCol>
+                <a:gridCol w="2092569">
+                  <a:extLst>
+                    <a:ext uri="{9D8B030D-6E8A-4147-A177-3AD203B41FA5}">
+                      <a16:colId xmlns:a16="http://schemas.microsoft.com/office/drawing/2014/main" val="20001"/>
+                    </a:ext>
+                  </a:extLst>
+                </a:gridCol>
+                <a:gridCol w="5022166">
+                  <a:extLst>
+                    <a:ext uri="{9D8B030D-6E8A-4147-A177-3AD203B41FA5}">
+                      <a16:colId xmlns:a16="http://schemas.microsoft.com/office/drawing/2014/main" val="20002"/>
+                    </a:ext>
+                  </a:extLst>
+                </a:gridCol>
               </a:tblGrid>
               <a:tr h="414528">
                 <a:tc>
@@ -7172,6 +6893,11 @@
                     </a:solidFill>
                   </a:tcPr>
                 </a:tc>
+                <a:extLst>
+                  <a:ext uri="{0D108BD9-81ED-4DB2-BD59-A6C34878D82A}">
+                    <a16:rowId xmlns:a16="http://schemas.microsoft.com/office/drawing/2014/main" val="10000"/>
+                  </a:ext>
+                </a:extLst>
               </a:tr>
               <a:tr h="414528">
                 <a:tc>
@@ -7243,6 +6969,11 @@
                     </a:solidFill>
                   </a:tcPr>
                 </a:tc>
+                <a:extLst>
+                  <a:ext uri="{0D108BD9-81ED-4DB2-BD59-A6C34878D82A}">
+                    <a16:rowId xmlns:a16="http://schemas.microsoft.com/office/drawing/2014/main" val="10001"/>
+                  </a:ext>
+                </a:extLst>
               </a:tr>
               <a:tr h="414528">
                 <a:tc>
@@ -7314,6 +7045,11 @@
                     </a:solidFill>
                   </a:tcPr>
                 </a:tc>
+                <a:extLst>
+                  <a:ext uri="{0D108BD9-81ED-4DB2-BD59-A6C34878D82A}">
+                    <a16:rowId xmlns:a16="http://schemas.microsoft.com/office/drawing/2014/main" val="10002"/>
+                  </a:ext>
+                </a:extLst>
               </a:tr>
               <a:tr h="414528">
                 <a:tc>
@@ -7385,6 +7121,11 @@
                     </a:solidFill>
                   </a:tcPr>
                 </a:tc>
+                <a:extLst>
+                  <a:ext uri="{0D108BD9-81ED-4DB2-BD59-A6C34878D82A}">
+                    <a16:rowId xmlns:a16="http://schemas.microsoft.com/office/drawing/2014/main" val="10003"/>
+                  </a:ext>
+                </a:extLst>
               </a:tr>
               <a:tr h="414528">
                 <a:tc>
@@ -7456,6 +7197,11 @@
                     </a:solidFill>
                   </a:tcPr>
                 </a:tc>
+                <a:extLst>
+                  <a:ext uri="{0D108BD9-81ED-4DB2-BD59-A6C34878D82A}">
+                    <a16:rowId xmlns:a16="http://schemas.microsoft.com/office/drawing/2014/main" val="10004"/>
+                  </a:ext>
+                </a:extLst>
               </a:tr>
               <a:tr h="414528">
                 <a:tc>
@@ -7527,6 +7273,11 @@
                     </a:solidFill>
                   </a:tcPr>
                 </a:tc>
+                <a:extLst>
+                  <a:ext uri="{0D108BD9-81ED-4DB2-BD59-A6C34878D82A}">
+                    <a16:rowId xmlns:a16="http://schemas.microsoft.com/office/drawing/2014/main" val="10005"/>
+                  </a:ext>
+                </a:extLst>
               </a:tr>
             </a:tbl>
           </a:graphicData>
@@ -7582,8 +7333,8 @@
 </p:sld>
 </file>
 
-<file path=ppt/slides/slide2.xml><?xml version="1.0" encoding="utf-8"?>
-<p:sld xmlns:a="http://schemas.openxmlformats.org/drawingml/2006/main" xmlns:p="http://schemas.openxmlformats.org/presentationml/2006/main" xmlns:r="http://schemas.openxmlformats.org/officeDocument/2006/relationships">
+<file path=ppt/slides/slide18.xml><?xml version="1.0" encoding="utf-8"?>
+<p:sld xmlns:a="http://schemas.openxmlformats.org/drawingml/2006/main" xmlns:r="http://schemas.openxmlformats.org/officeDocument/2006/relationships" xmlns:p="http://schemas.openxmlformats.org/presentationml/2006/main">
   <p:cSld>
     <p:bg>
       <p:bgPr>
@@ -7599,7 +7350,14 @@
         <p:cNvGrpSpPr/>
         <p:nvPr/>
       </p:nvGrpSpPr>
-      <p:grpSpPr/>
+      <p:grpSpPr>
+        <a:xfrm>
+          <a:off x="0" y="0"/>
+          <a:ext cx="0" cy="0"/>
+          <a:chOff x="0" y="0"/>
+          <a:chExt cx="0" cy="0"/>
+        </a:xfrm>
+      </p:grpSpPr>
       <p:sp>
         <p:nvSpPr>
           <p:cNvPr id="2" name="TextBox 1"/>
@@ -7637,7 +7395,7 @@
                 </a:solidFill>
                 <a:latin typeface="Segoe UI"/>
               </a:rPr>
-              <a:t>The idea, in plain language</a:t>
+              <a:t>What I need from the room</a:t>
             </a:r>
           </a:p>
         </p:txBody>
@@ -7683,6 +7441,7 @@
           <a:lstStyle/>
           <a:p>
             <a:pPr algn="ctr"/>
+            <a:endParaRPr/>
           </a:p>
         </p:txBody>
       </p:sp>
@@ -7723,7 +7482,7 @@
                 </a:solidFill>
                 <a:latin typeface="Segoe UI"/>
               </a:rPr>
-              <a:t>A memory is stored as two things: a GIST (the gene­ral point) and DETAILS (names, numbers, dates).</a:t>
+              <a:t>1.  Do we restart training from scratch with the bigger encoder? (My view: yes — the old checkpoints are invalid anyway because of the sentence-length bug.)</a:t>
             </a:r>
           </a:p>
           <a:p>
@@ -7735,6 +7494,12 @@
                 <a:spcPts val="1000"/>
               </a:spcAft>
             </a:pPr>
+            <a:endParaRPr sz="1800" b="0">
+              <a:solidFill>
+                <a:srgbClr val="1A1D24"/>
+              </a:solidFill>
+              <a:latin typeface="Segoe UI"/>
+            </a:endParaRPr>
           </a:p>
           <a:p>
             <a:pPr algn="l">
@@ -7752,7 +7517,7 @@
                 </a:solidFill>
                 <a:latin typeface="Segoe UI"/>
               </a:rPr>
-              <a:t>Time passing = adding noise to the details. The gist is left untouched.</a:t>
+              <a:t>2.  Do we keep MSR sentences, or move to a real long-conversation benchmark (LOCOMO / LongMemEval) for the memory story?</a:t>
             </a:r>
           </a:p>
           <a:p>
@@ -7764,6 +7529,12 @@
                 <a:spcPts val="1000"/>
               </a:spcAft>
             </a:pPr>
+            <a:endParaRPr sz="1800" b="0">
+              <a:solidFill>
+                <a:srgbClr val="1A1D24"/>
+              </a:solidFill>
+              <a:latin typeface="Segoe UI"/>
+            </a:endParaRPr>
           </a:p>
           <a:p>
             <a:pPr algn="l">
@@ -7781,7 +7552,7 @@
                 </a:solidFill>
                 <a:latin typeface="Segoe UI"/>
               </a:rPr>
-              <a:t>Remembering = removing that noise step by step, using the gist as the cue. Stop early and you get a true-but-vague answer; keep going and the specifics come back.</a:t>
+              <a:t>3.  Is 'gist-anchored forgetting' a headline experiment or a footnote? (My view: headline — it is the most original thing here.)</a:t>
             </a:r>
           </a:p>
           <a:p>
@@ -7793,6 +7564,12 @@
                 <a:spcPts val="1000"/>
               </a:spcAft>
             </a:pPr>
+            <a:endParaRPr sz="1800" b="0">
+              <a:solidFill>
+                <a:srgbClr val="1A1D24"/>
+              </a:solidFill>
+              <a:latin typeface="Segoe UI"/>
+            </a:endParaRPr>
           </a:p>
           <a:p>
             <a:pPr algn="l">
@@ -7810,7 +7587,7 @@
                 </a:solidFill>
                 <a:latin typeface="Segoe UI"/>
               </a:rPr>
-              <a:t>Why anyone should care: normal retrieval is a switch — you get the whole stored passage or nothing. We want a dial.</a:t>
+              <a:t>4.  Who takes which workstream? Data + metrics, model, diffusion, and downstream QA can all proceed in parallel.</a:t>
             </a:r>
           </a:p>
           <a:p>
@@ -7822,6 +7599,12 @@
                 <a:spcPts val="1000"/>
               </a:spcAft>
             </a:pPr>
+            <a:endParaRPr sz="1800" b="0">
+              <a:solidFill>
+                <a:srgbClr val="1A1D24"/>
+              </a:solidFill>
+              <a:latin typeface="Segoe UI"/>
+            </a:endParaRPr>
           </a:p>
           <a:p>
             <a:pPr algn="l">
@@ -7839,7 +7622,7 @@
                 </a:solidFill>
                 <a:latin typeface="Segoe UI"/>
               </a:rPr>
-              <a:t>And a dial is only useful if turning it down never makes you WRONG, only less specific.</a:t>
+              <a:t>5.  Do we have GPU access sorted — Unity, Azure credits, or do we pay?</a:t>
             </a:r>
           </a:p>
         </p:txBody>
@@ -7881,7 +7664,7 @@
                 </a:solidFill>
                 <a:latin typeface="Segoe UI"/>
               </a:rPr>
-              <a:t>That last line is the whole claim. Everything we measure is aimed at it.</a:t>
+              <a:t>Full technical detail, including all 16 defects and the reasoning behind every change, is in RESEARCH_PLAN.md in the repo.</a:t>
             </a:r>
           </a:p>
         </p:txBody>
@@ -7894,8 +7677,8 @@
 </p:sld>
 </file>
 
-<file path=ppt/slides/slide20.xml><?xml version="1.0" encoding="utf-8"?>
-<p:sld xmlns:a="http://schemas.openxmlformats.org/drawingml/2006/main" xmlns:p="http://schemas.openxmlformats.org/presentationml/2006/main" xmlns:r="http://schemas.openxmlformats.org/officeDocument/2006/relationships">
+<file path=ppt/slides/slide19.xml><?xml version="1.0" encoding="utf-8"?>
+<p:sld xmlns:a="http://schemas.openxmlformats.org/drawingml/2006/main" xmlns:r="http://schemas.openxmlformats.org/officeDocument/2006/relationships" xmlns:p="http://schemas.openxmlformats.org/presentationml/2006/main">
   <p:cSld>
     <p:bg>
       <p:bgPr>
@@ -7911,17 +7694,69 @@
         <p:cNvGrpSpPr/>
         <p:nvPr/>
       </p:nvGrpSpPr>
-      <p:grpSpPr/>
-      <p:sp>
-        <p:nvSpPr>
-          <p:cNvPr id="2" name="TextBox 1"/>
+      <p:grpSpPr>
+        <a:xfrm>
+          <a:off x="0" y="0"/>
+          <a:ext cx="0" cy="0"/>
+          <a:chOff x="0" y="0"/>
+          <a:chExt cx="0" cy="0"/>
+        </a:xfrm>
+      </p:grpSpPr>
+      <p:sp>
+        <p:nvSpPr>
+          <p:cNvPr id="2" name="Rectangle 1"/>
+          <p:cNvSpPr/>
+          <p:nvPr/>
+        </p:nvSpPr>
+        <p:spPr>
+          <a:xfrm>
+            <a:off x="0" y="2011680"/>
+            <a:ext cx="12191695" cy="2194560"/>
+          </a:xfrm>
+          <a:prstGeom prst="rect">
+            <a:avLst/>
+          </a:prstGeom>
+          <a:solidFill>
+            <a:srgbClr val="F2F5F9"/>
+          </a:solidFill>
+          <a:ln>
+            <a:noFill/>
+          </a:ln>
+          <a:effectLst/>
+        </p:spPr>
+        <p:style>
+          <a:lnRef idx="1">
+            <a:schemeClr val="accent1"/>
+          </a:lnRef>
+          <a:fillRef idx="3">
+            <a:schemeClr val="accent1"/>
+          </a:fillRef>
+          <a:effectRef idx="2">
+            <a:schemeClr val="accent1"/>
+          </a:effectRef>
+          <a:fontRef idx="minor">
+            <a:schemeClr val="lt1"/>
+          </a:fontRef>
+        </p:style>
+        <p:txBody>
+          <a:bodyPr rtlCol="0" anchor="ctr"/>
+          <a:lstStyle/>
+          <a:p>
+            <a:pPr algn="ctr"/>
+            <a:endParaRPr/>
+          </a:p>
+        </p:txBody>
+      </p:sp>
+      <p:sp>
+        <p:nvSpPr>
+          <p:cNvPr id="3" name="TextBox 2"/>
           <p:cNvSpPr txBox="1"/>
           <p:nvPr/>
         </p:nvSpPr>
         <p:spPr>
           <a:xfrm>
-            <a:off x="640080" y="411480"/>
-            <a:ext cx="10881360" cy="640080"/>
+            <a:off x="822960" y="2286000"/>
+            <a:ext cx="10515600" cy="457200"/>
           </a:xfrm>
           <a:prstGeom prst="rect">
             <a:avLst/>
@@ -7943,20 +7778,409 @@
               </a:spcAft>
             </a:pPr>
             <a:r>
-              <a:rPr sz="2800" b="1">
-                <a:solidFill>
-                  <a:srgbClr val="1A1D24"/>
+              <a:rPr sz="1500" b="1">
+                <a:solidFill>
+                  <a:srgbClr val="1F6FD4"/>
                 </a:solidFill>
                 <a:latin typeface="Segoe UI"/>
               </a:rPr>
-              <a:t>What I need from the room</a:t>
-            </a:r>
-          </a:p>
-        </p:txBody>
-      </p:sp>
-      <p:sp>
-        <p:nvSpPr>
-          <p:cNvPr id="3" name="Rectangle 2"/>
+              <a:t>WHERE WE ARE</a:t>
+            </a:r>
+          </a:p>
+        </p:txBody>
+      </p:sp>
+      <p:sp>
+        <p:nvSpPr>
+          <p:cNvPr id="4" name="TextBox 3"/>
+          <p:cNvSpPr txBox="1"/>
+          <p:nvPr/>
+        </p:nvSpPr>
+        <p:spPr>
+          <a:xfrm>
+            <a:off x="822960" y="2697480"/>
+            <a:ext cx="10515600" cy="1463040"/>
+          </a:xfrm>
+          <a:prstGeom prst="rect">
+            <a:avLst/>
+          </a:prstGeom>
+          <a:noFill/>
+        </p:spPr>
+        <p:txBody>
+          <a:bodyPr wrap="square">
+            <a:spAutoFit/>
+          </a:bodyPr>
+          <a:lstStyle/>
+          <a:p>
+            <a:pPr algn="l">
+              <a:lnSpc>
+                <a:spcPct val="115000"/>
+              </a:lnSpc>
+              <a:spcAft>
+                <a:spcPts val="600"/>
+              </a:spcAft>
+            </a:pPr>
+            <a:r>
+              <a:rPr sz="2600" b="1">
+                <a:solidFill>
+                  <a:srgbClr val="1A1D24"/>
+                </a:solidFill>
+                <a:latin typeface="Segoe UI"/>
+              </a:rPr>
+              <a:t>The pipeline is rebuilt, tested and runnable.</a:t>
+            </a:r>
+          </a:p>
+          <a:p>
+            <a:pPr algn="l">
+              <a:lnSpc>
+                <a:spcPct val="115000"/>
+              </a:lnSpc>
+              <a:spcAft>
+                <a:spcPts val="600"/>
+              </a:spcAft>
+            </a:pPr>
+            <a:r>
+              <a:rPr sz="2600" b="1">
+                <a:solidFill>
+                  <a:srgbClr val="1A1D24"/>
+                </a:solidFill>
+                <a:latin typeface="Segoe UI"/>
+              </a:rPr>
+              <a:t>The data says the problem is ours to fix, not the data's.</a:t>
+            </a:r>
+          </a:p>
+        </p:txBody>
+      </p:sp>
+      <p:sp>
+        <p:nvSpPr>
+          <p:cNvPr id="5" name="TextBox 4"/>
+          <p:cNvSpPr txBox="1"/>
+          <p:nvPr/>
+        </p:nvSpPr>
+        <p:spPr>
+          <a:xfrm>
+            <a:off x="822960" y="4572000"/>
+            <a:ext cx="10515600" cy="1463040"/>
+          </a:xfrm>
+          <a:prstGeom prst="rect">
+            <a:avLst/>
+          </a:prstGeom>
+          <a:noFill/>
+        </p:spPr>
+        <p:txBody>
+          <a:bodyPr wrap="square">
+            <a:spAutoFit/>
+          </a:bodyPr>
+          <a:lstStyle/>
+          <a:p>
+            <a:pPr algn="l">
+              <a:lnSpc>
+                <a:spcPct val="115000"/>
+              </a:lnSpc>
+              <a:spcAft>
+                <a:spcPts val="800"/>
+              </a:spcAft>
+            </a:pPr>
+            <a:r>
+              <a:rPr sz="1800" b="0">
+                <a:solidFill>
+                  <a:srgbClr val="5F6B7A"/>
+                </a:solidFill>
+                <a:latin typeface="Segoe UI"/>
+              </a:rPr>
+              <a:t>Next: Gate 0 (10 min) → Gate 2 baseline (1 h) → train.</a:t>
+            </a:r>
+          </a:p>
+          <a:p>
+            <a:pPr algn="l">
+              <a:lnSpc>
+                <a:spcPct val="115000"/>
+              </a:lnSpc>
+              <a:spcAft>
+                <a:spcPts val="800"/>
+              </a:spcAft>
+            </a:pPr>
+            <a:r>
+              <a:rPr sz="1800" b="0">
+                <a:solidFill>
+                  <a:srgbClr val="5F6B7A"/>
+                </a:solidFill>
+                <a:latin typeface="Segoe UI"/>
+              </a:rPr>
+              <a:t>Everything else is already written and waiting for a GPU.</a:t>
+            </a:r>
+          </a:p>
+        </p:txBody>
+      </p:sp>
+    </p:spTree>
+  </p:cSld>
+  <p:clrMapOvr>
+    <a:masterClrMapping/>
+  </p:clrMapOvr>
+</p:sld>
+</file>
+
+<file path=ppt/slides/slide2.xml><?xml version="1.0" encoding="utf-8"?>
+<p:sld xmlns:a="http://schemas.openxmlformats.org/drawingml/2006/main" xmlns:r="http://schemas.openxmlformats.org/officeDocument/2006/relationships" xmlns:p="http://schemas.openxmlformats.org/presentationml/2006/main">
+  <p:cSld>
+    <p:bg>
+      <p:bgPr>
+        <a:solidFill>
+          <a:srgbClr val="FFFFFF"/>
+        </a:solidFill>
+        <a:effectLst/>
+      </p:bgPr>
+    </p:bg>
+    <p:spTree>
+      <p:nvGrpSpPr>
+        <p:cNvPr id="1" name=""/>
+        <p:cNvGrpSpPr/>
+        <p:nvPr/>
+      </p:nvGrpSpPr>
+      <p:grpSpPr>
+        <a:xfrm>
+          <a:off x="0" y="0"/>
+          <a:ext cx="0" cy="0"/>
+          <a:chOff x="0" y="0"/>
+          <a:chExt cx="0" cy="0"/>
+        </a:xfrm>
+      </p:grpSpPr>
+      <p:sp>
+        <p:nvSpPr>
+          <p:cNvPr id="2" name="Rectangle 1"/>
+          <p:cNvSpPr/>
+          <p:nvPr/>
+        </p:nvSpPr>
+        <p:spPr>
+          <a:xfrm>
+            <a:off x="0" y="2194560"/>
+            <a:ext cx="12191695" cy="1828800"/>
+          </a:xfrm>
+          <a:prstGeom prst="rect">
+            <a:avLst/>
+          </a:prstGeom>
+          <a:solidFill>
+            <a:srgbClr val="F2F5F9"/>
+          </a:solidFill>
+          <a:ln>
+            <a:noFill/>
+          </a:ln>
+          <a:effectLst/>
+        </p:spPr>
+        <p:style>
+          <a:lnRef idx="1">
+            <a:schemeClr val="accent1"/>
+          </a:lnRef>
+          <a:fillRef idx="3">
+            <a:schemeClr val="accent1"/>
+          </a:fillRef>
+          <a:effectRef idx="2">
+            <a:schemeClr val="accent1"/>
+          </a:effectRef>
+          <a:fontRef idx="minor">
+            <a:schemeClr val="lt1"/>
+          </a:fontRef>
+        </p:style>
+        <p:txBody>
+          <a:bodyPr rtlCol="0" anchor="ctr"/>
+          <a:lstStyle/>
+          <a:p>
+            <a:pPr algn="ctr"/>
+            <a:endParaRPr/>
+          </a:p>
+        </p:txBody>
+      </p:sp>
+      <p:sp>
+        <p:nvSpPr>
+          <p:cNvPr id="3" name="TextBox 2"/>
+          <p:cNvSpPr txBox="1"/>
+          <p:nvPr/>
+        </p:nvSpPr>
+        <p:spPr>
+          <a:xfrm>
+            <a:off x="822960" y="2423160"/>
+            <a:ext cx="10515600" cy="365760"/>
+          </a:xfrm>
+          <a:prstGeom prst="rect">
+            <a:avLst/>
+          </a:prstGeom>
+          <a:noFill/>
+        </p:spPr>
+        <p:txBody>
+          <a:bodyPr wrap="square">
+            <a:spAutoFit/>
+          </a:bodyPr>
+          <a:lstStyle/>
+          <a:p>
+            <a:pPr algn="l">
+              <a:lnSpc>
+                <a:spcPct val="115000"/>
+              </a:lnSpc>
+              <a:spcAft>
+                <a:spcPts val="600"/>
+              </a:spcAft>
+            </a:pPr>
+            <a:r>
+              <a:rPr sz="1500" b="1">
+                <a:solidFill>
+                  <a:srgbClr val="1F6FD4"/>
+                </a:solidFill>
+                <a:latin typeface="Segoe UI"/>
+              </a:rPr>
+              <a:t>PART 1</a:t>
+            </a:r>
+          </a:p>
+        </p:txBody>
+      </p:sp>
+      <p:sp>
+        <p:nvSpPr>
+          <p:cNvPr id="4" name="TextBox 3"/>
+          <p:cNvSpPr txBox="1"/>
+          <p:nvPr/>
+        </p:nvSpPr>
+        <p:spPr>
+          <a:xfrm>
+            <a:off x="822960" y="2788920"/>
+            <a:ext cx="10515600" cy="642355"/>
+          </a:xfrm>
+          <a:prstGeom prst="rect">
+            <a:avLst/>
+          </a:prstGeom>
+          <a:noFill/>
+        </p:spPr>
+        <p:txBody>
+          <a:bodyPr wrap="square">
+            <a:spAutoFit/>
+          </a:bodyPr>
+          <a:lstStyle/>
+          <a:p>
+            <a:pPr algn="l">
+              <a:lnSpc>
+                <a:spcPct val="115000"/>
+              </a:lnSpc>
+              <a:spcAft>
+                <a:spcPts val="600"/>
+              </a:spcAft>
+            </a:pPr>
+            <a:r>
+              <a:rPr lang="en-US" sz="3400" b="1" dirty="0">
+                <a:solidFill>
+                  <a:srgbClr val="1A1D24"/>
+                </a:solidFill>
+                <a:latin typeface="Segoe UI"/>
+              </a:rPr>
+              <a:t>Changes</a:t>
+            </a:r>
+            <a:endParaRPr sz="3400" b="1" dirty="0">
+              <a:solidFill>
+                <a:srgbClr val="1A1D24"/>
+              </a:solidFill>
+              <a:latin typeface="Segoe UI"/>
+            </a:endParaRPr>
+          </a:p>
+        </p:txBody>
+      </p:sp>
+    </p:spTree>
+  </p:cSld>
+  <p:clrMapOvr>
+    <a:masterClrMapping/>
+  </p:clrMapOvr>
+</p:sld>
+</file>
+
+<file path=ppt/slides/slide3.xml><?xml version="1.0" encoding="utf-8"?>
+<p:sld xmlns:a="http://schemas.openxmlformats.org/drawingml/2006/main" xmlns:r="http://schemas.openxmlformats.org/officeDocument/2006/relationships" xmlns:p="http://schemas.openxmlformats.org/presentationml/2006/main">
+  <p:cSld>
+    <p:bg>
+      <p:bgPr>
+        <a:solidFill>
+          <a:srgbClr val="FFFFFF"/>
+        </a:solidFill>
+        <a:effectLst/>
+      </p:bgPr>
+    </p:bg>
+    <p:spTree>
+      <p:nvGrpSpPr>
+        <p:cNvPr id="1" name="">
+          <a:extLst>
+            <a:ext uri="{FF2B5EF4-FFF2-40B4-BE49-F238E27FC236}">
+              <a16:creationId xmlns:a16="http://schemas.microsoft.com/office/drawing/2014/main" id="{404C7CF9-FFA2-E57B-E695-E332EA69F29E}"/>
+            </a:ext>
+          </a:extLst>
+        </p:cNvPr>
+        <p:cNvGrpSpPr/>
+        <p:nvPr/>
+      </p:nvGrpSpPr>
+      <p:grpSpPr>
+        <a:xfrm>
+          <a:off x="0" y="0"/>
+          <a:ext cx="0" cy="0"/>
+          <a:chOff x="0" y="0"/>
+          <a:chExt cx="0" cy="0"/>
+        </a:xfrm>
+      </p:grpSpPr>
+      <p:sp>
+        <p:nvSpPr>
+          <p:cNvPr id="2" name="TextBox 1">
+            <a:extLst>
+              <a:ext uri="{FF2B5EF4-FFF2-40B4-BE49-F238E27FC236}">
+                <a16:creationId xmlns:a16="http://schemas.microsoft.com/office/drawing/2014/main" id="{70DAAB92-AE87-95EC-4902-5D0391A37858}"/>
+              </a:ext>
+            </a:extLst>
+          </p:cNvPr>
+          <p:cNvSpPr txBox="1"/>
+          <p:nvPr/>
+        </p:nvSpPr>
+        <p:spPr>
+          <a:xfrm>
+            <a:off x="640080" y="411480"/>
+            <a:ext cx="10881360" cy="545277"/>
+          </a:xfrm>
+          <a:prstGeom prst="rect">
+            <a:avLst/>
+          </a:prstGeom>
+          <a:noFill/>
+        </p:spPr>
+        <p:txBody>
+          <a:bodyPr wrap="square">
+            <a:spAutoFit/>
+          </a:bodyPr>
+          <a:lstStyle/>
+          <a:p>
+            <a:pPr algn="l">
+              <a:lnSpc>
+                <a:spcPct val="115000"/>
+              </a:lnSpc>
+              <a:spcAft>
+                <a:spcPts val="600"/>
+              </a:spcAft>
+            </a:pPr>
+            <a:r>
+              <a:rPr lang="en-US" sz="2800" b="1" dirty="0">
+                <a:solidFill>
+                  <a:srgbClr val="1A1D24"/>
+                </a:solidFill>
+                <a:latin typeface="Segoe UI"/>
+              </a:rPr>
+              <a:t>U and V0</a:t>
+            </a:r>
+            <a:endParaRPr sz="2800" b="1" dirty="0">
+              <a:solidFill>
+                <a:srgbClr val="1A1D24"/>
+              </a:solidFill>
+              <a:latin typeface="Segoe UI"/>
+            </a:endParaRPr>
+          </a:p>
+        </p:txBody>
+      </p:sp>
+      <p:sp>
+        <p:nvSpPr>
+          <p:cNvPr id="3" name="Rectangle 2">
+            <a:extLst>
+              <a:ext uri="{FF2B5EF4-FFF2-40B4-BE49-F238E27FC236}">
+                <a16:creationId xmlns:a16="http://schemas.microsoft.com/office/drawing/2014/main" id="{15BD89B9-4D93-6B48-23D2-4ADC5500E664}"/>
+              </a:ext>
+            </a:extLst>
+          </p:cNvPr>
           <p:cNvSpPr/>
           <p:nvPr/>
         </p:nvSpPr>
@@ -7995,19 +8219,26 @@
           <a:lstStyle/>
           <a:p>
             <a:pPr algn="ctr"/>
-          </a:p>
-        </p:txBody>
-      </p:sp>
-      <p:sp>
-        <p:nvSpPr>
-          <p:cNvPr id="4" name="TextBox 3"/>
+            <a:endParaRPr/>
+          </a:p>
+        </p:txBody>
+      </p:sp>
+      <p:sp>
+        <p:nvSpPr>
+          <p:cNvPr id="4" name="TextBox 3">
+            <a:extLst>
+              <a:ext uri="{FF2B5EF4-FFF2-40B4-BE49-F238E27FC236}">
+                <a16:creationId xmlns:a16="http://schemas.microsoft.com/office/drawing/2014/main" id="{E4174630-69EE-A9A4-39E8-FB6D64A313A7}"/>
+              </a:ext>
+            </a:extLst>
+          </p:cNvPr>
           <p:cNvSpPr txBox="1"/>
           <p:nvPr/>
         </p:nvSpPr>
         <p:spPr>
           <a:xfrm>
             <a:off x="685800" y="1371600"/>
-            <a:ext cx="10789920" cy="4297680"/>
+            <a:ext cx="10789920" cy="2807756"/>
           </a:xfrm>
           <a:prstGeom prst="rect">
             <a:avLst/>
@@ -8029,14 +8260,125 @@
               </a:spcAft>
             </a:pPr>
             <a:r>
-              <a:rPr sz="1800" b="0">
+              <a:rPr lang="en-US" sz="1800" b="0" dirty="0">
                 <a:solidFill>
                   <a:srgbClr val="1A1D24"/>
                 </a:solidFill>
                 <a:latin typeface="Segoe UI"/>
               </a:rPr>
-              <a:t>1.  Do we restart training from scratch with the bigger encoder? (My view: yes — the old checkpoints are invalid anyway because of the sentence-length bug.)</a:t>
-            </a:r>
+              <a:t>Earlier:</a:t>
+            </a:r>
+            <a:endParaRPr lang="en-US" dirty="0">
+              <a:solidFill>
+                <a:srgbClr val="1A1D24"/>
+              </a:solidFill>
+              <a:latin typeface="Segoe UI"/>
+            </a:endParaRPr>
+          </a:p>
+          <a:p>
+            <a:pPr marL="342900" indent="-342900" algn="l">
+              <a:lnSpc>
+                <a:spcPct val="115000"/>
+              </a:lnSpc>
+              <a:spcAft>
+                <a:spcPts val="1000"/>
+              </a:spcAft>
+              <a:buFont typeface="+mj-lt"/>
+              <a:buAutoNum type="arabicPeriod"/>
+            </a:pPr>
+            <a:r>
+              <a:rPr lang="en-US" sz="1800" b="0" dirty="0">
+                <a:solidFill>
+                  <a:srgbClr val="1A1D24"/>
+                </a:solidFill>
+                <a:latin typeface="Segoe UI"/>
+              </a:rPr>
+              <a:t>No supervision on u</a:t>
+            </a:r>
+          </a:p>
+          <a:p>
+            <a:pPr marL="342900" indent="-342900" algn="l">
+              <a:lnSpc>
+                <a:spcPct val="115000"/>
+              </a:lnSpc>
+              <a:spcAft>
+                <a:spcPts val="1000"/>
+              </a:spcAft>
+              <a:buFont typeface="+mj-lt"/>
+              <a:buAutoNum type="arabicPeriod"/>
+            </a:pPr>
+            <a:r>
+              <a:rPr lang="en-US" sz="1800" b="0" dirty="0">
+                <a:solidFill>
+                  <a:srgbClr val="1A1D24"/>
+                </a:solidFill>
+                <a:latin typeface="Segoe UI"/>
+              </a:rPr>
+              <a:t>Losses added – decode u to y, align projection of u with embed of y and orthogonal loss between u and v0</a:t>
+            </a:r>
+          </a:p>
+          <a:p>
+            <a:pPr marL="342900" indent="-342900" algn="l">
+              <a:lnSpc>
+                <a:spcPct val="115000"/>
+              </a:lnSpc>
+              <a:spcAft>
+                <a:spcPts val="1000"/>
+              </a:spcAft>
+              <a:buFont typeface="+mj-lt"/>
+              <a:buAutoNum type="arabicPeriod"/>
+            </a:pPr>
+            <a:r>
+              <a:rPr lang="en-US" dirty="0">
+                <a:solidFill>
+                  <a:srgbClr val="1A1D24"/>
+                </a:solidFill>
+                <a:latin typeface="Segoe UI"/>
+              </a:rPr>
+              <a:t>Heads – linear functions over same pooled h =&gt; u head: attention pooling, MLP, norm. V head: </a:t>
+            </a:r>
+            <a:r>
+              <a:rPr lang="en-US" dirty="0" err="1">
+                <a:solidFill>
+                  <a:srgbClr val="1A1D24"/>
+                </a:solidFill>
+                <a:latin typeface="Segoe UI"/>
+              </a:rPr>
+              <a:t>transf</a:t>
+            </a:r>
+            <a:r>
+              <a:rPr lang="en-US" dirty="0">
+                <a:solidFill>
+                  <a:srgbClr val="1A1D24"/>
+                </a:solidFill>
+                <a:latin typeface="Segoe UI"/>
+              </a:rPr>
+              <a:t>, </a:t>
+            </a:r>
+            <a:r>
+              <a:rPr lang="en-US" dirty="0" err="1">
+                <a:solidFill>
+                  <a:srgbClr val="1A1D24"/>
+                </a:solidFill>
+                <a:latin typeface="Segoe UI"/>
+              </a:rPr>
+              <a:t>lin</a:t>
+            </a:r>
+            <a:r>
+              <a:rPr lang="en-US" dirty="0">
+                <a:solidFill>
+                  <a:srgbClr val="1A1D24"/>
+                </a:solidFill>
+                <a:latin typeface="Segoe UI"/>
+              </a:rPr>
+              <a:t> ear, norm (unit var)</a:t>
+            </a:r>
+            <a:endParaRPr lang="en-US" sz="1800" b="0" dirty="0">
+              <a:solidFill>
+                <a:srgbClr val="1A1D24"/>
+              </a:solidFill>
+              <a:latin typeface="Segoe UI"/>
+            </a:endParaRPr>
           </a:p>
           <a:p>
             <a:pPr algn="l">
@@ -8047,125 +8389,67 @@
                 <a:spcPts val="1000"/>
               </a:spcAft>
             </a:pPr>
-          </a:p>
-          <a:p>
-            <a:pPr algn="l">
-              <a:lnSpc>
-                <a:spcPct val="115000"/>
-              </a:lnSpc>
-              <a:spcAft>
-                <a:spcPts val="1000"/>
-              </a:spcAft>
-            </a:pPr>
-            <a:r>
-              <a:rPr sz="1800" b="0">
-                <a:solidFill>
-                  <a:srgbClr val="1A1D24"/>
-                </a:solidFill>
-                <a:latin typeface="Segoe UI"/>
-              </a:rPr>
-              <a:t>2.  Do we keep MSR sentences, or move to a real long-conversation benchmark (LOCOMO / LongMemEval) for the memory story?</a:t>
-            </a:r>
-          </a:p>
-          <a:p>
-            <a:pPr algn="l">
-              <a:lnSpc>
-                <a:spcPct val="115000"/>
-              </a:lnSpc>
-              <a:spcAft>
-                <a:spcPts val="1000"/>
-              </a:spcAft>
-            </a:pPr>
-          </a:p>
-          <a:p>
-            <a:pPr algn="l">
-              <a:lnSpc>
-                <a:spcPct val="115000"/>
-              </a:lnSpc>
-              <a:spcAft>
-                <a:spcPts val="1000"/>
-              </a:spcAft>
-            </a:pPr>
-            <a:r>
-              <a:rPr sz="1800" b="0">
-                <a:solidFill>
-                  <a:srgbClr val="1A1D24"/>
-                </a:solidFill>
-                <a:latin typeface="Segoe UI"/>
-              </a:rPr>
-              <a:t>3.  Is 'gist-anchored forgetting' a headline experiment or a footnote? (My view: headline — it is the most original thing here.)</a:t>
-            </a:r>
-          </a:p>
-          <a:p>
-            <a:pPr algn="l">
-              <a:lnSpc>
-                <a:spcPct val="115000"/>
-              </a:lnSpc>
-              <a:spcAft>
-                <a:spcPts val="1000"/>
-              </a:spcAft>
-            </a:pPr>
-          </a:p>
-          <a:p>
-            <a:pPr algn="l">
-              <a:lnSpc>
-                <a:spcPct val="115000"/>
-              </a:lnSpc>
-              <a:spcAft>
-                <a:spcPts val="1000"/>
-              </a:spcAft>
-            </a:pPr>
-            <a:r>
-              <a:rPr sz="1800" b="0">
-                <a:solidFill>
-                  <a:srgbClr val="1A1D24"/>
-                </a:solidFill>
-                <a:latin typeface="Segoe UI"/>
-              </a:rPr>
-              <a:t>4.  Who takes which workstream? Data + metrics, model, diffusion, and downstream QA can all proceed in parallel.</a:t>
-            </a:r>
-          </a:p>
-          <a:p>
-            <a:pPr algn="l">
-              <a:lnSpc>
-                <a:spcPct val="115000"/>
-              </a:lnSpc>
-              <a:spcAft>
-                <a:spcPts val="1000"/>
-              </a:spcAft>
-            </a:pPr>
-          </a:p>
-          <a:p>
-            <a:pPr algn="l">
-              <a:lnSpc>
-                <a:spcPct val="115000"/>
-              </a:lnSpc>
-              <a:spcAft>
-                <a:spcPts val="1000"/>
-              </a:spcAft>
-            </a:pPr>
-            <a:r>
-              <a:rPr sz="1800" b="0">
-                <a:solidFill>
-                  <a:srgbClr val="1A1D24"/>
-                </a:solidFill>
-                <a:latin typeface="Segoe UI"/>
-              </a:rPr>
-              <a:t>5.  Do we have GPU access sorted — Unity, Azure credits, or do we pay?</a:t>
-            </a:r>
-          </a:p>
-        </p:txBody>
-      </p:sp>
-      <p:sp>
-        <p:nvSpPr>
-          <p:cNvPr id="5" name="TextBox 4"/>
+            <a:endParaRPr lang="en-US" sz="1800" b="0" dirty="0">
+              <a:solidFill>
+                <a:srgbClr val="1A1D24"/>
+              </a:solidFill>
+              <a:latin typeface="Segoe UI"/>
+            </a:endParaRPr>
+          </a:p>
+        </p:txBody>
+      </p:sp>
+    </p:spTree>
+    <p:extLst>
+      <p:ext uri="{BB962C8B-B14F-4D97-AF65-F5344CB8AC3E}">
+        <p14:creationId xmlns:p14="http://schemas.microsoft.com/office/powerpoint/2010/main" val="4188977964"/>
+      </p:ext>
+    </p:extLst>
+  </p:cSld>
+  <p:clrMapOvr>
+    <a:masterClrMapping/>
+  </p:clrMapOvr>
+</p:sld>
+</file>
+
+<file path=ppt/slides/slide4.xml><?xml version="1.0" encoding="utf-8"?>
+<p:sld xmlns:a="http://schemas.openxmlformats.org/drawingml/2006/main" xmlns:r="http://schemas.openxmlformats.org/officeDocument/2006/relationships" xmlns:p="http://schemas.openxmlformats.org/presentationml/2006/main">
+  <p:cSld>
+    <p:spTree>
+      <p:nvGrpSpPr>
+        <p:cNvPr id="1" name="">
+          <a:extLst>
+            <a:ext uri="{FF2B5EF4-FFF2-40B4-BE49-F238E27FC236}">
+              <a16:creationId xmlns:a16="http://schemas.microsoft.com/office/drawing/2014/main" id="{DABD564A-08F8-80AA-34D3-FC1EE17B9499}"/>
+            </a:ext>
+          </a:extLst>
+        </p:cNvPr>
+        <p:cNvGrpSpPr/>
+        <p:nvPr/>
+      </p:nvGrpSpPr>
+      <p:grpSpPr>
+        <a:xfrm>
+          <a:off x="0" y="0"/>
+          <a:ext cx="0" cy="0"/>
+          <a:chOff x="0" y="0"/>
+          <a:chExt cx="0" cy="0"/>
+        </a:xfrm>
+      </p:grpSpPr>
+      <p:sp>
+        <p:nvSpPr>
+          <p:cNvPr id="2" name="TextBox 1">
+            <a:extLst>
+              <a:ext uri="{FF2B5EF4-FFF2-40B4-BE49-F238E27FC236}">
+                <a16:creationId xmlns:a16="http://schemas.microsoft.com/office/drawing/2014/main" id="{35D95C75-3790-F358-3DE5-061AEFEF0079}"/>
+              </a:ext>
+            </a:extLst>
+          </p:cNvPr>
           <p:cNvSpPr txBox="1"/>
           <p:nvPr/>
         </p:nvSpPr>
         <p:spPr>
           <a:xfrm>
-            <a:off x="685800" y="5806440"/>
-            <a:ext cx="10789920" cy="731520"/>
+            <a:off x="640080" y="411480"/>
+            <a:ext cx="10881360" cy="545277"/>
           </a:xfrm>
           <a:prstGeom prst="rect">
             <a:avLst/>
@@ -8187,59 +8471,45 @@
               </a:spcAft>
             </a:pPr>
             <a:r>
-              <a:rPr sz="1500" b="0">
-                <a:solidFill>
-                  <a:srgbClr val="5F6B7A"/>
+              <a:rPr lang="en-US" sz="2800" b="1" dirty="0">
+                <a:solidFill>
+                  <a:srgbClr val="1A1D24"/>
                 </a:solidFill>
                 <a:latin typeface="Segoe UI"/>
               </a:rPr>
-              <a:t>Full technical detail, including all 16 defects and the reasoning behind every change, is in RESEARCH_PLAN.md in the repo.</a:t>
-            </a:r>
-          </a:p>
-        </p:txBody>
-      </p:sp>
-    </p:spTree>
-  </p:cSld>
-  <p:clrMapOvr>
-    <a:masterClrMapping/>
-  </p:clrMapOvr>
-</p:sld>
-</file>
-
-<file path=ppt/slides/slide21.xml><?xml version="1.0" encoding="utf-8"?>
-<p:sld xmlns:a="http://schemas.openxmlformats.org/drawingml/2006/main" xmlns:p="http://schemas.openxmlformats.org/presentationml/2006/main" xmlns:r="http://schemas.openxmlformats.org/officeDocument/2006/relationships">
-  <p:cSld>
-    <p:bg>
-      <p:bgPr>
-        <a:solidFill>
-          <a:srgbClr val="FFFFFF"/>
-        </a:solidFill>
-        <a:effectLst/>
-      </p:bgPr>
-    </p:bg>
-    <p:spTree>
-      <p:nvGrpSpPr>
-        <p:cNvPr id="1" name=""/>
-        <p:cNvGrpSpPr/>
-        <p:nvPr/>
-      </p:nvGrpSpPr>
-      <p:grpSpPr/>
-      <p:sp>
-        <p:nvSpPr>
-          <p:cNvPr id="2" name="Rectangle 1"/>
+              <a:t>Text Encoders</a:t>
+            </a:r>
+            <a:endParaRPr sz="2800" b="1" dirty="0">
+              <a:solidFill>
+                <a:srgbClr val="1A1D24"/>
+              </a:solidFill>
+              <a:latin typeface="Segoe UI"/>
+            </a:endParaRPr>
+          </a:p>
+        </p:txBody>
+      </p:sp>
+      <p:sp>
+        <p:nvSpPr>
+          <p:cNvPr id="3" name="Rectangle 2">
+            <a:extLst>
+              <a:ext uri="{FF2B5EF4-FFF2-40B4-BE49-F238E27FC236}">
+                <a16:creationId xmlns:a16="http://schemas.microsoft.com/office/drawing/2014/main" id="{9FAA98AE-B69B-EC6C-AA64-FCB2ADE31D47}"/>
+              </a:ext>
+            </a:extLst>
+          </p:cNvPr>
           <p:cNvSpPr/>
           <p:nvPr/>
         </p:nvSpPr>
         <p:spPr>
           <a:xfrm>
-            <a:off x="0" y="2011680"/>
-            <a:ext cx="12191695" cy="2194560"/>
+            <a:off x="640080" y="1051560"/>
+            <a:ext cx="1463040" cy="38100"/>
           </a:xfrm>
           <a:prstGeom prst="rect">
             <a:avLst/>
           </a:prstGeom>
           <a:solidFill>
-            <a:srgbClr val="F2F5F9"/>
+            <a:srgbClr val="1F6FD4"/>
           </a:solidFill>
           <a:ln>
             <a:noFill/>
@@ -8265,19 +8535,26 @@
           <a:lstStyle/>
           <a:p>
             <a:pPr algn="ctr"/>
-          </a:p>
-        </p:txBody>
-      </p:sp>
-      <p:sp>
-        <p:nvSpPr>
-          <p:cNvPr id="3" name="TextBox 2"/>
+            <a:endParaRPr/>
+          </a:p>
+        </p:txBody>
+      </p:sp>
+      <p:sp>
+        <p:nvSpPr>
+          <p:cNvPr id="4" name="TextBox 3">
+            <a:extLst>
+              <a:ext uri="{FF2B5EF4-FFF2-40B4-BE49-F238E27FC236}">
+                <a16:creationId xmlns:a16="http://schemas.microsoft.com/office/drawing/2014/main" id="{0877271A-A5F7-176D-9E61-7C6EAC86F263}"/>
+              </a:ext>
+            </a:extLst>
+          </p:cNvPr>
           <p:cNvSpPr txBox="1"/>
           <p:nvPr/>
         </p:nvSpPr>
         <p:spPr>
           <a:xfrm>
-            <a:off x="822960" y="2286000"/>
-            <a:ext cx="10515600" cy="457200"/>
+            <a:off x="685800" y="1371600"/>
+            <a:ext cx="10789920" cy="383503"/>
           </a:xfrm>
           <a:prstGeom prst="rect">
             <a:avLst/>
@@ -8290,149 +8567,40 @@
           </a:bodyPr>
           <a:lstStyle/>
           <a:p>
-            <a:pPr algn="l">
+            <a:pPr marL="342900" indent="-342900" algn="l">
               <a:lnSpc>
                 <a:spcPct val="115000"/>
               </a:lnSpc>
               <a:spcAft>
-                <a:spcPts val="600"/>
+                <a:spcPts val="1000"/>
               </a:spcAft>
+              <a:buFont typeface="+mj-lt"/>
+              <a:buAutoNum type="arabicPeriod"/>
             </a:pPr>
             <a:r>
-              <a:rPr sz="1500" b="1">
-                <a:solidFill>
-                  <a:srgbClr val="1F6FD4"/>
+              <a:rPr lang="en-US" dirty="0">
+                <a:solidFill>
+                  <a:srgbClr val="1A1D24"/>
                 </a:solidFill>
                 <a:latin typeface="Segoe UI"/>
               </a:rPr>
-              <a:t>WHERE WE ARE</a:t>
-            </a:r>
-          </a:p>
-        </p:txBody>
-      </p:sp>
-      <p:sp>
-        <p:nvSpPr>
-          <p:cNvPr id="4" name="TextBox 3"/>
-          <p:cNvSpPr txBox="1"/>
-          <p:nvPr/>
-        </p:nvSpPr>
-        <p:spPr>
-          <a:xfrm>
-            <a:off x="822960" y="2697480"/>
-            <a:ext cx="10515600" cy="1463040"/>
-          </a:xfrm>
-          <a:prstGeom prst="rect">
-            <a:avLst/>
-          </a:prstGeom>
-          <a:noFill/>
-        </p:spPr>
-        <p:txBody>
-          <a:bodyPr wrap="square">
-            <a:spAutoFit/>
-          </a:bodyPr>
-          <a:lstStyle/>
-          <a:p>
-            <a:pPr algn="l">
-              <a:lnSpc>
-                <a:spcPct val="115000"/>
-              </a:lnSpc>
-              <a:spcAft>
-                <a:spcPts val="600"/>
-              </a:spcAft>
-            </a:pPr>
-            <a:r>
-              <a:rPr sz="2600" b="1">
-                <a:solidFill>
-                  <a:srgbClr val="1A1D24"/>
-                </a:solidFill>
-                <a:latin typeface="Segoe UI"/>
-              </a:rPr>
-              <a:t>The pipeline is rebuilt, tested and runnable.</a:t>
-            </a:r>
-          </a:p>
-          <a:p>
-            <a:pPr algn="l">
-              <a:lnSpc>
-                <a:spcPct val="115000"/>
-              </a:lnSpc>
-              <a:spcAft>
-                <a:spcPts val="600"/>
-              </a:spcAft>
-            </a:pPr>
-            <a:r>
-              <a:rPr sz="2600" b="1">
-                <a:solidFill>
-                  <a:srgbClr val="1A1D24"/>
-                </a:solidFill>
-                <a:latin typeface="Segoe UI"/>
-              </a:rPr>
-              <a:t>The data says the problem is ours to fix, not the data's.</a:t>
-            </a:r>
-          </a:p>
-        </p:txBody>
-      </p:sp>
-      <p:sp>
-        <p:nvSpPr>
-          <p:cNvPr id="5" name="TextBox 4"/>
-          <p:cNvSpPr txBox="1"/>
-          <p:nvPr/>
-        </p:nvSpPr>
-        <p:spPr>
-          <a:xfrm>
-            <a:off x="822960" y="4572000"/>
-            <a:ext cx="10515600" cy="1463040"/>
-          </a:xfrm>
-          <a:prstGeom prst="rect">
-            <a:avLst/>
-          </a:prstGeom>
-          <a:noFill/>
-        </p:spPr>
-        <p:txBody>
-          <a:bodyPr wrap="square">
-            <a:spAutoFit/>
-          </a:bodyPr>
-          <a:lstStyle/>
-          <a:p>
-            <a:pPr algn="l">
-              <a:lnSpc>
-                <a:spcPct val="115000"/>
-              </a:lnSpc>
-              <a:spcAft>
-                <a:spcPts val="800"/>
-              </a:spcAft>
-            </a:pPr>
-            <a:r>
-              <a:rPr sz="1800" b="0">
-                <a:solidFill>
-                  <a:srgbClr val="5F6B7A"/>
-                </a:solidFill>
-                <a:latin typeface="Segoe UI"/>
-              </a:rPr>
-              <a:t>Next: Gate 0 (10 min) → Gate 2 baseline (1 h) → train.</a:t>
-            </a:r>
-          </a:p>
-          <a:p>
-            <a:pPr algn="l">
-              <a:lnSpc>
-                <a:spcPct val="115000"/>
-              </a:lnSpc>
-              <a:spcAft>
-                <a:spcPts val="800"/>
-              </a:spcAft>
-            </a:pPr>
-            <a:r>
-              <a:rPr sz="1800" b="0">
-                <a:solidFill>
-                  <a:srgbClr val="5F6B7A"/>
-                </a:solidFill>
-                <a:latin typeface="Segoe UI"/>
-              </a:rPr>
-              <a:t>Everything else is already written and waiting for a GPU.</a:t>
-            </a:r>
+              <a:t>2 text encoders for u and v0 separately </a:t>
+            </a:r>
+            <a:endParaRPr lang="en-US" sz="1800" b="0" dirty="0">
+              <a:solidFill>
+                <a:srgbClr val="1A1D24"/>
+              </a:solidFill>
+              <a:latin typeface="Segoe UI"/>
+            </a:endParaRPr>
           </a:p>
         </p:txBody>
       </p:sp>
     </p:spTree>
+    <p:extLst>
+      <p:ext uri="{BB962C8B-B14F-4D97-AF65-F5344CB8AC3E}">
+        <p14:creationId xmlns:p14="http://schemas.microsoft.com/office/powerpoint/2010/main" val="2976565675"/>
+      </p:ext>
+    </p:extLst>
   </p:cSld>
   <p:clrMapOvr>
     <a:masterClrMapping/>
@@ -8440,8 +8608,8 @@
 </p:sld>
 </file>
 
-<file path=ppt/slides/slide3.xml><?xml version="1.0" encoding="utf-8"?>
-<p:sld xmlns:a="http://schemas.openxmlformats.org/drawingml/2006/main" xmlns:p="http://schemas.openxmlformats.org/presentationml/2006/main" xmlns:r="http://schemas.openxmlformats.org/officeDocument/2006/relationships">
+<file path=ppt/slides/slide5.xml><?xml version="1.0" encoding="utf-8"?>
+<p:sld xmlns:a="http://schemas.openxmlformats.org/drawingml/2006/main" xmlns:r="http://schemas.openxmlformats.org/officeDocument/2006/relationships" xmlns:p="http://schemas.openxmlformats.org/presentationml/2006/main">
   <p:cSld>
     <p:bg>
       <p:bgPr>
@@ -8457,7 +8625,258 @@
         <p:cNvGrpSpPr/>
         <p:nvPr/>
       </p:nvGrpSpPr>
-      <p:grpSpPr/>
+      <p:grpSpPr>
+        <a:xfrm>
+          <a:off x="0" y="0"/>
+          <a:ext cx="0" cy="0"/>
+          <a:chOff x="0" y="0"/>
+          <a:chExt cx="0" cy="0"/>
+        </a:xfrm>
+      </p:grpSpPr>
+      <p:sp>
+        <p:nvSpPr>
+          <p:cNvPr id="2" name="TextBox 1"/>
+          <p:cNvSpPr txBox="1"/>
+          <p:nvPr/>
+        </p:nvSpPr>
+        <p:spPr>
+          <a:xfrm>
+            <a:off x="640080" y="411480"/>
+            <a:ext cx="10881360" cy="545277"/>
+          </a:xfrm>
+          <a:prstGeom prst="rect">
+            <a:avLst/>
+          </a:prstGeom>
+          <a:noFill/>
+        </p:spPr>
+        <p:txBody>
+          <a:bodyPr wrap="square">
+            <a:spAutoFit/>
+          </a:bodyPr>
+          <a:lstStyle/>
+          <a:p>
+            <a:pPr algn="l">
+              <a:lnSpc>
+                <a:spcPct val="115000"/>
+              </a:lnSpc>
+              <a:spcAft>
+                <a:spcPts val="600"/>
+              </a:spcAft>
+            </a:pPr>
+            <a:r>
+              <a:rPr lang="en-US" sz="2800" b="1" dirty="0">
+                <a:solidFill>
+                  <a:srgbClr val="1A1D24"/>
+                </a:solidFill>
+                <a:latin typeface="Segoe UI"/>
+              </a:rPr>
+              <a:t>Dataset</a:t>
+            </a:r>
+            <a:endParaRPr sz="2800" b="1" dirty="0">
+              <a:solidFill>
+                <a:srgbClr val="1A1D24"/>
+              </a:solidFill>
+              <a:latin typeface="Segoe UI"/>
+            </a:endParaRPr>
+          </a:p>
+        </p:txBody>
+      </p:sp>
+      <p:sp>
+        <p:nvSpPr>
+          <p:cNvPr id="3" name="Rectangle 2"/>
+          <p:cNvSpPr/>
+          <p:nvPr/>
+        </p:nvSpPr>
+        <p:spPr>
+          <a:xfrm>
+            <a:off x="640080" y="1051560"/>
+            <a:ext cx="1463040" cy="38100"/>
+          </a:xfrm>
+          <a:prstGeom prst="rect">
+            <a:avLst/>
+          </a:prstGeom>
+          <a:solidFill>
+            <a:srgbClr val="1F6FD4"/>
+          </a:solidFill>
+          <a:ln>
+            <a:noFill/>
+          </a:ln>
+          <a:effectLst/>
+        </p:spPr>
+        <p:style>
+          <a:lnRef idx="1">
+            <a:schemeClr val="accent1"/>
+          </a:lnRef>
+          <a:fillRef idx="3">
+            <a:schemeClr val="accent1"/>
+          </a:fillRef>
+          <a:effectRef idx="2">
+            <a:schemeClr val="accent1"/>
+          </a:effectRef>
+          <a:fontRef idx="minor">
+            <a:schemeClr val="lt1"/>
+          </a:fontRef>
+        </p:style>
+        <p:txBody>
+          <a:bodyPr rtlCol="0" anchor="ctr"/>
+          <a:lstStyle/>
+          <a:p>
+            <a:pPr algn="ctr"/>
+            <a:endParaRPr/>
+          </a:p>
+        </p:txBody>
+      </p:sp>
+      <p:sp>
+        <p:nvSpPr>
+          <p:cNvPr id="4" name="TextBox 3"/>
+          <p:cNvSpPr txBox="1"/>
+          <p:nvPr/>
+        </p:nvSpPr>
+        <p:spPr>
+          <a:xfrm>
+            <a:off x="685800" y="1371600"/>
+            <a:ext cx="10789920" cy="1277081"/>
+          </a:xfrm>
+          <a:prstGeom prst="rect">
+            <a:avLst/>
+          </a:prstGeom>
+          <a:noFill/>
+        </p:spPr>
+        <p:txBody>
+          <a:bodyPr wrap="square">
+            <a:spAutoFit/>
+          </a:bodyPr>
+          <a:lstStyle/>
+          <a:p>
+            <a:pPr algn="l">
+              <a:lnSpc>
+                <a:spcPct val="115000"/>
+              </a:lnSpc>
+              <a:spcAft>
+                <a:spcPts val="1000"/>
+              </a:spcAft>
+            </a:pPr>
+            <a:r>
+              <a:rPr lang="en-US" sz="1800" b="0" dirty="0">
+                <a:solidFill>
+                  <a:srgbClr val="1A1D24"/>
+                </a:solidFill>
+                <a:latin typeface="Segoe UI"/>
+              </a:rPr>
+              <a:t>Earlier:</a:t>
+            </a:r>
+          </a:p>
+          <a:p>
+            <a:pPr marL="342900" indent="-342900" algn="l">
+              <a:lnSpc>
+                <a:spcPct val="115000"/>
+              </a:lnSpc>
+              <a:spcAft>
+                <a:spcPts val="1000"/>
+              </a:spcAft>
+              <a:buAutoNum type="arabicPeriod"/>
+            </a:pPr>
+            <a:r>
+              <a:rPr lang="en-US" dirty="0">
+                <a:solidFill>
+                  <a:srgbClr val="1A1D24"/>
+                </a:solidFill>
+                <a:latin typeface="Segoe UI"/>
+              </a:rPr>
+              <a:t>Timestep -&gt; </a:t>
+            </a:r>
+            <a:r>
+              <a:rPr lang="en-US" dirty="0" err="1">
+                <a:solidFill>
+                  <a:srgbClr val="1A1D24"/>
+                </a:solidFill>
+                <a:latin typeface="Segoe UI"/>
+              </a:rPr>
+              <a:t>xt</a:t>
+            </a:r>
+            <a:r>
+              <a:rPr lang="en-US" dirty="0">
+                <a:solidFill>
+                  <a:srgbClr val="1A1D24"/>
+                </a:solidFill>
+                <a:latin typeface="Segoe UI"/>
+              </a:rPr>
+              <a:t> mapping assumed 10 rungs but we have only ~5 (mean) + source not included</a:t>
+            </a:r>
+          </a:p>
+          <a:p>
+            <a:pPr marL="342900" indent="-342900" algn="l">
+              <a:lnSpc>
+                <a:spcPct val="115000"/>
+              </a:lnSpc>
+              <a:spcAft>
+                <a:spcPts val="1000"/>
+              </a:spcAft>
+              <a:buAutoNum type="arabicPeriod"/>
+            </a:pPr>
+            <a:r>
+              <a:rPr lang="en-US" dirty="0">
+                <a:solidFill>
+                  <a:srgbClr val="1A1D24"/>
+                </a:solidFill>
+                <a:latin typeface="Segoe UI"/>
+              </a:rPr>
+              <a:t>X+: u(x) = u(</a:t>
+            </a:r>
+            <a:r>
+              <a:rPr lang="en-US" dirty="0" err="1">
+                <a:solidFill>
+                  <a:srgbClr val="1A1D24"/>
+                </a:solidFill>
+                <a:latin typeface="Segoe UI"/>
+              </a:rPr>
+              <a:t>xt</a:t>
+            </a:r>
+            <a:r>
+              <a:rPr lang="en-US" dirty="0">
+                <a:solidFill>
+                  <a:srgbClr val="1A1D24"/>
+                </a:solidFill>
+                <a:latin typeface="Segoe UI"/>
+              </a:rPr>
+              <a:t>[k] for all k)</a:t>
+            </a:r>
+          </a:p>
+        </p:txBody>
+      </p:sp>
+    </p:spTree>
+  </p:cSld>
+  <p:clrMapOvr>
+    <a:masterClrMapping/>
+  </p:clrMapOvr>
+</p:sld>
+</file>
+
+<file path=ppt/slides/slide6.xml><?xml version="1.0" encoding="utf-8"?>
+<p:sld xmlns:a="http://schemas.openxmlformats.org/drawingml/2006/main" xmlns:r="http://schemas.openxmlformats.org/officeDocument/2006/relationships" xmlns:p="http://schemas.openxmlformats.org/presentationml/2006/main">
+  <p:cSld>
+    <p:bg>
+      <p:bgPr>
+        <a:solidFill>
+          <a:srgbClr val="FFFFFF"/>
+        </a:solidFill>
+        <a:effectLst/>
+      </p:bgPr>
+    </p:bg>
+    <p:spTree>
+      <p:nvGrpSpPr>
+        <p:cNvPr id="1" name=""/>
+        <p:cNvGrpSpPr/>
+        <p:nvPr/>
+      </p:nvGrpSpPr>
+      <p:grpSpPr>
+        <a:xfrm>
+          <a:off x="0" y="0"/>
+          <a:ext cx="0" cy="0"/>
+          <a:chOff x="0" y="0"/>
+          <a:chExt cx="0" cy="0"/>
+        </a:xfrm>
+      </p:grpSpPr>
       <p:sp>
         <p:nvSpPr>
           <p:cNvPr id="2" name="Rectangle 1"/>
@@ -8499,6 +8918,7 @@
           <a:lstStyle/>
           <a:p>
             <a:pPr algn="ctr"/>
+            <a:endParaRPr/>
           </a:p>
         </p:txBody>
       </p:sp>
@@ -8539,7 +8959,7 @@
                 </a:solidFill>
                 <a:latin typeface="Segoe UI"/>
               </a:rPr>
-              <a:t>PART 1</a:t>
+              <a:t>PART 2</a:t>
             </a:r>
           </a:p>
         </p:txBody>
@@ -8553,7 +8973,7 @@
         <p:spPr>
           <a:xfrm>
             <a:off x="822960" y="2788920"/>
-            <a:ext cx="10515600" cy="914400"/>
+            <a:ext cx="10515600" cy="642355"/>
           </a:xfrm>
           <a:prstGeom prst="rect">
             <a:avLst/>
@@ -8575,14 +8995,20 @@
               </a:spcAft>
             </a:pPr>
             <a:r>
-              <a:rPr sz="3400" b="1">
+              <a:rPr lang="en-US" sz="3400" b="1" dirty="0">
                 <a:solidFill>
                   <a:srgbClr val="1A1D24"/>
                 </a:solidFill>
                 <a:latin typeface="Segoe UI"/>
               </a:rPr>
-              <a:t>What we found when we audited the old code</a:t>
-            </a:r>
+              <a:t>Initial Results for gating</a:t>
+            </a:r>
+            <a:endParaRPr sz="3400" b="1" dirty="0">
+              <a:solidFill>
+                <a:srgbClr val="1A1D24"/>
+              </a:solidFill>
+              <a:latin typeface="Segoe UI"/>
+            </a:endParaRPr>
           </a:p>
         </p:txBody>
       </p:sp>
@@ -8594,8 +9020,8 @@
 </p:sld>
 </file>
 
-<file path=ppt/slides/slide4.xml><?xml version="1.0" encoding="utf-8"?>
-<p:sld xmlns:a="http://schemas.openxmlformats.org/drawingml/2006/main" xmlns:p="http://schemas.openxmlformats.org/presentationml/2006/main" xmlns:r="http://schemas.openxmlformats.org/officeDocument/2006/relationships">
+<file path=ppt/slides/slide7.xml><?xml version="1.0" encoding="utf-8"?>
+<p:sld xmlns:a="http://schemas.openxmlformats.org/drawingml/2006/main" xmlns:r="http://schemas.openxmlformats.org/officeDocument/2006/relationships" xmlns:p="http://schemas.openxmlformats.org/presentationml/2006/main">
   <p:cSld>
     <p:bg>
       <p:bgPr>
@@ -8611,7 +9037,14 @@
         <p:cNvGrpSpPr/>
         <p:nvPr/>
       </p:nvGrpSpPr>
-      <p:grpSpPr/>
+      <p:grpSpPr>
+        <a:xfrm>
+          <a:off x="0" y="0"/>
+          <a:ext cx="0" cy="0"/>
+          <a:chOff x="0" y="0"/>
+          <a:chExt cx="0" cy="0"/>
+        </a:xfrm>
+      </p:grpSpPr>
       <p:sp>
         <p:nvSpPr>
           <p:cNvPr id="2" name="TextBox 1"/>
@@ -8621,7 +9054,7 @@
         <p:spPr>
           <a:xfrm>
             <a:off x="640080" y="411480"/>
-            <a:ext cx="10881360" cy="640080"/>
+            <a:ext cx="10881360" cy="545277"/>
           </a:xfrm>
           <a:prstGeom prst="rect">
             <a:avLst/>
@@ -8643,13 +9076,22 @@
               </a:spcAft>
             </a:pPr>
             <a:r>
-              <a:rPr sz="2800" b="1">
+              <a:rPr lang="en-US" sz="2800" b="1" dirty="0">
                 <a:solidFill>
                   <a:srgbClr val="1A1D24"/>
                 </a:solidFill>
                 <a:latin typeface="Segoe UI"/>
               </a:rPr>
-              <a:t>Four defects that make the current results untrustworthy</a:t>
+              <a:t>H</a:t>
+            </a:r>
+            <a:r>
+              <a:rPr sz="2800" b="1" dirty="0">
+                <a:solidFill>
+                  <a:srgbClr val="1A1D24"/>
+                </a:solidFill>
+                <a:latin typeface="Segoe UI"/>
+              </a:rPr>
+              <a:t>ow good is our training data, really?</a:t>
             </a:r>
           </a:p>
         </p:txBody>
@@ -8695,6 +9137,7 @@
           <a:lstStyle/>
           <a:p>
             <a:pPr algn="ctr"/>
+            <a:endParaRPr/>
           </a:p>
         </p:txBody>
       </p:sp>
@@ -8708,7 +9151,7 @@
         </p:nvGraphicFramePr>
         <p:xfrm>
           <a:off x="640080" y="1371600"/>
-          <a:ext cx="10881360" cy="2103120"/>
+          <a:ext cx="10881360" cy="1807464"/>
         </p:xfrm>
         <a:graphic>
           <a:graphicData uri="http://schemas.openxmlformats.org/drawingml/2006/table">
@@ -8717,1013 +9160,41 @@
                 <a:tableStyleId>{5C22544A-7EE6-4342-B048-85BDC9FD1C3A}</a:tableStyleId>
               </a:tblPr>
               <a:tblGrid>
-                <a:gridCol w="453390"/>
-                <a:gridCol w="4080510"/>
-                <a:gridCol w="6347460"/>
-              </a:tblGrid>
-              <a:tr h="420624">
-                <a:tc>
-                  <a:txBody>
-                    <a:bodyPr/>
-                    <a:lstStyle/>
-                    <a:p>
-                      <a:pPr algn="l"/>
-                      <a:r>
-                        <a:rPr sz="1400" b="1">
-                          <a:solidFill>
-                            <a:srgbClr val="FFFFFF"/>
-                          </a:solidFill>
-                          <a:latin typeface="Segoe UI"/>
-                        </a:rPr>
-                        <a:t>#</a:t>
-                      </a:r>
-                    </a:p>
-                  </a:txBody>
-                  <a:tcPr>
-                    <a:solidFill>
-                      <a:srgbClr val="1A1D24"/>
-                    </a:solidFill>
-                  </a:tcPr>
-                </a:tc>
-                <a:tc>
-                  <a:txBody>
-                    <a:bodyPr/>
-                    <a:lstStyle/>
-                    <a:p>
-                      <a:pPr algn="ctr"/>
-                      <a:r>
-                        <a:rPr sz="1400" b="1">
-                          <a:solidFill>
-                            <a:srgbClr val="FFFFFF"/>
-                          </a:solidFill>
-                          <a:latin typeface="Segoe UI"/>
-                        </a:rPr>
-                        <a:t>What was wrong</a:t>
-                      </a:r>
-                    </a:p>
-                  </a:txBody>
-                  <a:tcPr>
-                    <a:solidFill>
-                      <a:srgbClr val="1A1D24"/>
-                    </a:solidFill>
-                  </a:tcPr>
-                </a:tc>
-                <a:tc>
-                  <a:txBody>
-                    <a:bodyPr/>
-                    <a:lstStyle/>
-                    <a:p>
-                      <a:pPr algn="ctr"/>
-                      <a:r>
-                        <a:rPr sz="1400" b="1">
-                          <a:solidFill>
-                            <a:srgbClr val="FFFFFF"/>
-                          </a:solidFill>
-                          <a:latin typeface="Segoe UI"/>
-                        </a:rPr>
-                        <a:t>Why it matters</a:t>
-                      </a:r>
-                    </a:p>
-                  </a:txBody>
-                  <a:tcPr>
-                    <a:solidFill>
-                      <a:srgbClr val="1A1D24"/>
-                    </a:solidFill>
-                  </a:tcPr>
-                </a:tc>
-              </a:tr>
-              <a:tr h="420624">
-                <a:tc>
-                  <a:txBody>
-                    <a:bodyPr/>
-                    <a:lstStyle/>
-                    <a:p>
-                      <a:pPr algn="l"/>
-                      <a:r>
-                        <a:rPr sz="1400" b="0">
-                          <a:solidFill>
-                            <a:srgbClr val="1A1D24"/>
-                          </a:solidFill>
-                          <a:latin typeface="Segoe UI"/>
-                        </a:rPr>
-                        <a:t>1</a:t>
-                      </a:r>
-                    </a:p>
-                  </a:txBody>
-                  <a:tcPr>
-                    <a:solidFill>
-                      <a:srgbClr val="FFFFFF"/>
-                    </a:solidFill>
-                  </a:tcPr>
-                </a:tc>
-                <a:tc>
-                  <a:txBody>
-                    <a:bodyPr/>
-                    <a:lstStyle/>
-                    <a:p>
-                      <a:pPr algn="ctr"/>
-                      <a:r>
-                        <a:rPr sz="1400" b="0">
-                          <a:solidFill>
-                            <a:srgbClr val="1A1D24"/>
-                          </a:solidFill>
-                          <a:latin typeface="Segoe UI"/>
-                        </a:rPr>
-                        <a:t>Validation scored the model while showing it the answer</a:t>
-                      </a:r>
-                    </a:p>
-                  </a:txBody>
-                  <a:tcPr>
-                    <a:solidFill>
-                      <a:srgbClr val="FFFFFF"/>
-                    </a:solidFill>
-                  </a:tcPr>
-                </a:tc>
-                <a:tc>
-                  <a:txBody>
-                    <a:bodyPr/>
-                    <a:lstStyle/>
-                    <a:p>
-                      <a:pPr algn="ctr"/>
-                      <a:r>
-                        <a:rPr sz="1400" b="0">
-                          <a:solidFill>
-                            <a:srgbClr val="1A1D24"/>
-                          </a:solidFill>
-                          <a:latin typeface="Segoe UI"/>
-                        </a:rPr>
-                        <a:t>The reported BERTScore of 0.932 is inflated — the decoder was fed the correct words one at a time</a:t>
-                      </a:r>
-                    </a:p>
-                  </a:txBody>
-                  <a:tcPr>
-                    <a:solidFill>
-                      <a:srgbClr val="FFFFFF"/>
-                    </a:solidFill>
-                  </a:tcPr>
-                </a:tc>
-              </a:tr>
-              <a:tr h="420624">
-                <a:tc>
-                  <a:txBody>
-                    <a:bodyPr/>
-                    <a:lstStyle/>
-                    <a:p>
-                      <a:pPr algn="l"/>
-                      <a:r>
-                        <a:rPr sz="1400" b="0">
-                          <a:solidFill>
-                            <a:srgbClr val="1A1D24"/>
-                          </a:solidFill>
-                          <a:latin typeface="Segoe UI"/>
-                        </a:rPr>
-                        <a:t>2</a:t>
-                      </a:r>
-                    </a:p>
-                  </a:txBody>
-                  <a:tcPr>
-                    <a:solidFill>
-                      <a:srgbClr val="F2F5F9"/>
-                    </a:solidFill>
-                  </a:tcPr>
-                </a:tc>
-                <a:tc>
-                  <a:txBody>
-                    <a:bodyPr/>
-                    <a:lstStyle/>
-                    <a:p>
-                      <a:pPr algn="ctr"/>
-                      <a:r>
-                        <a:rPr sz="1400" b="0">
-                          <a:solidFill>
-                            <a:srgbClr val="1A1D24"/>
-                          </a:solidFill>
-                          <a:latin typeface="Segoe UI"/>
-                        </a:rPr>
-                        <a:t>The 'different but related' training example was the SAME sentence</a:t>
-                      </a:r>
-                    </a:p>
-                  </a:txBody>
-                  <a:tcPr>
-                    <a:solidFill>
-                      <a:srgbClr val="F2F5F9"/>
-                    </a:solidFill>
-                  </a:tcPr>
-                </a:tc>
-                <a:tc>
-                  <a:txBody>
-                    <a:bodyPr/>
-                    <a:lstStyle/>
-                    <a:p>
-                      <a:pPr algn="ctr"/>
-                      <a:r>
-                        <a:rPr sz="1400" b="0">
-                          <a:solidFill>
-                            <a:srgbClr val="1A1D24"/>
-                          </a:solidFill>
-                          <a:latin typeface="Segoe UI"/>
-                        </a:rPr>
-                        <a:t>The gist vector had nothing to learn, so it was decoration</a:t>
-                      </a:r>
-                    </a:p>
-                  </a:txBody>
-                  <a:tcPr>
-                    <a:solidFill>
-                      <a:srgbClr val="F2F5F9"/>
-                    </a:solidFill>
-                  </a:tcPr>
-                </a:tc>
-              </a:tr>
-              <a:tr h="420624">
-                <a:tc>
-                  <a:txBody>
-                    <a:bodyPr/>
-                    <a:lstStyle/>
-                    <a:p>
-                      <a:pPr algn="l"/>
-                      <a:r>
-                        <a:rPr sz="1400" b="0">
-                          <a:solidFill>
-                            <a:srgbClr val="1A1D24"/>
-                          </a:solidFill>
-                          <a:latin typeface="Segoe UI"/>
-                        </a:rPr>
-                        <a:t>3</a:t>
-                      </a:r>
-                    </a:p>
-                  </a:txBody>
-                  <a:tcPr>
-                    <a:solidFill>
-                      <a:srgbClr val="FFFFFF"/>
-                    </a:solidFill>
-                  </a:tcPr>
-                </a:tc>
-                <a:tc>
-                  <a:txBody>
-                    <a:bodyPr/>
-                    <a:lstStyle/>
-                    <a:p>
-                      <a:pPr algn="ctr"/>
-                      <a:r>
-                        <a:rPr sz="1400" b="0">
-                          <a:solidFill>
-                            <a:srgbClr val="1A1D24"/>
-                          </a:solidFill>
-                          <a:latin typeface="Segoe UI"/>
-                        </a:rPr>
-                        <a:t>Stage 3 trained on 1 denoising step, but would run hundreds at test time</a:t>
-                      </a:r>
-                    </a:p>
-                  </a:txBody>
-                  <a:tcPr>
-                    <a:solidFill>
-                      <a:srgbClr val="FFFFFF"/>
-                    </a:solidFill>
-                  </a:tcPr>
-                </a:tc>
-                <a:tc>
-                  <a:txBody>
-                    <a:bodyPr/>
-                    <a:lstStyle/>
-                    <a:p>
-                      <a:pPr algn="ctr"/>
-                      <a:r>
-                        <a:rPr sz="1400" b="0">
-                          <a:solidFill>
-                            <a:srgbClr val="1A1D24"/>
-                          </a:solidFill>
-                          <a:latin typeface="Segoe UI"/>
-                        </a:rPr>
-                        <a:t>Trained on inputs it would never actually see</a:t>
-                      </a:r>
-                    </a:p>
-                  </a:txBody>
-                  <a:tcPr>
-                    <a:solidFill>
-                      <a:srgbClr val="FFFFFF"/>
-                    </a:solidFill>
-                  </a:tcPr>
-                </a:tc>
-              </a:tr>
-              <a:tr h="420624">
-                <a:tc>
-                  <a:txBody>
-                    <a:bodyPr/>
-                    <a:lstStyle/>
-                    <a:p>
-                      <a:pPr algn="l"/>
-                      <a:r>
-                        <a:rPr sz="1400" b="0">
-                          <a:solidFill>
-                            <a:srgbClr val="1A1D24"/>
-                          </a:solidFill>
-                          <a:latin typeface="Segoe UI"/>
-                        </a:rPr>
-                        <a:t>4</a:t>
-                      </a:r>
-                    </a:p>
-                  </a:txBody>
-                  <a:tcPr>
-                    <a:solidFill>
-                      <a:srgbClr val="F2F5F9"/>
-                    </a:solidFill>
-                  </a:tcPr>
-                </a:tc>
-                <a:tc>
-                  <a:txBody>
-                    <a:bodyPr/>
-                    <a:lstStyle/>
-                    <a:p>
-                      <a:pPr algn="ctr"/>
-                      <a:r>
-                        <a:rPr sz="1400" b="0">
-                          <a:solidFill>
-                            <a:srgbClr val="1A1D24"/>
-                          </a:solidFill>
-                          <a:latin typeface="Segoe UI"/>
-                        </a:rPr>
-                        <a:t>The original sentence was never a training target</a:t>
-                      </a:r>
-                    </a:p>
-                  </a:txBody>
-                  <a:tcPr>
-                    <a:solidFill>
-                      <a:srgbClr val="F2F5F9"/>
-                    </a:solidFill>
-                  </a:tcPr>
-                </a:tc>
-                <a:tc>
-                  <a:txBody>
-                    <a:bodyPr/>
-                    <a:lstStyle/>
-                    <a:p>
-                      <a:pPr algn="ctr"/>
-                      <a:r>
-                        <a:rPr sz="1400" b="0">
-                          <a:solidFill>
-                            <a:srgbClr val="1A1D24"/>
-                          </a:solidFill>
-                          <a:latin typeface="Segoe UI"/>
-                        </a:rPr>
-                        <a:t>The model could literally never be asked for full detail</a:t>
-                      </a:r>
-                    </a:p>
-                  </a:txBody>
-                  <a:tcPr>
-                    <a:solidFill>
-                      <a:srgbClr val="F2F5F9"/>
-                    </a:solidFill>
-                  </a:tcPr>
-                </a:tc>
-              </a:tr>
-            </a:tbl>
-          </a:graphicData>
-        </a:graphic>
-      </p:graphicFrame>
-      <p:sp>
-        <p:nvSpPr>
-          <p:cNvPr id="5" name="TextBox 4"/>
-          <p:cNvSpPr txBox="1"/>
-          <p:nvPr/>
-        </p:nvSpPr>
-        <p:spPr>
-          <a:xfrm>
-            <a:off x="640080" y="3520440"/>
-            <a:ext cx="10881360" cy="914400"/>
-          </a:xfrm>
-          <a:prstGeom prst="rect">
-            <a:avLst/>
-          </a:prstGeom>
-          <a:noFill/>
-        </p:spPr>
-        <p:txBody>
-          <a:bodyPr wrap="square">
-            <a:spAutoFit/>
-          </a:bodyPr>
-          <a:lstStyle/>
-          <a:p>
-            <a:pPr algn="l">
-              <a:lnSpc>
-                <a:spcPct val="115000"/>
-              </a:lnSpc>
-              <a:spcAft>
-                <a:spcPts val="600"/>
-              </a:spcAft>
-            </a:pPr>
-            <a:r>
-              <a:rPr sz="1500" b="0">
-                <a:solidFill>
-                  <a:srgbClr val="5F6B7A"/>
-                </a:solidFill>
-                <a:latin typeface="Segoe UI"/>
-              </a:rPr>
-              <a:t>12 more issues found, including: a third of sentences silently cut off at 64 tokens; the projection module could not look at more than one slot at a time; three config files disagreed on the latent size. Full list in RESEARCH_PLAN.md §0.</a:t>
-            </a:r>
-          </a:p>
-        </p:txBody>
-      </p:sp>
-    </p:spTree>
-  </p:cSld>
-  <p:clrMapOvr>
-    <a:masterClrMapping/>
-  </p:clrMapOvr>
-</p:sld>
-</file>
-
-<file path=ppt/slides/slide5.xml><?xml version="1.0" encoding="utf-8"?>
-<p:sld xmlns:a="http://schemas.openxmlformats.org/drawingml/2006/main" xmlns:p="http://schemas.openxmlformats.org/presentationml/2006/main" xmlns:r="http://schemas.openxmlformats.org/officeDocument/2006/relationships">
-  <p:cSld>
-    <p:bg>
-      <p:bgPr>
-        <a:solidFill>
-          <a:srgbClr val="FFFFFF"/>
-        </a:solidFill>
-        <a:effectLst/>
-      </p:bgPr>
-    </p:bg>
-    <p:spTree>
-      <p:nvGrpSpPr>
-        <p:cNvPr id="1" name=""/>
-        <p:cNvGrpSpPr/>
-        <p:nvPr/>
-      </p:nvGrpSpPr>
-      <p:grpSpPr/>
-      <p:sp>
-        <p:nvSpPr>
-          <p:cNvPr id="2" name="TextBox 1"/>
-          <p:cNvSpPr txBox="1"/>
-          <p:nvPr/>
-        </p:nvSpPr>
-        <p:spPr>
-          <a:xfrm>
-            <a:off x="640080" y="411480"/>
-            <a:ext cx="10881360" cy="640080"/>
-          </a:xfrm>
-          <a:prstGeom prst="rect">
-            <a:avLst/>
-          </a:prstGeom>
-          <a:noFill/>
-        </p:spPr>
-        <p:txBody>
-          <a:bodyPr wrap="square">
-            <a:spAutoFit/>
-          </a:bodyPr>
-          <a:lstStyle/>
-          <a:p>
-            <a:pPr algn="l">
-              <a:lnSpc>
-                <a:spcPct val="115000"/>
-              </a:lnSpc>
-              <a:spcAft>
-                <a:spcPts val="600"/>
-              </a:spcAft>
-            </a:pPr>
-            <a:r>
-              <a:rPr sz="2800" b="1">
-                <a:solidFill>
-                  <a:srgbClr val="1A1D24"/>
-                </a:solidFill>
-                <a:latin typeface="Segoe UI"/>
-              </a:rPr>
-              <a:t>The supervision bug, explained without maths</a:t>
-            </a:r>
-          </a:p>
-        </p:txBody>
-      </p:sp>
-      <p:sp>
-        <p:nvSpPr>
-          <p:cNvPr id="3" name="Rectangle 2"/>
-          <p:cNvSpPr/>
-          <p:nvPr/>
-        </p:nvSpPr>
-        <p:spPr>
-          <a:xfrm>
-            <a:off x="640080" y="1051560"/>
-            <a:ext cx="1463040" cy="38100"/>
-          </a:xfrm>
-          <a:prstGeom prst="rect">
-            <a:avLst/>
-          </a:prstGeom>
-          <a:solidFill>
-            <a:srgbClr val="1F6FD4"/>
-          </a:solidFill>
-          <a:ln>
-            <a:noFill/>
-          </a:ln>
-          <a:effectLst/>
-        </p:spPr>
-        <p:style>
-          <a:lnRef idx="1">
-            <a:schemeClr val="accent1"/>
-          </a:lnRef>
-          <a:fillRef idx="3">
-            <a:schemeClr val="accent1"/>
-          </a:fillRef>
-          <a:effectRef idx="2">
-            <a:schemeClr val="accent1"/>
-          </a:effectRef>
-          <a:fontRef idx="minor">
-            <a:schemeClr val="lt1"/>
-          </a:fontRef>
-        </p:style>
-        <p:txBody>
-          <a:bodyPr rtlCol="0" anchor="ctr"/>
-          <a:lstStyle/>
-          <a:p>
-            <a:pPr algn="ctr"/>
-          </a:p>
-        </p:txBody>
-      </p:sp>
-      <p:sp>
-        <p:nvSpPr>
-          <p:cNvPr id="4" name="TextBox 3"/>
-          <p:cNvSpPr txBox="1"/>
-          <p:nvPr/>
-        </p:nvSpPr>
-        <p:spPr>
-          <a:xfrm>
-            <a:off x="685800" y="1371600"/>
-            <a:ext cx="10789920" cy="4297680"/>
-          </a:xfrm>
-          <a:prstGeom prst="rect">
-            <a:avLst/>
-          </a:prstGeom>
-          <a:noFill/>
-        </p:spPr>
-        <p:txBody>
-          <a:bodyPr wrap="square">
-            <a:spAutoFit/>
-          </a:bodyPr>
-          <a:lstStyle/>
-          <a:p>
-            <a:pPr algn="l">
-              <a:lnSpc>
-                <a:spcPct val="115000"/>
-              </a:lnSpc>
-              <a:spcAft>
-                <a:spcPts val="1000"/>
-              </a:spcAft>
-            </a:pPr>
-            <a:r>
-              <a:rPr sz="1800" b="0">
-                <a:solidFill>
-                  <a:srgbClr val="1A1D24"/>
-                </a:solidFill>
-                <a:latin typeface="Segoe UI"/>
-              </a:rPr>
-              <a:t>We have ~1000 'noise levels' and about 5 'detail levels' per sentence.</a:t>
-            </a:r>
-          </a:p>
-          <a:p>
-            <a:pPr algn="l">
-              <a:lnSpc>
-                <a:spcPct val="115000"/>
-              </a:lnSpc>
-              <a:spcAft>
-                <a:spcPts val="1000"/>
-              </a:spcAft>
-            </a:pPr>
-          </a:p>
-          <a:p>
-            <a:pPr algn="l">
-              <a:lnSpc>
-                <a:spcPct val="115000"/>
-              </a:lnSpc>
-              <a:spcAft>
-                <a:spcPts val="1000"/>
-              </a:spcAft>
-            </a:pPr>
-            <a:r>
-              <a:rPr sz="1800" b="0">
-                <a:solidFill>
-                  <a:srgbClr val="1A1D24"/>
-                </a:solidFill>
-                <a:latin typeface="Segoe UI"/>
-              </a:rPr>
-              <a:t>The old rule mapped noise level to detail level by dividing by 100 — which assumes 10 detail levels, not 5.</a:t>
-            </a:r>
-          </a:p>
-          <a:p>
-            <a:pPr algn="l">
-              <a:lnSpc>
-                <a:spcPct val="115000"/>
-              </a:lnSpc>
-              <a:spcAft>
-                <a:spcPts val="1000"/>
-              </a:spcAft>
-            </a:pPr>
-          </a:p>
-          <a:p>
-            <a:pPr algn="l">
-              <a:lnSpc>
-                <a:spcPct val="115000"/>
-              </a:lnSpc>
-              <a:spcAft>
-                <a:spcPts val="1000"/>
-              </a:spcAft>
-            </a:pPr>
-            <a:r>
-              <a:rPr sz="1800" b="0">
-                <a:solidFill>
-                  <a:srgbClr val="1A1D24"/>
-                </a:solidFill>
-                <a:latin typeface="Segoe UI"/>
-              </a:rPr>
-              <a:t>Result: roughly 6 out of every 10 training steps asked for the SAME most-abstract answer, whatever the noise level was.</a:t>
-            </a:r>
-          </a:p>
-          <a:p>
-            <a:pPr algn="l">
-              <a:lnSpc>
-                <a:spcPct val="115000"/>
-              </a:lnSpc>
-              <a:spcAft>
-                <a:spcPts val="1000"/>
-              </a:spcAft>
-            </a:pPr>
-          </a:p>
-          <a:p>
-            <a:pPr algn="l">
-              <a:lnSpc>
-                <a:spcPct val="115000"/>
-              </a:lnSpc>
-              <a:spcAft>
-                <a:spcPts val="1000"/>
-              </a:spcAft>
-            </a:pPr>
-            <a:r>
-              <a:rPr sz="1800" b="0">
-                <a:solidFill>
-                  <a:srgbClr val="1A1D24"/>
-                </a:solidFill>
-                <a:latin typeface="Segoe UI"/>
-              </a:rPr>
-              <a:t>So the model was effectively taught two settings — 'slightly vague' and 'very vague' — and nothing in between. The in-between is the entire product.</a:t>
-            </a:r>
-          </a:p>
-          <a:p>
-            <a:pPr algn="l">
-              <a:lnSpc>
-                <a:spcPct val="115000"/>
-              </a:lnSpc>
-              <a:spcAft>
-                <a:spcPts val="1000"/>
-              </a:spcAft>
-            </a:pPr>
-          </a:p>
-          <a:p>
-            <a:pPr algn="l">
-              <a:lnSpc>
-                <a:spcPct val="115000"/>
-              </a:lnSpc>
-              <a:spcAft>
-                <a:spcPts val="1000"/>
-              </a:spcAft>
-            </a:pPr>
-            <a:r>
-              <a:rPr sz="1800" b="0">
-                <a:solidFill>
-                  <a:srgbClr val="1A1D24"/>
-                </a:solidFill>
-                <a:latin typeface="Segoe UI"/>
-              </a:rPr>
-              <a:t>Fix: every detail level now owns an equal slice of the noise range, computed per sentence, and we deliberately sample each level equally often.</a:t>
-            </a:r>
-          </a:p>
-        </p:txBody>
-      </p:sp>
-      <p:sp>
-        <p:nvSpPr>
-          <p:cNvPr id="5" name="TextBox 4"/>
-          <p:cNvSpPr txBox="1"/>
-          <p:nvPr/>
-        </p:nvSpPr>
-        <p:spPr>
-          <a:xfrm>
-            <a:off x="685800" y="5806440"/>
-            <a:ext cx="10789920" cy="731520"/>
-          </a:xfrm>
-          <a:prstGeom prst="rect">
-            <a:avLst/>
-          </a:prstGeom>
-          <a:noFill/>
-        </p:spPr>
-        <p:txBody>
-          <a:bodyPr wrap="square">
-            <a:spAutoFit/>
-          </a:bodyPr>
-          <a:lstStyle/>
-          <a:p>
-            <a:pPr algn="l">
-              <a:lnSpc>
-                <a:spcPct val="115000"/>
-              </a:lnSpc>
-              <a:spcAft>
-                <a:spcPts val="600"/>
-              </a:spcAft>
-            </a:pPr>
-            <a:r>
-              <a:rPr sz="1500" b="0">
-                <a:solidFill>
-                  <a:srgbClr val="5F6B7A"/>
-                </a:solidFill>
-                <a:latin typeface="Segoe UI"/>
-              </a:rPr>
-              <a:t>Measured: old rule 51% of steps on the last rung; new rule 17% (= 1/6, which is exactly even). Verified by an automated test.</a:t>
-            </a:r>
-          </a:p>
-        </p:txBody>
-      </p:sp>
-    </p:spTree>
-  </p:cSld>
-  <p:clrMapOvr>
-    <a:masterClrMapping/>
-  </p:clrMapOvr>
-</p:sld>
-</file>
-
-<file path=ppt/slides/slide6.xml><?xml version="1.0" encoding="utf-8"?>
-<p:sld xmlns:a="http://schemas.openxmlformats.org/drawingml/2006/main" xmlns:p="http://schemas.openxmlformats.org/presentationml/2006/main" xmlns:r="http://schemas.openxmlformats.org/officeDocument/2006/relationships">
-  <p:cSld>
-    <p:bg>
-      <p:bgPr>
-        <a:solidFill>
-          <a:srgbClr val="FFFFFF"/>
-        </a:solidFill>
-        <a:effectLst/>
-      </p:bgPr>
-    </p:bg>
-    <p:spTree>
-      <p:nvGrpSpPr>
-        <p:cNvPr id="1" name=""/>
-        <p:cNvGrpSpPr/>
-        <p:nvPr/>
-      </p:nvGrpSpPr>
-      <p:grpSpPr/>
-      <p:sp>
-        <p:nvSpPr>
-          <p:cNvPr id="2" name="Rectangle 1"/>
-          <p:cNvSpPr/>
-          <p:nvPr/>
-        </p:nvSpPr>
-        <p:spPr>
-          <a:xfrm>
-            <a:off x="0" y="2194560"/>
-            <a:ext cx="12191695" cy="1828800"/>
-          </a:xfrm>
-          <a:prstGeom prst="rect">
-            <a:avLst/>
-          </a:prstGeom>
-          <a:solidFill>
-            <a:srgbClr val="F2F5F9"/>
-          </a:solidFill>
-          <a:ln>
-            <a:noFill/>
-          </a:ln>
-          <a:effectLst/>
-        </p:spPr>
-        <p:style>
-          <a:lnRef idx="1">
-            <a:schemeClr val="accent1"/>
-          </a:lnRef>
-          <a:fillRef idx="3">
-            <a:schemeClr val="accent1"/>
-          </a:fillRef>
-          <a:effectRef idx="2">
-            <a:schemeClr val="accent1"/>
-          </a:effectRef>
-          <a:fontRef idx="minor">
-            <a:schemeClr val="lt1"/>
-          </a:fontRef>
-        </p:style>
-        <p:txBody>
-          <a:bodyPr rtlCol="0" anchor="ctr"/>
-          <a:lstStyle/>
-          <a:p>
-            <a:pPr algn="ctr"/>
-          </a:p>
-        </p:txBody>
-      </p:sp>
-      <p:sp>
-        <p:nvSpPr>
-          <p:cNvPr id="3" name="TextBox 2"/>
-          <p:cNvSpPr txBox="1"/>
-          <p:nvPr/>
-        </p:nvSpPr>
-        <p:spPr>
-          <a:xfrm>
-            <a:off x="822960" y="2423160"/>
-            <a:ext cx="10515600" cy="365760"/>
-          </a:xfrm>
-          <a:prstGeom prst="rect">
-            <a:avLst/>
-          </a:prstGeom>
-          <a:noFill/>
-        </p:spPr>
-        <p:txBody>
-          <a:bodyPr wrap="square">
-            <a:spAutoFit/>
-          </a:bodyPr>
-          <a:lstStyle/>
-          <a:p>
-            <a:pPr algn="l">
-              <a:lnSpc>
-                <a:spcPct val="115000"/>
-              </a:lnSpc>
-              <a:spcAft>
-                <a:spcPts val="600"/>
-              </a:spcAft>
-            </a:pPr>
-            <a:r>
-              <a:rPr sz="1500" b="1">
-                <a:solidFill>
-                  <a:srgbClr val="1F6FD4"/>
-                </a:solidFill>
-                <a:latin typeface="Segoe UI"/>
-              </a:rPr>
-              <a:t>PART 2</a:t>
-            </a:r>
-          </a:p>
-        </p:txBody>
-      </p:sp>
-      <p:sp>
-        <p:nvSpPr>
-          <p:cNvPr id="4" name="TextBox 3"/>
-          <p:cNvSpPr txBox="1"/>
-          <p:nvPr/>
-        </p:nvSpPr>
-        <p:spPr>
-          <a:xfrm>
-            <a:off x="822960" y="2788920"/>
-            <a:ext cx="10515600" cy="914400"/>
-          </a:xfrm>
-          <a:prstGeom prst="rect">
-            <a:avLst/>
-          </a:prstGeom>
-          <a:noFill/>
-        </p:spPr>
-        <p:txBody>
-          <a:bodyPr wrap="square">
-            <a:spAutoFit/>
-          </a:bodyPr>
-          <a:lstStyle/>
-          <a:p>
-            <a:pPr algn="l">
-              <a:lnSpc>
-                <a:spcPct val="115000"/>
-              </a:lnSpc>
-              <a:spcAft>
-                <a:spcPts val="600"/>
-              </a:spcAft>
-            </a:pPr>
-            <a:r>
-              <a:rPr sz="3400" b="1">
-                <a:solidFill>
-                  <a:srgbClr val="1A1D24"/>
-                </a:solidFill>
-                <a:latin typeface="Segoe UI"/>
-              </a:rPr>
-              <a:t>Results we already have — no GPU needed</a:t>
-            </a:r>
-          </a:p>
-        </p:txBody>
-      </p:sp>
-    </p:spTree>
-  </p:cSld>
-  <p:clrMapOvr>
-    <a:masterClrMapping/>
-  </p:clrMapOvr>
-</p:sld>
-</file>
-
-<file path=ppt/slides/slide7.xml><?xml version="1.0" encoding="utf-8"?>
-<p:sld xmlns:a="http://schemas.openxmlformats.org/drawingml/2006/main" xmlns:p="http://schemas.openxmlformats.org/presentationml/2006/main" xmlns:r="http://schemas.openxmlformats.org/officeDocument/2006/relationships">
-  <p:cSld>
-    <p:bg>
-      <p:bgPr>
-        <a:solidFill>
-          <a:srgbClr val="FFFFFF"/>
-        </a:solidFill>
-        <a:effectLst/>
-      </p:bgPr>
-    </p:bg>
-    <p:spTree>
-      <p:nvGrpSpPr>
-        <p:cNvPr id="1" name=""/>
-        <p:cNvGrpSpPr/>
-        <p:nvPr/>
-      </p:nvGrpSpPr>
-      <p:grpSpPr/>
-      <p:sp>
-        <p:nvSpPr>
-          <p:cNvPr id="2" name="TextBox 1"/>
-          <p:cNvSpPr txBox="1"/>
-          <p:nvPr/>
-        </p:nvSpPr>
-        <p:spPr>
-          <a:xfrm>
-            <a:off x="640080" y="411480"/>
-            <a:ext cx="10881360" cy="640080"/>
-          </a:xfrm>
-          <a:prstGeom prst="rect">
-            <a:avLst/>
-          </a:prstGeom>
-          <a:noFill/>
-        </p:spPr>
-        <p:txBody>
-          <a:bodyPr wrap="square">
-            <a:spAutoFit/>
-          </a:bodyPr>
-          <a:lstStyle/>
-          <a:p>
-            <a:pPr algn="l">
-              <a:lnSpc>
-                <a:spcPct val="115000"/>
-              </a:lnSpc>
-              <a:spcAft>
-                <a:spcPts val="600"/>
-              </a:spcAft>
-            </a:pPr>
-            <a:r>
-              <a:rPr sz="2800" b="1">
-                <a:solidFill>
-                  <a:srgbClr val="1A1D24"/>
-                </a:solidFill>
-                <a:latin typeface="Segoe UI"/>
-              </a:rPr>
-              <a:t>GATE 1: how good is our training data, really?</a:t>
-            </a:r>
-          </a:p>
-        </p:txBody>
-      </p:sp>
-      <p:sp>
-        <p:nvSpPr>
-          <p:cNvPr id="3" name="Rectangle 2"/>
-          <p:cNvSpPr/>
-          <p:nvPr/>
-        </p:nvSpPr>
-        <p:spPr>
-          <a:xfrm>
-            <a:off x="640080" y="1051560"/>
-            <a:ext cx="1463040" cy="38100"/>
-          </a:xfrm>
-          <a:prstGeom prst="rect">
-            <a:avLst/>
-          </a:prstGeom>
-          <a:solidFill>
-            <a:srgbClr val="1F6FD4"/>
-          </a:solidFill>
-          <a:ln>
-            <a:noFill/>
-          </a:ln>
-          <a:effectLst/>
-        </p:spPr>
-        <p:style>
-          <a:lnRef idx="1">
-            <a:schemeClr val="accent1"/>
-          </a:lnRef>
-          <a:fillRef idx="3">
-            <a:schemeClr val="accent1"/>
-          </a:fillRef>
-          <a:effectRef idx="2">
-            <a:schemeClr val="accent1"/>
-          </a:effectRef>
-          <a:fontRef idx="minor">
-            <a:schemeClr val="lt1"/>
-          </a:fontRef>
-        </p:style>
-        <p:txBody>
-          <a:bodyPr rtlCol="0" anchor="ctr"/>
-          <a:lstStyle/>
-          <a:p>
-            <a:pPr algn="ctr"/>
-          </a:p>
-        </p:txBody>
-      </p:sp>
-      <p:graphicFrame>
-        <p:nvGraphicFramePr>
-          <p:cNvPr id="4" name="Table 3"/>
-          <p:cNvGraphicFramePr>
-            <a:graphicFrameLocks noGrp="1"/>
-          </p:cNvGraphicFramePr>
-          <p:nvPr/>
-        </p:nvGraphicFramePr>
-        <p:xfrm>
-          <a:off x="640080" y="1371600"/>
-          <a:ext cx="10881360" cy="1719072"/>
-        </p:xfrm>
-        <a:graphic>
-          <a:graphicData uri="http://schemas.openxmlformats.org/drawingml/2006/table">
-            <a:tbl>
-              <a:tblPr firstRow="1" bandRow="1">
-                <a:tableStyleId>{5C22544A-7EE6-4342-B048-85BDC9FD1C3A}</a:tableStyleId>
-              </a:tblPr>
-              <a:tblGrid>
-                <a:gridCol w="3989832"/>
-                <a:gridCol w="1722882"/>
-                <a:gridCol w="1722882"/>
-                <a:gridCol w="1722882"/>
-                <a:gridCol w="1722882"/>
+                <a:gridCol w="3989832">
+                  <a:extLst>
+                    <a:ext uri="{9D8B030D-6E8A-4147-A177-3AD203B41FA5}">
+                      <a16:colId xmlns:a16="http://schemas.microsoft.com/office/drawing/2014/main" val="20000"/>
+                    </a:ext>
+                  </a:extLst>
+                </a:gridCol>
+                <a:gridCol w="1722882">
+                  <a:extLst>
+                    <a:ext uri="{9D8B030D-6E8A-4147-A177-3AD203B41FA5}">
+                      <a16:colId xmlns:a16="http://schemas.microsoft.com/office/drawing/2014/main" val="20001"/>
+                    </a:ext>
+                  </a:extLst>
+                </a:gridCol>
+                <a:gridCol w="1722882">
+                  <a:extLst>
+                    <a:ext uri="{9D8B030D-6E8A-4147-A177-3AD203B41FA5}">
+                      <a16:colId xmlns:a16="http://schemas.microsoft.com/office/drawing/2014/main" val="20002"/>
+                    </a:ext>
+                  </a:extLst>
+                </a:gridCol>
+                <a:gridCol w="1722882">
+                  <a:extLst>
+                    <a:ext uri="{9D8B030D-6E8A-4147-A177-3AD203B41FA5}">
+                      <a16:colId xmlns:a16="http://schemas.microsoft.com/office/drawing/2014/main" val="20003"/>
+                    </a:ext>
+                  </a:extLst>
+                </a:gridCol>
+                <a:gridCol w="1722882">
+                  <a:extLst>
+                    <a:ext uri="{9D8B030D-6E8A-4147-A177-3AD203B41FA5}">
+                      <a16:colId xmlns:a16="http://schemas.microsoft.com/office/drawing/2014/main" val="20004"/>
+                    </a:ext>
+                  </a:extLst>
+                </a:gridCol>
               </a:tblGrid>
               <a:tr h="429768">
                 <a:tc>
@@ -9889,6 +9360,11 @@
                     </a:solidFill>
                   </a:tcPr>
                 </a:tc>
+                <a:extLst>
+                  <a:ext uri="{0D108BD9-81ED-4DB2-BD59-A6C34878D82A}">
+                    <a16:rowId xmlns:a16="http://schemas.microsoft.com/office/drawing/2014/main" val="10000"/>
+                  </a:ext>
+                </a:extLst>
               </a:tr>
               <a:tr h="429768">
                 <a:tc>
@@ -10006,6 +9482,11 @@
                     </a:solidFill>
                   </a:tcPr>
                 </a:tc>
+                <a:extLst>
+                  <a:ext uri="{0D108BD9-81ED-4DB2-BD59-A6C34878D82A}">
+                    <a16:rowId xmlns:a16="http://schemas.microsoft.com/office/drawing/2014/main" val="10001"/>
+                  </a:ext>
+                </a:extLst>
               </a:tr>
               <a:tr h="429768">
                 <a:tc>
@@ -10015,7 +9496,7 @@
                     <a:p>
                       <a:pPr algn="l"/>
                       <a:r>
-                        <a:rPr sz="1400" b="0">
+                        <a:rPr sz="1400" b="0" dirty="0">
                           <a:solidFill>
                             <a:srgbClr val="1A1D24"/>
                           </a:solidFill>
@@ -10123,6 +9604,11 @@
                     </a:solidFill>
                   </a:tcPr>
                 </a:tc>
+                <a:extLst>
+                  <a:ext uri="{0D108BD9-81ED-4DB2-BD59-A6C34878D82A}">
+                    <a16:rowId xmlns:a16="http://schemas.microsoft.com/office/drawing/2014/main" val="10002"/>
+                  </a:ext>
+                </a:extLst>
               </a:tr>
               <a:tr h="429768">
                 <a:tc>
@@ -10224,7 +9710,7 @@
                     <a:p>
                       <a:pPr algn="ctr"/>
                       <a:r>
-                        <a:rPr sz="1400" b="1">
+                        <a:rPr sz="1400" b="1" dirty="0">
                           <a:solidFill>
                             <a:srgbClr val="B32D2D"/>
                           </a:solidFill>
@@ -10240,53 +9726,16 @@
                     </a:solidFill>
                   </a:tcPr>
                 </a:tc>
+                <a:extLst>
+                  <a:ext uri="{0D108BD9-81ED-4DB2-BD59-A6C34878D82A}">
+                    <a16:rowId xmlns:a16="http://schemas.microsoft.com/office/drawing/2014/main" val="10003"/>
+                  </a:ext>
+                </a:extLst>
               </a:tr>
             </a:tbl>
           </a:graphicData>
         </a:graphic>
       </p:graphicFrame>
-      <p:sp>
-        <p:nvSpPr>
-          <p:cNvPr id="5" name="TextBox 4"/>
-          <p:cNvSpPr txBox="1"/>
-          <p:nvPr/>
-        </p:nvSpPr>
-        <p:spPr>
-          <a:xfrm>
-            <a:off x="640080" y="3136392"/>
-            <a:ext cx="10881360" cy="914400"/>
-          </a:xfrm>
-          <a:prstGeom prst="rect">
-            <a:avLst/>
-          </a:prstGeom>
-          <a:noFill/>
-        </p:spPr>
-        <p:txBody>
-          <a:bodyPr wrap="square">
-            <a:spAutoFit/>
-          </a:bodyPr>
-          <a:lstStyle/>
-          <a:p>
-            <a:pPr algn="l">
-              <a:lnSpc>
-                <a:spcPct val="115000"/>
-              </a:lnSpc>
-              <a:spcAft>
-                <a:spcPts val="600"/>
-              </a:spcAft>
-            </a:pPr>
-            <a:r>
-              <a:rPr sz="1500" b="0">
-                <a:solidFill>
-                  <a:srgbClr val="5F6B7A"/>
-                </a:solidFill>
-                <a:latin typeface="Segoe UI"/>
-              </a:rPr>
-              <a:t>Read this as: our best model so far scored 0.325 on column 1, and the data's ceiling is 0.92 — so this is a MODELLING problem, not a data problem. Green light to train.</a:t>
-            </a:r>
-          </a:p>
-        </p:txBody>
-      </p:sp>
     </p:spTree>
   </p:cSld>
   <p:clrMapOvr>
@@ -10296,7 +9745,7 @@
 </file>
 
 <file path=ppt/slides/slide8.xml><?xml version="1.0" encoding="utf-8"?>
-<p:sld xmlns:a="http://schemas.openxmlformats.org/drawingml/2006/main" xmlns:p="http://schemas.openxmlformats.org/presentationml/2006/main" xmlns:r="http://schemas.openxmlformats.org/officeDocument/2006/relationships">
+<p:sld xmlns:a="http://schemas.openxmlformats.org/drawingml/2006/main" xmlns:r="http://schemas.openxmlformats.org/officeDocument/2006/relationships" xmlns:p="http://schemas.openxmlformats.org/presentationml/2006/main">
   <p:cSld>
     <p:bg>
       <p:bgPr>
@@ -10312,7 +9761,176 @@
         <p:cNvGrpSpPr/>
         <p:nvPr/>
       </p:nvGrpSpPr>
-      <p:grpSpPr/>
+      <p:grpSpPr>
+        <a:xfrm>
+          <a:off x="0" y="0"/>
+          <a:ext cx="0" cy="0"/>
+          <a:chOff x="0" y="0"/>
+          <a:chExt cx="0" cy="0"/>
+        </a:xfrm>
+      </p:grpSpPr>
+      <p:sp>
+        <p:nvSpPr>
+          <p:cNvPr id="2" name="Rectangle 1"/>
+          <p:cNvSpPr/>
+          <p:nvPr/>
+        </p:nvSpPr>
+        <p:spPr>
+          <a:xfrm>
+            <a:off x="0" y="2194560"/>
+            <a:ext cx="12191695" cy="1828800"/>
+          </a:xfrm>
+          <a:prstGeom prst="rect">
+            <a:avLst/>
+          </a:prstGeom>
+          <a:solidFill>
+            <a:srgbClr val="F2F5F9"/>
+          </a:solidFill>
+          <a:ln>
+            <a:noFill/>
+          </a:ln>
+          <a:effectLst/>
+        </p:spPr>
+        <p:style>
+          <a:lnRef idx="1">
+            <a:schemeClr val="accent1"/>
+          </a:lnRef>
+          <a:fillRef idx="3">
+            <a:schemeClr val="accent1"/>
+          </a:fillRef>
+          <a:effectRef idx="2">
+            <a:schemeClr val="accent1"/>
+          </a:effectRef>
+          <a:fontRef idx="minor">
+            <a:schemeClr val="lt1"/>
+          </a:fontRef>
+        </p:style>
+        <p:txBody>
+          <a:bodyPr rtlCol="0" anchor="ctr"/>
+          <a:lstStyle/>
+          <a:p>
+            <a:pPr algn="ctr"/>
+            <a:endParaRPr/>
+          </a:p>
+        </p:txBody>
+      </p:sp>
+      <p:sp>
+        <p:nvSpPr>
+          <p:cNvPr id="3" name="TextBox 2"/>
+          <p:cNvSpPr txBox="1"/>
+          <p:nvPr/>
+        </p:nvSpPr>
+        <p:spPr>
+          <a:xfrm>
+            <a:off x="822960" y="2423160"/>
+            <a:ext cx="10515600" cy="365760"/>
+          </a:xfrm>
+          <a:prstGeom prst="rect">
+            <a:avLst/>
+          </a:prstGeom>
+          <a:noFill/>
+        </p:spPr>
+        <p:txBody>
+          <a:bodyPr wrap="square">
+            <a:spAutoFit/>
+          </a:bodyPr>
+          <a:lstStyle/>
+          <a:p>
+            <a:pPr algn="l">
+              <a:lnSpc>
+                <a:spcPct val="115000"/>
+              </a:lnSpc>
+              <a:spcAft>
+                <a:spcPts val="600"/>
+              </a:spcAft>
+            </a:pPr>
+            <a:r>
+              <a:rPr sz="1500" b="1">
+                <a:solidFill>
+                  <a:srgbClr val="1F6FD4"/>
+                </a:solidFill>
+                <a:latin typeface="Segoe UI"/>
+              </a:rPr>
+              <a:t>PART 3</a:t>
+            </a:r>
+          </a:p>
+        </p:txBody>
+      </p:sp>
+      <p:sp>
+        <p:nvSpPr>
+          <p:cNvPr id="4" name="TextBox 3"/>
+          <p:cNvSpPr txBox="1"/>
+          <p:nvPr/>
+        </p:nvSpPr>
+        <p:spPr>
+          <a:xfrm>
+            <a:off x="822960" y="2788920"/>
+            <a:ext cx="10515600" cy="914400"/>
+          </a:xfrm>
+          <a:prstGeom prst="rect">
+            <a:avLst/>
+          </a:prstGeom>
+          <a:noFill/>
+        </p:spPr>
+        <p:txBody>
+          <a:bodyPr wrap="square">
+            <a:spAutoFit/>
+          </a:bodyPr>
+          <a:lstStyle/>
+          <a:p>
+            <a:pPr algn="l">
+              <a:lnSpc>
+                <a:spcPct val="115000"/>
+              </a:lnSpc>
+              <a:spcAft>
+                <a:spcPts val="600"/>
+              </a:spcAft>
+            </a:pPr>
+            <a:r>
+              <a:rPr sz="3400" b="1">
+                <a:solidFill>
+                  <a:srgbClr val="1A1D24"/>
+                </a:solidFill>
+                <a:latin typeface="Segoe UI"/>
+              </a:rPr>
+              <a:t>What we rebuilt, and why</a:t>
+            </a:r>
+          </a:p>
+        </p:txBody>
+      </p:sp>
+    </p:spTree>
+  </p:cSld>
+  <p:clrMapOvr>
+    <a:masterClrMapping/>
+  </p:clrMapOvr>
+</p:sld>
+</file>
+
+<file path=ppt/slides/slide9.xml><?xml version="1.0" encoding="utf-8"?>
+<p:sld xmlns:a="http://schemas.openxmlformats.org/drawingml/2006/main" xmlns:r="http://schemas.openxmlformats.org/officeDocument/2006/relationships" xmlns:p="http://schemas.openxmlformats.org/presentationml/2006/main">
+  <p:cSld>
+    <p:bg>
+      <p:bgPr>
+        <a:solidFill>
+          <a:srgbClr val="FFFFFF"/>
+        </a:solidFill>
+        <a:effectLst/>
+      </p:bgPr>
+    </p:bg>
+    <p:spTree>
+      <p:nvGrpSpPr>
+        <p:cNvPr id="1" name=""/>
+        <p:cNvGrpSpPr/>
+        <p:nvPr/>
+      </p:nvGrpSpPr>
+      <p:grpSpPr>
+        <a:xfrm>
+          <a:off x="0" y="0"/>
+          <a:ext cx="0" cy="0"/>
+          <a:chOff x="0" y="0"/>
+          <a:chExt cx="0" cy="0"/>
+        </a:xfrm>
+      </p:grpSpPr>
       <p:sp>
         <p:nvSpPr>
           <p:cNvPr id="2" name="TextBox 1"/>
@@ -10350,7 +9968,7 @@
                 </a:solidFill>
                 <a:latin typeface="Segoe UI"/>
               </a:rPr>
-              <a:t>But the same table killed our headline claim</a:t>
+              <a:t>The memory itself: gist vs details</a:t>
             </a:r>
           </a:p>
         </p:txBody>
@@ -10396,6 +10014,7 @@
           <a:lstStyle/>
           <a:p>
             <a:pPr algn="ctr"/>
+            <a:endParaRPr/>
           </a:p>
         </p:txBody>
       </p:sp>
@@ -10407,166 +10026,8 @@
         </p:nvSpPr>
         <p:spPr>
           <a:xfrm>
-            <a:off x="685800" y="1371600"/>
-            <a:ext cx="10789920" cy="4297680"/>
-          </a:xfrm>
-          <a:prstGeom prst="rect">
-            <a:avLst/>
-          </a:prstGeom>
-          <a:noFill/>
-        </p:spPr>
-        <p:txBody>
-          <a:bodyPr wrap="square">
-            <a:spAutoFit/>
-          </a:bodyPr>
-          <a:lstStyle/>
-          <a:p>
-            <a:pPr algn="l">
-              <a:lnSpc>
-                <a:spcPct val="115000"/>
-              </a:lnSpc>
-              <a:spcAft>
-                <a:spcPts val="1000"/>
-              </a:spcAft>
-            </a:pPr>
-            <a:r>
-              <a:rPr sz="1800" b="0">
-                <a:solidFill>
-                  <a:srgbClr val="1A1D24"/>
-                </a:solidFill>
-                <a:latin typeface="Segoe UI"/>
-              </a:rPr>
-              <a:t>We wanted to claim: 'each vaguer answer never adds anything the detailed one didn't say' — so stopping early is safe.</a:t>
-            </a:r>
-          </a:p>
-          <a:p>
-            <a:pPr algn="l">
-              <a:lnSpc>
-                <a:spcPct val="115000"/>
-              </a:lnSpc>
-              <a:spcAft>
-                <a:spcPts val="1000"/>
-              </a:spcAft>
-            </a:pPr>
-          </a:p>
-          <a:p>
-            <a:pPr algn="l">
-              <a:lnSpc>
-                <a:spcPct val="115000"/>
-              </a:lnSpc>
-              <a:spcAft>
-                <a:spcPts val="1000"/>
-              </a:spcAft>
-            </a:pPr>
-            <a:r>
-              <a:rPr sz="1800" b="0">
-                <a:solidFill>
-                  <a:srgbClr val="1A1D24"/>
-                </a:solidFill>
-                <a:latin typeface="Segoe UI"/>
-              </a:rPr>
-              <a:t>Problem 1 — our own gold data only does that 5% of the time. GPT rewrites sentences rather than deleting from them, so new words appear constantly.</a:t>
-            </a:r>
-          </a:p>
-          <a:p>
-            <a:pPr algn="l">
-              <a:lnSpc>
-                <a:spcPct val="115000"/>
-              </a:lnSpc>
-              <a:spcAft>
-                <a:spcPts val="1000"/>
-              </a:spcAft>
-            </a:pPr>
-          </a:p>
-          <a:p>
-            <a:pPr algn="l">
-              <a:lnSpc>
-                <a:spcPct val="115000"/>
-              </a:lnSpc>
-              <a:spcAft>
-                <a:spcPts val="1000"/>
-              </a:spcAft>
-            </a:pPr>
-            <a:r>
-              <a:rPr sz="1800" b="0">
-                <a:solidFill>
-                  <a:srgbClr val="1A1D24"/>
-                </a:solidFill>
-                <a:latin typeface="Segoe UI"/>
-              </a:rPr>
-              <a:t>Problem 2 — plain TRUNCATION scores 0.73 on it. Cutting a sentence in half is trivially 'never adds anything new'. Scissors beat us.</a:t>
-            </a:r>
-          </a:p>
-          <a:p>
-            <a:pPr algn="l">
-              <a:lnSpc>
-                <a:spcPct val="115000"/>
-              </a:lnSpc>
-              <a:spcAft>
-                <a:spcPts val="1000"/>
-              </a:spcAft>
-            </a:pPr>
-          </a:p>
-          <a:p>
-            <a:pPr algn="l">
-              <a:lnSpc>
-                <a:spcPct val="115000"/>
-              </a:lnSpc>
-              <a:spcAft>
-                <a:spcPts val="1000"/>
-              </a:spcAft>
-            </a:pPr>
-            <a:r>
-              <a:rPr sz="1800" b="0">
-                <a:solidFill>
-                  <a:srgbClr val="1A1D24"/>
-                </a:solidFill>
-                <a:latin typeface="Segoe UI"/>
-              </a:rPr>
-              <a:t>So that property alone is not a contribution. But look at the last column: truncation produces a complete sentence only 8% of the time.</a:t>
-            </a:r>
-          </a:p>
-          <a:p>
-            <a:pPr algn="l">
-              <a:lnSpc>
-                <a:spcPct val="115000"/>
-              </a:lnSpc>
-              <a:spcAft>
-                <a:spcPts val="1000"/>
-              </a:spcAft>
-            </a:pPr>
-          </a:p>
-          <a:p>
-            <a:pPr algn="l">
-              <a:lnSpc>
-                <a:spcPct val="115000"/>
-              </a:lnSpc>
-              <a:spcAft>
-                <a:spcPts val="1000"/>
-              </a:spcAft>
-            </a:pPr>
-            <a:r>
-              <a:rPr sz="1800" b="0">
-                <a:solidFill>
-                  <a:srgbClr val="1A1D24"/>
-                </a:solidFill>
-                <a:latin typeface="Segoe UI"/>
-              </a:rPr>
-              <a:t>New headline metric — USABLE: a rung counts only if it is a complete sentence AND adds nothing new AND invents nothing.</a:t>
-            </a:r>
-          </a:p>
-        </p:txBody>
-      </p:sp>
-      <p:sp>
-        <p:nvSpPr>
-          <p:cNvPr id="5" name="TextBox 4"/>
-          <p:cNvSpPr txBox="1"/>
-          <p:nvPr/>
-        </p:nvSpPr>
-        <p:spPr>
-          <a:xfrm>
-            <a:off x="685800" y="5806440"/>
-            <a:ext cx="10789920" cy="731520"/>
+            <a:off x="685800" y="1325880"/>
+            <a:ext cx="5120640" cy="365760"/>
           </a:xfrm>
           <a:prstGeom prst="rect">
             <a:avLst/>
@@ -10588,53 +10049,139 @@
               </a:spcAft>
             </a:pPr>
             <a:r>
-              <a:rPr sz="1500" b="0">
-                <a:solidFill>
-                  <a:srgbClr val="5F6B7A"/>
+              <a:rPr sz="1700" b="1">
+                <a:solidFill>
+                  <a:srgbClr val="B32D2D"/>
                 </a:solidFill>
                 <a:latin typeface="Segoe UI"/>
               </a:rPr>
-              <a:t>Catching this now, from data, is much cheaper than catching it in review.</a:t>
-            </a:r>
-          </a:p>
-        </p:txBody>
-      </p:sp>
-    </p:spTree>
-  </p:cSld>
-  <p:clrMapOvr>
-    <a:masterClrMapping/>
-  </p:clrMapOvr>
-</p:sld>
-</file>
-
-<file path=ppt/slides/slide9.xml><?xml version="1.0" encoding="utf-8"?>
-<p:sld xmlns:a="http://schemas.openxmlformats.org/drawingml/2006/main" xmlns:p="http://schemas.openxmlformats.org/presentationml/2006/main" xmlns:r="http://schemas.openxmlformats.org/officeDocument/2006/relationships">
-  <p:cSld>
-    <p:bg>
-      <p:bgPr>
-        <a:solidFill>
-          <a:srgbClr val="FFFFFF"/>
-        </a:solidFill>
-        <a:effectLst/>
-      </p:bgPr>
-    </p:bg>
-    <p:spTree>
-      <p:nvGrpSpPr>
-        <p:cNvPr id="1" name=""/>
-        <p:cNvGrpSpPr/>
-        <p:nvPr/>
-      </p:nvGrpSpPr>
-      <p:grpSpPr/>
-      <p:sp>
-        <p:nvSpPr>
-          <p:cNvPr id="2" name="TextBox 1"/>
+              <a:t>Before</a:t>
+            </a:r>
+          </a:p>
+        </p:txBody>
+      </p:sp>
+      <p:sp>
+        <p:nvSpPr>
+          <p:cNvPr id="5" name="TextBox 4"/>
           <p:cNvSpPr txBox="1"/>
           <p:nvPr/>
         </p:nvSpPr>
         <p:spPr>
           <a:xfrm>
-            <a:off x="640080" y="411480"/>
-            <a:ext cx="10881360" cy="640080"/>
+            <a:off x="685800" y="1783080"/>
+            <a:ext cx="5120640" cy="3840480"/>
+          </a:xfrm>
+          <a:prstGeom prst="rect">
+            <a:avLst/>
+          </a:prstGeom>
+          <a:noFill/>
+        </p:spPr>
+        <p:txBody>
+          <a:bodyPr wrap="square">
+            <a:spAutoFit/>
+          </a:bodyPr>
+          <a:lstStyle/>
+          <a:p>
+            <a:pPr algn="l">
+              <a:lnSpc>
+                <a:spcPct val="115000"/>
+              </a:lnSpc>
+              <a:spcAft>
+                <a:spcPts val="900"/>
+              </a:spcAft>
+            </a:pPr>
+            <a:r>
+              <a:rPr sz="1600" b="0">
+                <a:solidFill>
+                  <a:srgbClr val="1A1D24"/>
+                </a:solidFill>
+                <a:latin typeface="Segoe UI"/>
+              </a:rPr>
+              <a:t>The gist and the details were both a single linear layer on the same vector.</a:t>
+            </a:r>
+          </a:p>
+          <a:p>
+            <a:pPr algn="l">
+              <a:lnSpc>
+                <a:spcPct val="115000"/>
+              </a:lnSpc>
+              <a:spcAft>
+                <a:spcPts val="900"/>
+              </a:spcAft>
+            </a:pPr>
+            <a:endParaRPr sz="1600" b="0">
+              <a:solidFill>
+                <a:srgbClr val="1A1D24"/>
+              </a:solidFill>
+              <a:latin typeface="Segoe UI"/>
+            </a:endParaRPr>
+          </a:p>
+          <a:p>
+            <a:pPr algn="l">
+              <a:lnSpc>
+                <a:spcPct val="115000"/>
+              </a:lnSpc>
+              <a:spcAft>
+                <a:spcPts val="900"/>
+              </a:spcAft>
+            </a:pPr>
+            <a:r>
+              <a:rPr sz="1600" b="0">
+                <a:solidFill>
+                  <a:srgbClr val="1A1D24"/>
+                </a:solidFill>
+                <a:latin typeface="Segoe UI"/>
+              </a:rPr>
+              <a:t>So they were not really different things — any separation had to come from the loss, and the only loss was 'rebuild the sentence'.</a:t>
+            </a:r>
+          </a:p>
+          <a:p>
+            <a:pPr algn="l">
+              <a:lnSpc>
+                <a:spcPct val="115000"/>
+              </a:lnSpc>
+              <a:spcAft>
+                <a:spcPts val="900"/>
+              </a:spcAft>
+            </a:pPr>
+            <a:endParaRPr sz="1600" b="0">
+              <a:solidFill>
+                <a:srgbClr val="1A1D24"/>
+              </a:solidFill>
+              <a:latin typeface="Segoe UI"/>
+            </a:endParaRPr>
+          </a:p>
+          <a:p>
+            <a:pPr algn="l">
+              <a:lnSpc>
+                <a:spcPct val="115000"/>
+              </a:lnSpc>
+              <a:spcAft>
+                <a:spcPts val="900"/>
+              </a:spcAft>
+            </a:pPr>
+            <a:r>
+              <a:rPr sz="1600" b="0">
+                <a:solidFill>
+                  <a:srgbClr val="1A1D24"/>
+                </a:solidFill>
+                <a:latin typeface="Segoe UI"/>
+              </a:rPr>
+              <a:t>Nothing ever checked that the gist contained the gist.</a:t>
+            </a:r>
+          </a:p>
+        </p:txBody>
+      </p:sp>
+      <p:sp>
+        <p:nvSpPr>
+          <p:cNvPr id="6" name="TextBox 5"/>
+          <p:cNvSpPr txBox="1"/>
+          <p:nvPr/>
+        </p:nvSpPr>
+        <p:spPr>
+          <a:xfrm>
+            <a:off x="6355080" y="1325880"/>
+            <a:ext cx="5120640" cy="365760"/>
           </a:xfrm>
           <a:prstGeom prst="rect">
             <a:avLst/>
@@ -10656,453 +10203,139 @@
               </a:spcAft>
             </a:pPr>
             <a:r>
-              <a:rPr sz="2800" b="1">
-                <a:solidFill>
-                  <a:srgbClr val="1A1D24"/>
+              <a:rPr sz="1700" b="1">
+                <a:solidFill>
+                  <a:srgbClr val="1B7F4B"/>
                 </a:solidFill>
                 <a:latin typeface="Segoe UI"/>
               </a:rPr>
-              <a:t>The scoreboard the model has to beat</a:t>
-            </a:r>
-          </a:p>
-        </p:txBody>
-      </p:sp>
-      <p:sp>
-        <p:nvSpPr>
-          <p:cNvPr id="3" name="Rectangle 2"/>
-          <p:cNvSpPr/>
+              <a:t>Now</a:t>
+            </a:r>
+          </a:p>
+        </p:txBody>
+      </p:sp>
+      <p:sp>
+        <p:nvSpPr>
+          <p:cNvPr id="7" name="TextBox 6"/>
+          <p:cNvSpPr txBox="1"/>
           <p:nvPr/>
         </p:nvSpPr>
         <p:spPr>
           <a:xfrm>
-            <a:off x="640080" y="1051560"/>
-            <a:ext cx="1463040" cy="38100"/>
+            <a:off x="6355080" y="1783080"/>
+            <a:ext cx="5120640" cy="3840480"/>
           </a:xfrm>
           <a:prstGeom prst="rect">
             <a:avLst/>
           </a:prstGeom>
-          <a:solidFill>
-            <a:srgbClr val="1F6FD4"/>
-          </a:solidFill>
-          <a:ln>
-            <a:noFill/>
-          </a:ln>
-          <a:effectLst/>
+          <a:noFill/>
         </p:spPr>
-        <p:style>
-          <a:lnRef idx="1">
-            <a:schemeClr val="accent1"/>
-          </a:lnRef>
-          <a:fillRef idx="3">
-            <a:schemeClr val="accent1"/>
-          </a:fillRef>
-          <a:effectRef idx="2">
-            <a:schemeClr val="accent1"/>
-          </a:effectRef>
-          <a:fontRef idx="minor">
-            <a:schemeClr val="lt1"/>
-          </a:fontRef>
-        </p:style>
-        <p:txBody>
-          <a:bodyPr rtlCol="0" anchor="ctr"/>
-          <a:lstStyle/>
-          <a:p>
-            <a:pPr algn="ctr"/>
-          </a:p>
-        </p:txBody>
-      </p:sp>
-      <p:graphicFrame>
-        <p:nvGraphicFramePr>
-          <p:cNvPr id="4" name="Table 3"/>
-          <p:cNvGraphicFramePr>
-            <a:graphicFrameLocks noGrp="1"/>
-          </p:cNvGraphicFramePr>
-          <p:nvPr/>
-        </p:nvGraphicFramePr>
-        <p:xfrm>
-          <a:off x="640080" y="1371600"/>
-          <a:ext cx="10881359" cy="2103120"/>
-        </p:xfrm>
-        <a:graphic>
-          <a:graphicData uri="http://schemas.openxmlformats.org/drawingml/2006/table">
-            <a:tbl>
-              <a:tblPr firstRow="1" bandRow="1">
-                <a:tableStyleId>{5C22544A-7EE6-4342-B048-85BDC9FD1C3A}</a:tableStyleId>
-              </a:tblPr>
-              <a:tblGrid>
-                <a:gridCol w="4185138"/>
-                <a:gridCol w="2008866"/>
-                <a:gridCol w="4687355"/>
-              </a:tblGrid>
-              <a:tr h="420624">
-                <a:tc>
-                  <a:txBody>
-                    <a:bodyPr/>
-                    <a:lstStyle/>
-                    <a:p>
-                      <a:pPr algn="l"/>
-                      <a:r>
-                        <a:rPr sz="1400" b="1">
-                          <a:solidFill>
-                            <a:srgbClr val="FFFFFF"/>
-                          </a:solidFill>
-                          <a:latin typeface="Segoe UI"/>
-                        </a:rPr>
-                        <a:t>Approach</a:t>
-                      </a:r>
-                    </a:p>
-                  </a:txBody>
-                  <a:tcPr>
-                    <a:solidFill>
-                      <a:srgbClr val="1A1D24"/>
-                    </a:solidFill>
-                  </a:tcPr>
-                </a:tc>
-                <a:tc>
-                  <a:txBody>
-                    <a:bodyPr/>
-                    <a:lstStyle/>
-                    <a:p>
-                      <a:pPr algn="ctr"/>
-                      <a:r>
-                        <a:rPr sz="1400" b="1">
-                          <a:solidFill>
-                            <a:srgbClr val="FFFFFF"/>
-                          </a:solidFill>
-                          <a:latin typeface="Segoe UI"/>
-                        </a:rPr>
-                        <a:t>USABLE score</a:t>
-                      </a:r>
-                    </a:p>
-                  </a:txBody>
-                  <a:tcPr>
-                    <a:solidFill>
-                      <a:srgbClr val="1A1D24"/>
-                    </a:solidFill>
-                  </a:tcPr>
-                </a:tc>
-                <a:tc>
-                  <a:txBody>
-                    <a:bodyPr/>
-                    <a:lstStyle/>
-                    <a:p>
-                      <a:pPr algn="ctr"/>
-                      <a:r>
-                        <a:rPr sz="1400" b="1">
-                          <a:solidFill>
-                            <a:srgbClr val="FFFFFF"/>
-                          </a:solidFill>
-                          <a:latin typeface="Segoe UI"/>
-                        </a:rPr>
-                        <a:t>What it tells us</a:t>
-                      </a:r>
-                    </a:p>
-                  </a:txBody>
-                  <a:tcPr>
-                    <a:solidFill>
-                      <a:srgbClr val="1A1D24"/>
-                    </a:solidFill>
-                  </a:tcPr>
-                </a:tc>
-              </a:tr>
-              <a:tr h="420624">
-                <a:tc>
-                  <a:txBody>
-                    <a:bodyPr/>
-                    <a:lstStyle/>
-                    <a:p>
-                      <a:pPr algn="l"/>
-                      <a:r>
-                        <a:rPr sz="1400" b="0">
-                          <a:solidFill>
-                            <a:srgbClr val="1A1D24"/>
-                          </a:solidFill>
-                          <a:latin typeface="Segoe UI"/>
-                        </a:rPr>
-                        <a:t>Truncate the sentence</a:t>
-                      </a:r>
-                    </a:p>
-                  </a:txBody>
-                  <a:tcPr>
-                    <a:solidFill>
-                      <a:srgbClr val="FFFFFF"/>
-                    </a:solidFill>
-                  </a:tcPr>
-                </a:tc>
-                <a:tc>
-                  <a:txBody>
-                    <a:bodyPr/>
-                    <a:lstStyle/>
-                    <a:p>
-                      <a:pPr algn="ctr"/>
-                      <a:r>
-                        <a:rPr sz="1400" b="0">
-                          <a:solidFill>
-                            <a:srgbClr val="1A1D24"/>
-                          </a:solidFill>
-                          <a:latin typeface="Segoe UI"/>
-                        </a:rPr>
-                        <a:t>0.08</a:t>
-                      </a:r>
-                    </a:p>
-                  </a:txBody>
-                  <a:tcPr>
-                    <a:solidFill>
-                      <a:srgbClr val="FFFFFF"/>
-                    </a:solidFill>
-                  </a:tcPr>
-                </a:tc>
-                <a:tc>
-                  <a:txBody>
-                    <a:bodyPr/>
-                    <a:lstStyle/>
-                    <a:p>
-                      <a:pPr algn="ctr"/>
-                      <a:r>
-                        <a:rPr sz="1400" b="0">
-                          <a:solidFill>
-                            <a:srgbClr val="1A1D24"/>
-                          </a:solidFill>
-                          <a:latin typeface="Segoe UI"/>
-                        </a:rPr>
-                        <a:t>Trivially consistent, but produces fragments</a:t>
-                      </a:r>
-                    </a:p>
-                  </a:txBody>
-                  <a:tcPr>
-                    <a:solidFill>
-                      <a:srgbClr val="FFFFFF"/>
-                    </a:solidFill>
-                  </a:tcPr>
-                </a:tc>
-              </a:tr>
-              <a:tr h="420624">
-                <a:tc>
-                  <a:txBody>
-                    <a:bodyPr/>
-                    <a:lstStyle/>
-                    <a:p>
-                      <a:pPr algn="l"/>
-                      <a:r>
-                        <a:rPr sz="1400" b="0">
-                          <a:solidFill>
-                            <a:srgbClr val="1A1D24"/>
-                          </a:solidFill>
-                          <a:latin typeface="Segoe UI"/>
-                        </a:rPr>
-                        <a:t>GPT-written ladders (our training data)</a:t>
-                      </a:r>
-                    </a:p>
-                  </a:txBody>
-                  <a:tcPr>
-                    <a:solidFill>
-                      <a:srgbClr val="F2F5F9"/>
-                    </a:solidFill>
-                  </a:tcPr>
-                </a:tc>
-                <a:tc>
-                  <a:txBody>
-                    <a:bodyPr/>
-                    <a:lstStyle/>
-                    <a:p>
-                      <a:pPr algn="ctr"/>
-                      <a:r>
-                        <a:rPr sz="1400" b="0">
-                          <a:solidFill>
-                            <a:srgbClr val="1A1D24"/>
-                          </a:solidFill>
-                          <a:latin typeface="Segoe UI"/>
-                        </a:rPr>
-                        <a:t>0.33</a:t>
-                      </a:r>
-                    </a:p>
-                  </a:txBody>
-                  <a:tcPr>
-                    <a:solidFill>
-                      <a:srgbClr val="F2F5F9"/>
-                    </a:solidFill>
-                  </a:tcPr>
-                </a:tc>
-                <a:tc>
-                  <a:txBody>
-                    <a:bodyPr/>
-                    <a:lstStyle/>
-                    <a:p>
-                      <a:pPr algn="ctr"/>
-                      <a:r>
-                        <a:rPr sz="1400" b="0">
-                          <a:solidFill>
-                            <a:srgbClr val="1A1D24"/>
-                          </a:solidFill>
-                          <a:latin typeface="Segoe UI"/>
-                        </a:rPr>
-                        <a:t>The natural-language target</a:t>
-                      </a:r>
-                    </a:p>
-                  </a:txBody>
-                  <a:tcPr>
-                    <a:solidFill>
-                      <a:srgbClr val="F2F5F9"/>
-                    </a:solidFill>
-                  </a:tcPr>
-                </a:tc>
-              </a:tr>
-              <a:tr h="420624">
-                <a:tc>
-                  <a:txBody>
-                    <a:bodyPr/>
-                    <a:lstStyle/>
-                    <a:p>
-                      <a:pPr algn="l"/>
-                      <a:r>
-                        <a:rPr sz="1400" b="0">
-                          <a:solidFill>
-                            <a:srgbClr val="1A1D24"/>
-                          </a:solidFill>
-                          <a:latin typeface="Segoe UI"/>
-                        </a:rPr>
-                        <a:t>Rule-based ladders (new, built this week)</a:t>
-                      </a:r>
-                    </a:p>
-                  </a:txBody>
-                  <a:tcPr>
-                    <a:solidFill>
-                      <a:srgbClr val="FFFFFF"/>
-                    </a:solidFill>
-                  </a:tcPr>
-                </a:tc>
-                <a:tc>
-                  <a:txBody>
-                    <a:bodyPr/>
-                    <a:lstStyle/>
-                    <a:p>
-                      <a:pPr algn="ctr"/>
-                      <a:r>
-                        <a:rPr sz="1400" b="0">
-                          <a:solidFill>
-                            <a:srgbClr val="1A1D24"/>
-                          </a:solidFill>
-                          <a:latin typeface="Segoe UI"/>
-                        </a:rPr>
-                        <a:t>0.56</a:t>
-                      </a:r>
-                    </a:p>
-                  </a:txBody>
-                  <a:tcPr>
-                    <a:solidFill>
-                      <a:srgbClr val="FFFFFF"/>
-                    </a:solidFill>
-                  </a:tcPr>
-                </a:tc>
-                <a:tc>
-                  <a:txBody>
-                    <a:bodyPr/>
-                    <a:lstStyle/>
-                    <a:p>
-                      <a:pPr algn="ctr"/>
-                      <a:r>
-                        <a:rPr sz="1400" b="0">
-                          <a:solidFill>
-                            <a:srgbClr val="1A1D24"/>
-                          </a:solidFill>
-                          <a:latin typeface="Segoe UI"/>
-                        </a:rPr>
-                        <a:t>Deletion-based, so consistency holds by construction</a:t>
-                      </a:r>
-                    </a:p>
-                  </a:txBody>
-                  <a:tcPr>
-                    <a:solidFill>
-                      <a:srgbClr val="FFFFFF"/>
-                    </a:solidFill>
-                  </a:tcPr>
-                </a:tc>
-              </a:tr>
-              <a:tr h="420624">
-                <a:tc>
-                  <a:txBody>
-                    <a:bodyPr/>
-                    <a:lstStyle/>
-                    <a:p>
-                      <a:pPr algn="l"/>
-                      <a:r>
-                        <a:rPr sz="1400" b="0">
-                          <a:solidFill>
-                            <a:srgbClr val="1A1D24"/>
-                          </a:solidFill>
-                          <a:latin typeface="Segoe UI"/>
-                        </a:rPr>
-                        <a:t>Our model</a:t>
-                      </a:r>
-                    </a:p>
-                  </a:txBody>
-                  <a:tcPr>
-                    <a:solidFill>
-                      <a:srgbClr val="F2F5F9"/>
-                    </a:solidFill>
-                  </a:tcPr>
-                </a:tc>
-                <a:tc>
-                  <a:txBody>
-                    <a:bodyPr/>
-                    <a:lstStyle/>
-                    <a:p>
-                      <a:pPr algn="ctr"/>
-                      <a:r>
-                        <a:rPr sz="1400" b="0">
-                          <a:solidFill>
-                            <a:srgbClr val="1A1D24"/>
-                          </a:solidFill>
-                          <a:latin typeface="Segoe UI"/>
-                        </a:rPr>
-                        <a:t>to be measured</a:t>
-                      </a:r>
-                    </a:p>
-                  </a:txBody>
-                  <a:tcPr>
-                    <a:solidFill>
-                      <a:srgbClr val="F2F5F9"/>
-                    </a:solidFill>
-                  </a:tcPr>
-                </a:tc>
-                <a:tc>
-                  <a:txBody>
-                    <a:bodyPr/>
-                    <a:lstStyle/>
-                    <a:p>
-                      <a:pPr algn="ctr"/>
-                      <a:r>
-                        <a:rPr sz="1400" b="0">
-                          <a:solidFill>
-                            <a:srgbClr val="1A1D24"/>
-                          </a:solidFill>
-                          <a:latin typeface="Segoe UI"/>
-                        </a:rPr>
-                        <a:t>Must clear 0.33 to be interesting</a:t>
-                      </a:r>
-                    </a:p>
-                  </a:txBody>
-                  <a:tcPr>
-                    <a:solidFill>
-                      <a:srgbClr val="F2F5F9"/>
-                    </a:solidFill>
-                  </a:tcPr>
-                </a:tc>
-              </a:tr>
-            </a:tbl>
-          </a:graphicData>
-        </a:graphic>
-      </p:graphicFrame>
-      <p:sp>
-        <p:nvSpPr>
-          <p:cNvPr id="5" name="TextBox 4"/>
+        <p:txBody>
+          <a:bodyPr wrap="square">
+            <a:spAutoFit/>
+          </a:bodyPr>
+          <a:lstStyle/>
+          <a:p>
+            <a:pPr algn="l">
+              <a:lnSpc>
+                <a:spcPct val="115000"/>
+              </a:lnSpc>
+              <a:spcAft>
+                <a:spcPts val="900"/>
+              </a:spcAft>
+            </a:pPr>
+            <a:r>
+              <a:rPr sz="1600" b="0">
+                <a:solidFill>
+                  <a:srgbClr val="1A1D24"/>
+                </a:solidFill>
+                <a:latin typeface="Segoe UI"/>
+              </a:rPr>
+              <a:t>Gist: an attention layer picks WHICH parts matter, then a small network compresses them. Length-normalised so it behaves as a stable cue.</a:t>
+            </a:r>
+          </a:p>
+          <a:p>
+            <a:pPr algn="l">
+              <a:lnSpc>
+                <a:spcPct val="115000"/>
+              </a:lnSpc>
+              <a:spcAft>
+                <a:spcPts val="900"/>
+              </a:spcAft>
+            </a:pPr>
+            <a:endParaRPr sz="1600" b="0">
+              <a:solidFill>
+                <a:srgbClr val="1A1D24"/>
+              </a:solidFill>
+              <a:latin typeface="Segoe UI"/>
+            </a:endParaRPr>
+          </a:p>
+          <a:p>
+            <a:pPr algn="l">
+              <a:lnSpc>
+                <a:spcPct val="115000"/>
+              </a:lnSpc>
+              <a:spcAft>
+                <a:spcPts val="900"/>
+              </a:spcAft>
+            </a:pPr>
+            <a:r>
+              <a:rPr sz="1600" b="0">
+                <a:solidFill>
+                  <a:srgbClr val="1A1D24"/>
+                </a:solidFill>
+                <a:latin typeface="Segoe UI"/>
+              </a:rPr>
+              <a:t>Details: slots can talk to each other, and the output is scale-controlled.</a:t>
+            </a:r>
+          </a:p>
+          <a:p>
+            <a:pPr algn="l">
+              <a:lnSpc>
+                <a:spcPct val="115000"/>
+              </a:lnSpc>
+              <a:spcAft>
+                <a:spcPts val="900"/>
+              </a:spcAft>
+            </a:pPr>
+            <a:endParaRPr sz="1600" b="0">
+              <a:solidFill>
+                <a:srgbClr val="1A1D24"/>
+              </a:solidFill>
+              <a:latin typeface="Segoe UI"/>
+            </a:endParaRPr>
+          </a:p>
+          <a:p>
+            <a:pPr algn="l">
+              <a:lnSpc>
+                <a:spcPct val="115000"/>
+              </a:lnSpc>
+              <a:spcAft>
+                <a:spcPts val="900"/>
+              </a:spcAft>
+            </a:pPr>
+            <a:r>
+              <a:rPr sz="1600" b="0">
+                <a:solidFill>
+                  <a:srgbClr val="1A1D24"/>
+                </a:solidFill>
+                <a:latin typeface="Segoe UI"/>
+              </a:rPr>
+              <a:t>Three new training signals: write the summary from the gist alone; put the gist near an off-the-shelf sentence embedding; keep gist and details from duplicating each other.</a:t>
+            </a:r>
+          </a:p>
+        </p:txBody>
+      </p:sp>
+      <p:sp>
+        <p:nvSpPr>
+          <p:cNvPr id="8" name="TextBox 7"/>
           <p:cNvSpPr txBox="1"/>
           <p:nvPr/>
         </p:nvSpPr>
         <p:spPr>
           <a:xfrm>
-            <a:off x="640080" y="3520440"/>
-            <a:ext cx="10881360" cy="914400"/>
+            <a:off x="685800" y="5852160"/>
+            <a:ext cx="10789920" cy="640080"/>
           </a:xfrm>
           <a:prstGeom prst="rect">
             <a:avLst/>
@@ -11130,7 +10363,7 @@
                 </a:solidFill>
                 <a:latin typeface="Segoe UI"/>
               </a:rPr>
-              <a:t>USABLE = complete sentence AND adds nothing specific that the finer rung lacked AND invents nothing. This is the number to put on the first slide of the paper.</a:t>
+              <a:t>The second of those is the bridge to question answering: if the gist lives in a standard search space, a QUESTION lands next to it for free.</a:t>
             </a:r>
           </a:p>
         </p:txBody>
@@ -11461,4 +10694,10 @@
   </a:objectDefaults>
   <a:extraClrSchemeLst/>
 </a:theme>
+</file>
+
+<file path=docMetadata/LabelInfo.xml><?xml version="1.0" encoding="utf-8"?>
+<clbl:labelList xmlns:clbl="http://schemas.microsoft.com/office/2020/mipLabelMetadata">
+  <clbl:label id="{f42aa342-8706-4288-bd11-ebb85995028c}" enabled="1" method="Standard" siteId="{72f988bf-86f1-41af-91ab-2d7cd011db47}" contentBits="0" removed="0"/>
+</clbl:labelList>
 </file>